--- a/presentation/ТЗ-Ревьюер — промежуточная защита.pptx
+++ b/presentation/ТЗ-Ревьюер — промежуточная защита.pptx
@@ -13,9 +13,10 @@
     <p:sldId id="261" r:id="rId7"/>
     <p:sldId id="262" r:id="rId8"/>
     <p:sldId id="263" r:id="rId9"/>
+    <p:sldId id="264" r:id="rId10"/>
   </p:sldIdLst>
   <p:notesMasterIdLst>
-    <p:notesMasterId r:id="rId10"/>
+    <p:notesMasterId r:id="rId11"/>
   </p:notesMasterIdLst>
   <p:sldSz cx="12192000" cy="6858000"/>
   <p:notesSz cx="6858000" cy="12192000"/>
@@ -509,7 +510,7 @@
           <a:p>
             <a:r>
               <a:rPr lang="en-US" dirty="0"/>
-              <a:t>Промежуточная защита. Проект — AI-инструмент, который делает предварительное ревью ТЗ на потоки и витрины данных до передачи в разработку и показывает аналитику потенциально проблемные места.</a:t>
+              <a:t>Промежуточная защита. Проект — AI-инструмент предварительного ревью ТЗ на потоки и витрины данных: до передачи в разработку показывает аналитику потенциально проблемные места. Не заменяет аналитика и не выносит решение о готовности.</a:t>
             </a:r>
             <a:endParaRPr lang="en-US" dirty="0"/>
           </a:p>
@@ -597,7 +598,7 @@
           <a:p>
             <a:r>
               <a:rPr lang="en-US" dirty="0"/>
-              <a:t>Точной цифры в кейсе нет — показываем структуру издержек. Инструмент бьёт по первому множителю: переносит часть уточнений на этап до разработки, где правка стоит минуты.</a:t>
+              <a:t>Точной цифры в кейсе нет — показываем структуру издержек. Инструмент бьёт по первому множителю: снижает вероятность поздних циклов уточнения, перенося часть вопросов на этап до разработки.</a:t>
             </a:r>
             <a:endParaRPr lang="en-US" dirty="0"/>
           </a:p>
@@ -685,7 +686,7 @@
           <a:p>
             <a:r>
               <a:rPr lang="en-US" dirty="0"/>
-              <a:t>Основной пользователь один — аналитик, который готовит ТЗ. Сценарий короткий, на минуты, single-screen.</a:t>
+              <a:t>Один основной пользователь — аналитик, который готовит ТЗ. Сценарий короткий, один экран. «≤ 2 минуты» — это цель MVP, не измеренный факт; замерим на реальных ТЗ к финалу.</a:t>
             </a:r>
             <a:endParaRPr lang="en-US" dirty="0"/>
           </a:p>
@@ -773,7 +774,7 @@
           <a:p>
             <a:r>
               <a:rPr lang="en-US" dirty="0"/>
-              <a:t>Требования кейса. Главное отличие от «просто спросить LLM» — предметность и привязка к тексту.</a:t>
+              <a:t>Требования кейса. Главное отличие от «просто спросить LLM» — предметность и обязательная привязка к тексту.</a:t>
             </a:r>
             <a:endParaRPr lang="en-US" dirty="0"/>
           </a:p>
@@ -861,7 +862,7 @@
           <a:p>
             <a:r>
               <a:rPr lang="en-US" dirty="0"/>
-              <a:t>Ядро (пакет tz_reviewer) не зависит от интерфейса: для MVP выбрали Streamlit ради скорости демо, ядро можно обернуть в API/FastAPI позже.</a:t>
+              <a:t>Ядро (пакет tz_reviewer) не зависит от интерфейса: для MVP выбрали Streamlit ради скорости демо, ядро можно обернуть в API/FastAPI позже. Стек: Python, Streamlit, CLI, pydantic-схема ответа.</a:t>
             </a:r>
             <a:endParaRPr lang="en-US" dirty="0"/>
           </a:p>
@@ -949,7 +950,7 @@
           <a:p>
             <a:r>
               <a:rPr lang="en-US" dirty="0"/>
-              <a:t>На демо показываем: сырое ТЗ → отчёт с блокерами; доработанное ТЗ → меньше замечаний, выше индекс; тот же прогон в офлайн-режиме.</a:t>
+              <a:t>Структура вывода — то, что инструмент реально формирует по каждому замечанию. Числа в сводке иллюстративные (для полного прогона с LLM). На демо: сырое ТЗ → замечания; доработанное ТЗ → меньше замечаний.</a:t>
             </a:r>
             <a:endParaRPr lang="en-US" dirty="0"/>
           </a:p>
@@ -1037,7 +1038,7 @@
           <a:p>
             <a:r>
               <a:rPr lang="en-US" dirty="0"/>
-              <a:t>Порогов в кейсе нет — метрики это ориентиры для разговора с кейсодателем на финале.</a:t>
+              <a:t>Отвечает на вопрос жюри «что уже реально сделано». Скриншот — настоящий вывод cli.py --format html в офлайн-режиме, не макет.</a:t>
             </a:r>
             <a:endParaRPr lang="en-US" dirty="0"/>
           </a:p>
@@ -1125,7 +1126,7 @@
           <a:p>
             <a:r>
               <a:rPr lang="en-US" dirty="0"/>
-              <a:t>50/50, работа совместная. Совместно принимаем архитектурные решения, обсуждаем продуктовый сценарий, тестируем качество.</a:t>
+              <a:t>Порогов в кейсе нет — метрики это наши целевые ориентиры MVP для разговора с кейсодателем на финале.</a:t>
             </a:r>
             <a:endParaRPr lang="en-US" dirty="0"/>
           </a:p>
@@ -1149,6 +1150,94 @@
             <a:fld id="{F7021451-1387-4CA6-816F-3879F97B5CBC}" type="slidenum">
               <a:rPr lang="en-US"/>
               <a:t>8</a:t>
+            </a:fld>
+            <a:endParaRPr lang="en-US"/>
+          </a:p>
+        </p:txBody>
+      </p:sp>
+    </p:spTree>
+    <p:extLst>
+      <p:ext uri="{BB962C8B-B14F-4D97-AF65-F5344CB8AC3E}">
+        <p14:creationId xmlns:p14="http://schemas.microsoft.com/office/powerpoint/2010/main" val="1024086991"/>
+      </p:ext>
+    </p:extLst>
+  </p:cSld>
+  <p:clrMapOvr>
+    <a:masterClrMapping/>
+  </p:clrMapOvr>
+</p:notes>
+</file>
+
+<file path=ppt/notesSlides/notesSlide9.xml><?xml version="1.0" encoding="utf-8"?>
+<p:notes xmlns:a="http://schemas.openxmlformats.org/drawingml/2006/main" xmlns:r="http://schemas.openxmlformats.org/officeDocument/2006/relationships" xmlns:p="http://schemas.openxmlformats.org/presentationml/2006/main">
+  <p:cSld>
+    <p:spTree>
+      <p:nvGrpSpPr>
+        <p:cNvPr id="1" name=""/>
+        <p:cNvGrpSpPr/>
+        <p:nvPr/>
+      </p:nvGrpSpPr>
+      <p:grpSpPr>
+        <a:xfrm>
+          <a:off x="0" y="0"/>
+          <a:ext cx="0" cy="0"/>
+          <a:chOff x="0" y="0"/>
+          <a:chExt cx="0" cy="0"/>
+        </a:xfrm>
+      </p:grpSpPr>
+      <p:sp>
+        <p:nvSpPr>
+          <p:cNvPr id="2" name="Slide Image Placeholder 1"/>
+          <p:cNvSpPr>
+            <a:spLocks noGrp="1" noRot="1" noChangeAspect="1"/>
+          </p:cNvSpPr>
+          <p:nvPr>
+            <p:ph type="sldImg"/>
+          </p:nvPr>
+        </p:nvSpPr>
+        <p:spPr/>
+      </p:sp>
+      <p:sp>
+        <p:nvSpPr>
+          <p:cNvPr id="3" name="Notes Placeholder 2"/>
+          <p:cNvSpPr>
+            <a:spLocks noGrp="1"/>
+          </p:cNvSpPr>
+          <p:nvPr>
+            <p:ph type="body" idx="1"/>
+          </p:nvPr>
+        </p:nvSpPr>
+        <p:spPr/>
+        <p:txBody>
+          <a:bodyPr/>
+          <a:lstStyle/>
+          <a:p>
+            <a:r>
+              <a:rPr lang="en-US" dirty="0"/>
+              <a:t>50/50, работа совместная. Распределение уточните под реальный вклад — меняется в одном месте (этот слайд и docs/project-description.md).</a:t>
+            </a:r>
+            <a:endParaRPr lang="en-US" dirty="0"/>
+          </a:p>
+        </p:txBody>
+      </p:sp>
+      <p:sp>
+        <p:nvSpPr>
+          <p:cNvPr id="4" name="Slide Number Placeholder 3"/>
+          <p:cNvSpPr>
+            <a:spLocks noGrp="1"/>
+          </p:cNvSpPr>
+          <p:nvPr>
+            <p:ph type="sldNum" sz="quarter" idx="10"/>
+          </p:nvPr>
+        </p:nvSpPr>
+        <p:spPr/>
+        <p:txBody>
+          <a:bodyPr/>
+          <a:lstStyle/>
+          <a:p>
+            <a:fld id="{F7021451-1387-4CA6-816F-3879F97B5CBC}" type="slidenum">
+              <a:rPr lang="en-US"/>
+              <a:t>9</a:t>
             </a:fld>
             <a:endParaRPr lang="en-US"/>
           </a:p>
@@ -1568,16 +1657,16 @@
         <p:spPr>
           <a:xfrm>
             <a:off x="502920" y="2697480"/>
-            <a:ext cx="11155680" cy="1005840"/>
-          </a:xfrm>
-          <a:prstGeom prst="rect">
-            <a:avLst/>
-          </a:prstGeom>
-          <a:noFill/>
-          <a:ln/>
-        </p:spPr>
-        <p:txBody>
-          <a:bodyPr wrap="square" lIns="0" tIns="0" rIns="0" bIns="0" rtlCol="0" anchor="ctr"/>
+            <a:ext cx="11155680" cy="960120"/>
+          </a:xfrm>
+          <a:prstGeom prst="rect">
+            <a:avLst/>
+          </a:prstGeom>
+          <a:noFill/>
+          <a:ln/>
+        </p:spPr>
+        <p:txBody>
+          <a:bodyPr wrap="square" lIns="0" tIns="0" rIns="0" bIns="0" rtlCol="0" anchor="t"/>
           <a:lstStyle/>
           <a:p>
             <a:pPr indent="0" marL="0">
@@ -1606,7 +1695,7 @@
         </p:nvSpPr>
         <p:spPr>
           <a:xfrm>
-            <a:off x="502920" y="3703320"/>
+            <a:off x="502920" y="3675888"/>
             <a:ext cx="11155680" cy="868680"/>
           </a:xfrm>
           <a:prstGeom prst="rect">
@@ -1616,7 +1705,7 @@
           <a:ln/>
         </p:spPr>
         <p:txBody>
-          <a:bodyPr wrap="square" lIns="0" tIns="0" rIns="0" bIns="0" rtlCol="0" anchor="ctr"/>
+          <a:bodyPr wrap="square" lIns="0" tIns="0" rIns="0" bIns="0" rtlCol="0" anchor="t"/>
           <a:lstStyle/>
           <a:p>
             <a:pPr indent="0" marL="0">
@@ -1701,7 +1790,7 @@
           <a:ln/>
         </p:spPr>
         <p:txBody>
-          <a:bodyPr wrap="square" lIns="0" tIns="0" rIns="0" bIns="0" rtlCol="0" anchor="ctr"/>
+          <a:bodyPr wrap="square" lIns="0" tIns="0" rIns="0" bIns="0" rtlCol="0" anchor="t"/>
           <a:lstStyle/>
           <a:p>
             <a:pPr indent="0" marL="0">
@@ -1805,7 +1894,7 @@
         </p:nvSpPr>
         <p:spPr>
           <a:xfrm>
-            <a:off x="502920" y="402336"/>
+            <a:off x="502920" y="384048"/>
             <a:ext cx="11155680" cy="292608"/>
           </a:xfrm>
           <a:prstGeom prst="rect">
@@ -1815,7 +1904,7 @@
           <a:ln/>
         </p:spPr>
         <p:txBody>
-          <a:bodyPr wrap="square" lIns="0" tIns="0" rIns="0" bIns="0" rtlCol="0" anchor="ctr"/>
+          <a:bodyPr wrap="square" lIns="0" tIns="0" rIns="0" bIns="0" rtlCol="0" anchor="t"/>
           <a:lstStyle/>
           <a:p>
             <a:pPr indent="0" marL="0">
@@ -1844,17 +1933,17 @@
         </p:nvSpPr>
         <p:spPr>
           <a:xfrm>
-            <a:off x="502920" y="676656"/>
-            <a:ext cx="11155680" cy="868680"/>
-          </a:xfrm>
-          <a:prstGeom prst="rect">
-            <a:avLst/>
-          </a:prstGeom>
-          <a:noFill/>
-          <a:ln/>
-        </p:spPr>
-        <p:txBody>
-          <a:bodyPr wrap="square" lIns="0" tIns="0" rIns="0" bIns="0" rtlCol="0" anchor="ctr">
+            <a:off x="502920" y="658368"/>
+            <a:ext cx="11155680" cy="804672"/>
+          </a:xfrm>
+          <a:prstGeom prst="rect">
+            <a:avLst/>
+          </a:prstGeom>
+          <a:noFill/>
+          <a:ln/>
+        </p:spPr>
+        <p:txBody>
+          <a:bodyPr wrap="square" lIns="0" tIns="0" rIns="0" bIns="0" rtlCol="0" anchor="t">
             <a:normAutofit/>
           </a:bodyPr>
           <a:lstStyle/>
@@ -1863,7 +1952,7 @@
               <a:buNone/>
             </a:pPr>
             <a:r>
-              <a:rPr lang="en-US" sz="3000" b="1" dirty="0">
+              <a:rPr lang="en-US" sz="2900" b="1" dirty="0">
                 <a:solidFill>
                   <a:srgbClr val="13223B"/>
                 </a:solidFill>
@@ -1873,7 +1962,7 @@
               </a:rPr>
               <a:t>Часть проблем в ТЗ находится уже на разработке</a:t>
             </a:r>
-            <a:endParaRPr lang="en-US" sz="3000" dirty="0"/>
+            <a:endParaRPr lang="en-US" sz="2900" dirty="0"/>
           </a:p>
         </p:txBody>
       </p:sp>
@@ -1885,12 +1974,12 @@
         </p:nvSpPr>
         <p:spPr>
           <a:xfrm>
-            <a:off x="502920" y="1691640"/>
-            <a:ext cx="3535680" cy="1737360"/>
+            <a:off x="502920" y="1645920"/>
+            <a:ext cx="3535680" cy="1783080"/>
           </a:xfrm>
           <a:prstGeom prst="roundRect">
             <a:avLst>
-              <a:gd name="adj" fmla="val 4211"/>
+              <a:gd name="adj" fmla="val 4103"/>
             </a:avLst>
           </a:prstGeom>
           <a:solidFill>
@@ -1919,7 +2008,7 @@
         </p:nvSpPr>
         <p:spPr>
           <a:xfrm>
-            <a:off x="704088" y="1847088"/>
+            <a:off x="704088" y="1810512"/>
             <a:ext cx="3133344" cy="365760"/>
           </a:xfrm>
           <a:prstGeom prst="rect">
@@ -1929,14 +2018,14 @@
           <a:ln/>
         </p:spPr>
         <p:txBody>
-          <a:bodyPr wrap="square" lIns="0" tIns="0" rIns="0" bIns="0" rtlCol="0" anchor="ctr"/>
-          <a:lstStyle/>
-          <a:p>
-            <a:pPr indent="0" marL="0">
-              <a:buNone/>
-            </a:pPr>
-            <a:r>
-              <a:rPr lang="en-US" sz="1450" b="1" dirty="0">
+          <a:bodyPr wrap="square" lIns="0" tIns="0" rIns="0" bIns="0" rtlCol="0" anchor="t"/>
+          <a:lstStyle/>
+          <a:p>
+            <a:pPr indent="0" marL="0">
+              <a:buNone/>
+            </a:pPr>
+            <a:r>
+              <a:rPr lang="en-US" sz="1500" b="1" dirty="0">
                 <a:solidFill>
                   <a:srgbClr val="13223B"/>
                 </a:solidFill>
@@ -1946,7 +2035,7 @@
               </a:rPr>
               <a:t>Объём ручной вычитки</a:t>
             </a:r>
-            <a:endParaRPr lang="en-US" sz="1450" dirty="0"/>
+            <a:endParaRPr lang="en-US" sz="1500" dirty="0"/>
           </a:p>
         </p:txBody>
       </p:sp>
@@ -1959,16 +2048,16 @@
         <p:spPr>
           <a:xfrm>
             <a:off x="704088" y="2212848"/>
-            <a:ext cx="3133344" cy="1097280"/>
-          </a:xfrm>
-          <a:prstGeom prst="rect">
-            <a:avLst/>
-          </a:prstGeom>
-          <a:noFill/>
-          <a:ln/>
-        </p:spPr>
-        <p:txBody>
-          <a:bodyPr wrap="square" lIns="0" tIns="0" rIns="0" bIns="0" rtlCol="0" anchor="ctr">
+            <a:ext cx="3133344" cy="1051560"/>
+          </a:xfrm>
+          <a:prstGeom prst="rect">
+            <a:avLst/>
+          </a:prstGeom>
+          <a:noFill/>
+          <a:ln/>
+        </p:spPr>
+        <p:txBody>
+          <a:bodyPr wrap="square" lIns="0" tIns="0" rIns="0" bIns="0" rtlCol="0" anchor="t">
             <a:normAutofit/>
           </a:bodyPr>
           <a:lstStyle/>
@@ -1980,9 +2069,9 @@
               <a:buNone/>
             </a:pPr>
             <a:r>
-              <a:rPr lang="en-US" sz="1180" dirty="0">
-                <a:solidFill>
-                  <a:srgbClr val="5B6B7C"/>
+              <a:rPr lang="en-US" sz="1250" dirty="0">
+                <a:solidFill>
+                  <a:srgbClr val="566173"/>
                 </a:solidFill>
                 <a:latin typeface="Calibri" pitchFamily="34" charset="0"/>
                 <a:ea typeface="Calibri" pitchFamily="34" charset="-122"/>
@@ -1990,7 +2079,7 @@
               </a:rPr>
               <a:t>Аналитики и разработчики вручную вычитывают объёмные ТЗ перед постановкой задачи.</a:t>
             </a:r>
-            <a:endParaRPr lang="en-US" sz="1180" dirty="0"/>
+            <a:endParaRPr lang="en-US" sz="1250" dirty="0"/>
           </a:p>
         </p:txBody>
       </p:sp>
@@ -2002,12 +2091,12 @@
         </p:nvSpPr>
         <p:spPr>
           <a:xfrm>
-            <a:off x="4312920" y="1691640"/>
-            <a:ext cx="3535680" cy="1737360"/>
+            <a:off x="4312920" y="1645920"/>
+            <a:ext cx="3535680" cy="1783080"/>
           </a:xfrm>
           <a:prstGeom prst="roundRect">
             <a:avLst>
-              <a:gd name="adj" fmla="val 4211"/>
+              <a:gd name="adj" fmla="val 4103"/>
             </a:avLst>
           </a:prstGeom>
           <a:solidFill>
@@ -2036,7 +2125,7 @@
         </p:nvSpPr>
         <p:spPr>
           <a:xfrm>
-            <a:off x="4514088" y="1847088"/>
+            <a:off x="4514088" y="1810512"/>
             <a:ext cx="3133344" cy="365760"/>
           </a:xfrm>
           <a:prstGeom prst="rect">
@@ -2046,14 +2135,14 @@
           <a:ln/>
         </p:spPr>
         <p:txBody>
-          <a:bodyPr wrap="square" lIns="0" tIns="0" rIns="0" bIns="0" rtlCol="0" anchor="ctr"/>
-          <a:lstStyle/>
-          <a:p>
-            <a:pPr indent="0" marL="0">
-              <a:buNone/>
-            </a:pPr>
-            <a:r>
-              <a:rPr lang="en-US" sz="1450" b="1" dirty="0">
+          <a:bodyPr wrap="square" lIns="0" tIns="0" rIns="0" bIns="0" rtlCol="0" anchor="t"/>
+          <a:lstStyle/>
+          <a:p>
+            <a:pPr indent="0" marL="0">
+              <a:buNone/>
+            </a:pPr>
+            <a:r>
+              <a:rPr lang="en-US" sz="1500" b="1" dirty="0">
                 <a:solidFill>
                   <a:srgbClr val="13223B"/>
                 </a:solidFill>
@@ -2063,7 +2152,7 @@
               </a:rPr>
               <a:t>Неоднозначность и пробелы</a:t>
             </a:r>
-            <a:endParaRPr lang="en-US" sz="1450" dirty="0"/>
+            <a:endParaRPr lang="en-US" sz="1500" dirty="0"/>
           </a:p>
         </p:txBody>
       </p:sp>
@@ -2076,16 +2165,16 @@
         <p:spPr>
           <a:xfrm>
             <a:off x="4514088" y="2212848"/>
-            <a:ext cx="3133344" cy="1097280"/>
-          </a:xfrm>
-          <a:prstGeom prst="rect">
-            <a:avLst/>
-          </a:prstGeom>
-          <a:noFill/>
-          <a:ln/>
-        </p:spPr>
-        <p:txBody>
-          <a:bodyPr wrap="square" lIns="0" tIns="0" rIns="0" bIns="0" rtlCol="0" anchor="ctr">
+            <a:ext cx="3133344" cy="1051560"/>
+          </a:xfrm>
+          <a:prstGeom prst="rect">
+            <a:avLst/>
+          </a:prstGeom>
+          <a:noFill/>
+          <a:ln/>
+        </p:spPr>
+        <p:txBody>
+          <a:bodyPr wrap="square" lIns="0" tIns="0" rIns="0" bIns="0" rtlCol="0" anchor="t">
             <a:normAutofit/>
           </a:bodyPr>
           <a:lstStyle/>
@@ -2097,9 +2186,9 @@
               <a:buNone/>
             </a:pPr>
             <a:r>
-              <a:rPr lang="en-US" sz="1180" dirty="0">
-                <a:solidFill>
-                  <a:srgbClr val="5B6B7C"/>
+              <a:rPr lang="en-US" sz="1250" dirty="0">
+                <a:solidFill>
+                  <a:srgbClr val="566173"/>
                 </a:solidFill>
                 <a:latin typeface="Calibri" pitchFamily="34" charset="0"/>
                 <a:ea typeface="Calibri" pitchFamily="34" charset="-122"/>
@@ -2107,7 +2196,7 @@
               </a:rPr>
               <a:t>Расплывчатые формулировки и недостающие требования не всегда видны при чтении.</a:t>
             </a:r>
-            <a:endParaRPr lang="en-US" sz="1180" dirty="0"/>
+            <a:endParaRPr lang="en-US" sz="1250" dirty="0"/>
           </a:p>
         </p:txBody>
       </p:sp>
@@ -2119,12 +2208,12 @@
         </p:nvSpPr>
         <p:spPr>
           <a:xfrm>
-            <a:off x="8122920" y="1691640"/>
-            <a:ext cx="3535680" cy="1737360"/>
+            <a:off x="8122920" y="1645920"/>
+            <a:ext cx="3535680" cy="1783080"/>
           </a:xfrm>
           <a:prstGeom prst="roundRect">
             <a:avLst>
-              <a:gd name="adj" fmla="val 4211"/>
+              <a:gd name="adj" fmla="val 4103"/>
             </a:avLst>
           </a:prstGeom>
           <a:solidFill>
@@ -2153,7 +2242,7 @@
         </p:nvSpPr>
         <p:spPr>
           <a:xfrm>
-            <a:off x="8324088" y="1847088"/>
+            <a:off x="8324088" y="1810512"/>
             <a:ext cx="3133344" cy="365760"/>
           </a:xfrm>
           <a:prstGeom prst="rect">
@@ -2163,14 +2252,14 @@
           <a:ln/>
         </p:spPr>
         <p:txBody>
-          <a:bodyPr wrap="square" lIns="0" tIns="0" rIns="0" bIns="0" rtlCol="0" anchor="ctr"/>
-          <a:lstStyle/>
-          <a:p>
-            <a:pPr indent="0" marL="0">
-              <a:buNone/>
-            </a:pPr>
-            <a:r>
-              <a:rPr lang="en-US" sz="1450" b="1" dirty="0">
+          <a:bodyPr wrap="square" lIns="0" tIns="0" rIns="0" bIns="0" rtlCol="0" anchor="t"/>
+          <a:lstStyle/>
+          <a:p>
+            <a:pPr indent="0" marL="0">
+              <a:buNone/>
+            </a:pPr>
+            <a:r>
+              <a:rPr lang="en-US" sz="1500" b="1" dirty="0">
                 <a:solidFill>
                   <a:srgbClr val="13223B"/>
                 </a:solidFill>
@@ -2180,7 +2269,7 @@
               </a:rPr>
               <a:t>Нет единого ревью</a:t>
             </a:r>
-            <a:endParaRPr lang="en-US" sz="1450" dirty="0"/>
+            <a:endParaRPr lang="en-US" sz="1500" dirty="0"/>
           </a:p>
         </p:txBody>
       </p:sp>
@@ -2193,16 +2282,16 @@
         <p:spPr>
           <a:xfrm>
             <a:off x="8324088" y="2212848"/>
-            <a:ext cx="3133344" cy="1097280"/>
-          </a:xfrm>
-          <a:prstGeom prst="rect">
-            <a:avLst/>
-          </a:prstGeom>
-          <a:noFill/>
-          <a:ln/>
-        </p:spPr>
-        <p:txBody>
-          <a:bodyPr wrap="square" lIns="0" tIns="0" rIns="0" bIns="0" rtlCol="0" anchor="ctr">
+            <a:ext cx="3133344" cy="1051560"/>
+          </a:xfrm>
+          <a:prstGeom prst="rect">
+            <a:avLst/>
+          </a:prstGeom>
+          <a:noFill/>
+          <a:ln/>
+        </p:spPr>
+        <p:txBody>
+          <a:bodyPr wrap="square" lIns="0" tIns="0" rIns="0" bIns="0" rtlCol="0" anchor="t">
             <a:normAutofit/>
           </a:bodyPr>
           <a:lstStyle/>
@@ -2214,17 +2303,17 @@
               <a:buNone/>
             </a:pPr>
             <a:r>
-              <a:rPr lang="en-US" sz="1180" dirty="0">
-                <a:solidFill>
-                  <a:srgbClr val="5B6B7C"/>
-                </a:solidFill>
-                <a:latin typeface="Calibri" pitchFamily="34" charset="0"/>
-                <a:ea typeface="Calibri" pitchFamily="34" charset="-122"/>
-                <a:cs typeface="Calibri" pitchFamily="34" charset="-120"/>
-              </a:rPr>
-              <a:t>Проверка зависит от опыта и загрузки конкретного человека — подход не единообразный.</a:t>
-            </a:r>
-            <a:endParaRPr lang="en-US" sz="1180" dirty="0"/>
+              <a:rPr lang="en-US" sz="1250" dirty="0">
+                <a:solidFill>
+                  <a:srgbClr val="566173"/>
+                </a:solidFill>
+                <a:latin typeface="Calibri" pitchFamily="34" charset="0"/>
+                <a:ea typeface="Calibri" pitchFamily="34" charset="-122"/>
+                <a:cs typeface="Calibri" pitchFamily="34" charset="-120"/>
+              </a:rPr>
+              <a:t>Проверка зависит от опыта и загрузки конкретного человека.</a:t>
+            </a:r>
+            <a:endParaRPr lang="en-US" sz="1250" dirty="0"/>
           </a:p>
         </p:txBody>
       </p:sp>
@@ -2246,14 +2335,14 @@
           <a:ln/>
         </p:spPr>
         <p:txBody>
-          <a:bodyPr wrap="square" lIns="0" tIns="0" rIns="0" bIns="0" rtlCol="0" anchor="ctr"/>
-          <a:lstStyle/>
-          <a:p>
-            <a:pPr indent="0" marL="0">
-              <a:buNone/>
-            </a:pPr>
-            <a:r>
-              <a:rPr lang="en-US" sz="1350" b="1" dirty="0">
+          <a:bodyPr wrap="square" lIns="0" tIns="0" rIns="0" bIns="0" rtlCol="0" anchor="t"/>
+          <a:lstStyle/>
+          <a:p>
+            <a:pPr indent="0" marL="0">
+              <a:buNone/>
+            </a:pPr>
+            <a:r>
+              <a:rPr lang="en-US" sz="1400" b="1" dirty="0">
                 <a:solidFill>
                   <a:srgbClr val="1E3252"/>
                 </a:solidFill>
@@ -2263,7 +2352,7 @@
               </a:rPr>
               <a:t>Когда проблема всплывает поздно — запускается цикл повторной работы:</a:t>
             </a:r>
-            <a:endParaRPr lang="en-US" sz="1350" dirty="0"/>
+            <a:endParaRPr lang="en-US" sz="1400" dirty="0"/>
           </a:p>
         </p:txBody>
       </p:sp>
@@ -2319,7 +2408,7 @@
               <a:buNone/>
             </a:pPr>
             <a:r>
-              <a:rPr lang="en-US" sz="1200" dirty="0">
+              <a:rPr lang="en-US" sz="1250" dirty="0">
                 <a:solidFill>
                   <a:srgbClr val="1E3252"/>
                 </a:solidFill>
@@ -2327,9 +2416,9 @@
                 <a:ea typeface="Calibri" pitchFamily="34" charset="-122"/>
                 <a:cs typeface="Calibri" pitchFamily="34" charset="-120"/>
               </a:rPr>
-              <a:t>Аналитик уточняет и правит ТЗ</a:t>
-            </a:r>
-            <a:endParaRPr lang="en-US" sz="1200" dirty="0"/>
+              <a:t>Аналитик правит ТЗ</a:t>
+            </a:r>
+            <a:endParaRPr lang="en-US" sz="1250" dirty="0"/>
           </a:p>
         </p:txBody>
       </p:sp>
@@ -2424,7 +2513,7 @@
               <a:buNone/>
             </a:pPr>
             <a:r>
-              <a:rPr lang="en-US" sz="1200" dirty="0">
+              <a:rPr lang="en-US" sz="1250" dirty="0">
                 <a:solidFill>
                   <a:srgbClr val="1E3252"/>
                 </a:solidFill>
@@ -2434,7 +2523,7 @@
               </a:rPr>
               <a:t>Разработчик переделывает реализацию</a:t>
             </a:r>
-            <a:endParaRPr lang="en-US" sz="1200" dirty="0"/>
+            <a:endParaRPr lang="en-US" sz="1250" dirty="0"/>
           </a:p>
         </p:txBody>
       </p:sp>
@@ -2529,7 +2618,7 @@
               <a:buNone/>
             </a:pPr>
             <a:r>
-              <a:rPr lang="en-US" sz="1200" dirty="0">
+              <a:rPr lang="en-US" sz="1250" dirty="0">
                 <a:solidFill>
                   <a:srgbClr val="1E3252"/>
                 </a:solidFill>
@@ -2539,7 +2628,7 @@
               </a:rPr>
               <a:t>Тестировщик перепроверяет сценарии</a:t>
             </a:r>
-            <a:endParaRPr lang="en-US" sz="1200" dirty="0"/>
+            <a:endParaRPr lang="en-US" sz="1250" dirty="0"/>
           </a:p>
         </p:txBody>
       </p:sp>
@@ -2551,7 +2640,7 @@
         </p:nvSpPr>
         <p:spPr>
           <a:xfrm>
-            <a:off x="502920" y="5257800"/>
+            <a:off x="502920" y="5303520"/>
             <a:ext cx="11155680" cy="914400"/>
           </a:xfrm>
           <a:prstGeom prst="roundRect">
@@ -2573,7 +2662,7 @@
         </p:nvSpPr>
         <p:spPr>
           <a:xfrm>
-            <a:off x="777240" y="5257800"/>
+            <a:off x="777240" y="5303520"/>
             <a:ext cx="10607040" cy="914400"/>
           </a:xfrm>
           <a:prstGeom prst="rect">
@@ -2660,7 +2749,7 @@
         </p:nvSpPr>
         <p:spPr>
           <a:xfrm>
-            <a:off x="502920" y="402336"/>
+            <a:off x="502920" y="384048"/>
             <a:ext cx="11155680" cy="292608"/>
           </a:xfrm>
           <a:prstGeom prst="rect">
@@ -2670,7 +2759,7 @@
           <a:ln/>
         </p:spPr>
         <p:txBody>
-          <a:bodyPr wrap="square" lIns="0" tIns="0" rIns="0" bIns="0" rtlCol="0" anchor="ctr"/>
+          <a:bodyPr wrap="square" lIns="0" tIns="0" rIns="0" bIns="0" rtlCol="0" anchor="t"/>
           <a:lstStyle/>
           <a:p>
             <a:pPr indent="0" marL="0">
@@ -2699,17 +2788,17 @@
         </p:nvSpPr>
         <p:spPr>
           <a:xfrm>
-            <a:off x="502920" y="676656"/>
-            <a:ext cx="11155680" cy="868680"/>
-          </a:xfrm>
-          <a:prstGeom prst="rect">
-            <a:avLst/>
-          </a:prstGeom>
-          <a:noFill/>
-          <a:ln/>
-        </p:spPr>
-        <p:txBody>
-          <a:bodyPr wrap="square" lIns="0" tIns="0" rIns="0" bIns="0" rtlCol="0" anchor="ctr">
+            <a:off x="502920" y="658368"/>
+            <a:ext cx="11155680" cy="804672"/>
+          </a:xfrm>
+          <a:prstGeom prst="rect">
+            <a:avLst/>
+          </a:prstGeom>
+          <a:noFill/>
+          <a:ln/>
+        </p:spPr>
+        <p:txBody>
+          <a:bodyPr wrap="square" lIns="0" tIns="0" rIns="0" bIns="0" rtlCol="0" anchor="t">
             <a:normAutofit/>
           </a:bodyPr>
           <a:lstStyle/>
@@ -2718,7 +2807,7 @@
               <a:buNone/>
             </a:pPr>
             <a:r>
-              <a:rPr lang="en-US" sz="3000" b="1" dirty="0">
+              <a:rPr lang="en-US" sz="2900" b="1" dirty="0">
                 <a:solidFill>
                   <a:srgbClr val="13223B"/>
                 </a:solidFill>
@@ -2726,22 +2815,61 @@
                 <a:ea typeface="Cambria" pitchFamily="34" charset="-122"/>
                 <a:cs typeface="Cambria" pitchFamily="34" charset="-120"/>
               </a:rPr>
-              <a:t>Аналитик NET получает второе мнение за 1–2 минуты</a:t>
-            </a:r>
-            <a:endParaRPr lang="en-US" sz="3000" dirty="0"/>
-          </a:p>
-        </p:txBody>
-      </p:sp>
-      <p:sp>
-        <p:nvSpPr>
-          <p:cNvPr id="4" name="Shape 2"/>
+              <a:t>Второе мнение по ТЗ до передачи в разработку</a:t>
+            </a:r>
+            <a:endParaRPr lang="en-US" sz="2900" dirty="0"/>
+          </a:p>
+        </p:txBody>
+      </p:sp>
+      <p:sp>
+        <p:nvSpPr>
+          <p:cNvPr id="4" name="Text 2"/>
+          <p:cNvSpPr txBox="1"/>
+          <p:nvPr/>
+        </p:nvSpPr>
+        <p:spPr>
+          <a:xfrm>
+            <a:off x="502920" y="1426464"/>
+            <a:ext cx="11155680" cy="292608"/>
+          </a:xfrm>
+          <a:prstGeom prst="rect">
+            <a:avLst/>
+          </a:prstGeom>
+          <a:noFill/>
+          <a:ln/>
+        </p:spPr>
+        <p:txBody>
+          <a:bodyPr wrap="square" lIns="0" tIns="0" rIns="0" bIns="0" rtlCol="0" anchor="t"/>
+          <a:lstStyle/>
+          <a:p>
+            <a:pPr indent="0" marL="0">
+              <a:buNone/>
+            </a:pPr>
+            <a:r>
+              <a:rPr lang="en-US" sz="1250" i="1" dirty="0">
+                <a:solidFill>
+                  <a:srgbClr val="566173"/>
+                </a:solidFill>
+                <a:latin typeface="Calibri" pitchFamily="34" charset="0"/>
+                <a:ea typeface="Calibri" pitchFamily="34" charset="-122"/>
+                <a:cs typeface="Calibri" pitchFamily="34" charset="-120"/>
+              </a:rPr>
+              <a:t>Основной пользователь — аналитик NET. Цель MVP: первичный проход по ТЗ за ≤ 2 минут (время замерим на реальных примерах).</a:t>
+            </a:r>
+            <a:endParaRPr lang="en-US" sz="1250" dirty="0"/>
+          </a:p>
+        </p:txBody>
+      </p:sp>
+      <p:sp>
+        <p:nvSpPr>
+          <p:cNvPr id="5" name="Shape 3"/>
           <p:cNvSpPr/>
           <p:nvPr/>
         </p:nvSpPr>
         <p:spPr>
           <a:xfrm>
-            <a:off x="502920" y="1783080"/>
-            <a:ext cx="2011680" cy="2286000"/>
+            <a:off x="502920" y="1965960"/>
+            <a:ext cx="2011680" cy="2194560"/>
           </a:xfrm>
           <a:prstGeom prst="roundRect">
             <a:avLst>
@@ -2768,13 +2896,13 @@
       </p:sp>
       <p:sp>
         <p:nvSpPr>
-          <p:cNvPr id="5" name="Shape 3"/>
+          <p:cNvPr id="6" name="Shape 4"/>
           <p:cNvSpPr/>
           <p:nvPr/>
         </p:nvSpPr>
         <p:spPr>
           <a:xfrm>
-            <a:off x="1252728" y="1965960"/>
+            <a:off x="1252728" y="2139696"/>
             <a:ext cx="512064" cy="512064"/>
           </a:xfrm>
           <a:prstGeom prst="ellipse">
@@ -2788,13 +2916,13 @@
       </p:sp>
       <p:sp>
         <p:nvSpPr>
-          <p:cNvPr id="6" name="Text 4"/>
-          <p:cNvSpPr txBox="1"/>
-          <p:nvPr/>
-        </p:nvSpPr>
-        <p:spPr>
-          <a:xfrm>
-            <a:off x="1252728" y="1965960"/>
+          <p:cNvPr id="7" name="Text 5"/>
+          <p:cNvSpPr txBox="1"/>
+          <p:nvPr/>
+        </p:nvSpPr>
+        <p:spPr>
+          <a:xfrm>
+            <a:off x="1252728" y="2139696"/>
             <a:ext cx="512064" cy="512064"/>
           </a:xfrm>
           <a:prstGeom prst="rect">
@@ -2827,23 +2955,23 @@
       </p:sp>
       <p:sp>
         <p:nvSpPr>
-          <p:cNvPr id="7" name="Text 5"/>
-          <p:cNvSpPr txBox="1"/>
-          <p:nvPr/>
-        </p:nvSpPr>
-        <p:spPr>
-          <a:xfrm>
-            <a:off x="612648" y="2606040"/>
-            <a:ext cx="1792224" cy="640080"/>
-          </a:xfrm>
-          <a:prstGeom prst="rect">
-            <a:avLst/>
-          </a:prstGeom>
-          <a:noFill/>
-          <a:ln/>
-        </p:spPr>
-        <p:txBody>
-          <a:bodyPr wrap="square" lIns="0" tIns="0" rIns="0" bIns="0" rtlCol="0" anchor="ctr">
+          <p:cNvPr id="8" name="Text 6"/>
+          <p:cNvSpPr txBox="1"/>
+          <p:nvPr/>
+        </p:nvSpPr>
+        <p:spPr>
+          <a:xfrm>
+            <a:off x="612648" y="2761488"/>
+            <a:ext cx="1792224" cy="548640"/>
+          </a:xfrm>
+          <a:prstGeom prst="rect">
+            <a:avLst/>
+          </a:prstGeom>
+          <a:noFill/>
+          <a:ln/>
+        </p:spPr>
+        <p:txBody>
+          <a:bodyPr wrap="square" lIns="0" tIns="0" rIns="0" bIns="0" rtlCol="0" anchor="t">
             <a:normAutofit/>
           </a:bodyPr>
           <a:lstStyle/>
@@ -2852,7 +2980,7 @@
               <a:buNone/>
             </a:pPr>
             <a:r>
-              <a:rPr lang="en-US" sz="1250" b="1" dirty="0">
+              <a:rPr lang="en-US" sz="1300" b="1" dirty="0">
                 <a:solidFill>
                   <a:srgbClr val="13223B"/>
                 </a:solidFill>
@@ -2862,29 +2990,29 @@
               </a:rPr>
               <a:t>Готовит ТЗ</a:t>
             </a:r>
-            <a:endParaRPr lang="en-US" sz="1250" dirty="0"/>
-          </a:p>
-        </p:txBody>
-      </p:sp>
-      <p:sp>
-        <p:nvSpPr>
-          <p:cNvPr id="8" name="Text 6"/>
-          <p:cNvSpPr txBox="1"/>
-          <p:nvPr/>
-        </p:nvSpPr>
-        <p:spPr>
-          <a:xfrm>
-            <a:off x="612648" y="3200400"/>
-            <a:ext cx="1792224" cy="777240"/>
-          </a:xfrm>
-          <a:prstGeom prst="rect">
-            <a:avLst/>
-          </a:prstGeom>
-          <a:noFill/>
-          <a:ln/>
-        </p:spPr>
-        <p:txBody>
-          <a:bodyPr wrap="square" lIns="0" tIns="0" rIns="0" bIns="0" rtlCol="0" anchor="ctr">
+            <a:endParaRPr lang="en-US" sz="1300" dirty="0"/>
+          </a:p>
+        </p:txBody>
+      </p:sp>
+      <p:sp>
+        <p:nvSpPr>
+          <p:cNvPr id="9" name="Text 7"/>
+          <p:cNvSpPr txBox="1"/>
+          <p:nvPr/>
+        </p:nvSpPr>
+        <p:spPr>
+          <a:xfrm>
+            <a:off x="612648" y="3310128"/>
+            <a:ext cx="1792224" cy="731520"/>
+          </a:xfrm>
+          <a:prstGeom prst="rect">
+            <a:avLst/>
+          </a:prstGeom>
+          <a:noFill/>
+          <a:ln/>
+        </p:spPr>
+        <p:txBody>
+          <a:bodyPr wrap="square" lIns="0" tIns="0" rIns="0" bIns="0" rtlCol="0" anchor="t">
             <a:normAutofit/>
           </a:bodyPr>
           <a:lstStyle/>
@@ -2893,9 +3021,9 @@
               <a:buNone/>
             </a:pPr>
             <a:r>
-              <a:rPr lang="en-US" sz="1080" dirty="0">
-                <a:solidFill>
-                  <a:srgbClr val="5B6B7C"/>
+              <a:rPr lang="en-US" sz="1100" dirty="0">
+                <a:solidFill>
+                  <a:srgbClr val="566173"/>
                 </a:solidFill>
                 <a:latin typeface="Calibri" pitchFamily="34" charset="0"/>
                 <a:ea typeface="Calibri" pitchFamily="34" charset="-122"/>
@@ -2903,20 +3031,20 @@
               </a:rPr>
               <a:t>Word / Markdown / текст</a:t>
             </a:r>
-            <a:endParaRPr lang="en-US" sz="1080" dirty="0"/>
-          </a:p>
-        </p:txBody>
-      </p:sp>
-      <p:sp>
-        <p:nvSpPr>
-          <p:cNvPr id="9" name="Text 7"/>
-          <p:cNvSpPr txBox="1"/>
-          <p:nvPr/>
-        </p:nvSpPr>
-        <p:spPr>
-          <a:xfrm>
-            <a:off x="2532888" y="1783080"/>
-            <a:ext cx="256032" cy="2286000"/>
+            <a:endParaRPr lang="en-US" sz="1100" dirty="0"/>
+          </a:p>
+        </p:txBody>
+      </p:sp>
+      <p:sp>
+        <p:nvSpPr>
+          <p:cNvPr id="10" name="Text 8"/>
+          <p:cNvSpPr txBox="1"/>
+          <p:nvPr/>
+        </p:nvSpPr>
+        <p:spPr>
+          <a:xfrm>
+            <a:off x="2532888" y="1965960"/>
+            <a:ext cx="256032" cy="2194560"/>
           </a:xfrm>
           <a:prstGeom prst="rect">
             <a:avLst/>
@@ -2934,7 +3062,7 @@
             <a:r>
               <a:rPr lang="en-US" sz="2000" b="1" dirty="0">
                 <a:solidFill>
-                  <a:srgbClr val="D4DCE6"/>
+                  <a:srgbClr val="8A8F98"/>
                 </a:solidFill>
                 <a:latin typeface="Calibri" pitchFamily="34" charset="0"/>
                 <a:ea typeface="Calibri" pitchFamily="34" charset="-122"/>
@@ -2948,14 +3076,14 @@
       </p:sp>
       <p:sp>
         <p:nvSpPr>
-          <p:cNvPr id="10" name="Shape 8"/>
+          <p:cNvPr id="11" name="Shape 9"/>
           <p:cNvSpPr/>
           <p:nvPr/>
         </p:nvSpPr>
         <p:spPr>
           <a:xfrm>
-            <a:off x="2788920" y="1783080"/>
-            <a:ext cx="2011680" cy="2286000"/>
+            <a:off x="2788920" y="1965960"/>
+            <a:ext cx="2011680" cy="2194560"/>
           </a:xfrm>
           <a:prstGeom prst="roundRect">
             <a:avLst>
@@ -2982,13 +3110,13 @@
       </p:sp>
       <p:sp>
         <p:nvSpPr>
-          <p:cNvPr id="11" name="Shape 9"/>
+          <p:cNvPr id="12" name="Shape 10"/>
           <p:cNvSpPr/>
           <p:nvPr/>
         </p:nvSpPr>
         <p:spPr>
           <a:xfrm>
-            <a:off x="3538728" y="1965960"/>
+            <a:off x="3538728" y="2139696"/>
             <a:ext cx="512064" cy="512064"/>
           </a:xfrm>
           <a:prstGeom prst="ellipse">
@@ -3002,13 +3130,13 @@
       </p:sp>
       <p:sp>
         <p:nvSpPr>
-          <p:cNvPr id="12" name="Text 10"/>
-          <p:cNvSpPr txBox="1"/>
-          <p:nvPr/>
-        </p:nvSpPr>
-        <p:spPr>
-          <a:xfrm>
-            <a:off x="3538728" y="1965960"/>
+          <p:cNvPr id="13" name="Text 11"/>
+          <p:cNvSpPr txBox="1"/>
+          <p:nvPr/>
+        </p:nvSpPr>
+        <p:spPr>
+          <a:xfrm>
+            <a:off x="3538728" y="2139696"/>
             <a:ext cx="512064" cy="512064"/>
           </a:xfrm>
           <a:prstGeom prst="rect">
@@ -3041,23 +3169,23 @@
       </p:sp>
       <p:sp>
         <p:nvSpPr>
-          <p:cNvPr id="13" name="Text 11"/>
-          <p:cNvSpPr txBox="1"/>
-          <p:nvPr/>
-        </p:nvSpPr>
-        <p:spPr>
-          <a:xfrm>
-            <a:off x="2898648" y="2606040"/>
-            <a:ext cx="1792224" cy="640080"/>
-          </a:xfrm>
-          <a:prstGeom prst="rect">
-            <a:avLst/>
-          </a:prstGeom>
-          <a:noFill/>
-          <a:ln/>
-        </p:spPr>
-        <p:txBody>
-          <a:bodyPr wrap="square" lIns="0" tIns="0" rIns="0" bIns="0" rtlCol="0" anchor="ctr">
+          <p:cNvPr id="14" name="Text 12"/>
+          <p:cNvSpPr txBox="1"/>
+          <p:nvPr/>
+        </p:nvSpPr>
+        <p:spPr>
+          <a:xfrm>
+            <a:off x="2898648" y="2761488"/>
+            <a:ext cx="1792224" cy="548640"/>
+          </a:xfrm>
+          <a:prstGeom prst="rect">
+            <a:avLst/>
+          </a:prstGeom>
+          <a:noFill/>
+          <a:ln/>
+        </p:spPr>
+        <p:txBody>
+          <a:bodyPr wrap="square" lIns="0" tIns="0" rIns="0" bIns="0" rtlCol="0" anchor="t">
             <a:normAutofit/>
           </a:bodyPr>
           <a:lstStyle/>
@@ -3066,7 +3194,7 @@
               <a:buNone/>
             </a:pPr>
             <a:r>
-              <a:rPr lang="en-US" sz="1250" b="1" dirty="0">
+              <a:rPr lang="en-US" sz="1300" b="1" dirty="0">
                 <a:solidFill>
                   <a:srgbClr val="13223B"/>
                 </a:solidFill>
@@ -3076,29 +3204,29 @@
               </a:rPr>
               <a:t>Загружает ТЗ</a:t>
             </a:r>
-            <a:endParaRPr lang="en-US" sz="1250" dirty="0"/>
-          </a:p>
-        </p:txBody>
-      </p:sp>
-      <p:sp>
-        <p:nvSpPr>
-          <p:cNvPr id="14" name="Text 12"/>
-          <p:cNvSpPr txBox="1"/>
-          <p:nvPr/>
-        </p:nvSpPr>
-        <p:spPr>
-          <a:xfrm>
-            <a:off x="2898648" y="3200400"/>
-            <a:ext cx="1792224" cy="777240"/>
-          </a:xfrm>
-          <a:prstGeom prst="rect">
-            <a:avLst/>
-          </a:prstGeom>
-          <a:noFill/>
-          <a:ln/>
-        </p:spPr>
-        <p:txBody>
-          <a:bodyPr wrap="square" lIns="0" tIns="0" rIns="0" bIns="0" rtlCol="0" anchor="ctr">
+            <a:endParaRPr lang="en-US" sz="1300" dirty="0"/>
+          </a:p>
+        </p:txBody>
+      </p:sp>
+      <p:sp>
+        <p:nvSpPr>
+          <p:cNvPr id="15" name="Text 13"/>
+          <p:cNvSpPr txBox="1"/>
+          <p:nvPr/>
+        </p:nvSpPr>
+        <p:spPr>
+          <a:xfrm>
+            <a:off x="2898648" y="3310128"/>
+            <a:ext cx="1792224" cy="731520"/>
+          </a:xfrm>
+          <a:prstGeom prst="rect">
+            <a:avLst/>
+          </a:prstGeom>
+          <a:noFill/>
+          <a:ln/>
+        </p:spPr>
+        <p:txBody>
+          <a:bodyPr wrap="square" lIns="0" tIns="0" rIns="0" bIns="0" rtlCol="0" anchor="t">
             <a:normAutofit/>
           </a:bodyPr>
           <a:lstStyle/>
@@ -3107,9 +3235,9 @@
               <a:buNone/>
             </a:pPr>
             <a:r>
-              <a:rPr lang="en-US" sz="1080" dirty="0">
-                <a:solidFill>
-                  <a:srgbClr val="5B6B7C"/>
+              <a:rPr lang="en-US" sz="1100" dirty="0">
+                <a:solidFill>
+                  <a:srgbClr val="566173"/>
                 </a:solidFill>
                 <a:latin typeface="Calibri" pitchFamily="34" charset="0"/>
                 <a:ea typeface="Calibri" pitchFamily="34" charset="-122"/>
@@ -3117,20 +3245,20 @@
               </a:rPr>
               <a:t>и запускает проверку</a:t>
             </a:r>
-            <a:endParaRPr lang="en-US" sz="1080" dirty="0"/>
-          </a:p>
-        </p:txBody>
-      </p:sp>
-      <p:sp>
-        <p:nvSpPr>
-          <p:cNvPr id="15" name="Text 13"/>
-          <p:cNvSpPr txBox="1"/>
-          <p:nvPr/>
-        </p:nvSpPr>
-        <p:spPr>
-          <a:xfrm>
-            <a:off x="4818888" y="1783080"/>
-            <a:ext cx="256032" cy="2286000"/>
+            <a:endParaRPr lang="en-US" sz="1100" dirty="0"/>
+          </a:p>
+        </p:txBody>
+      </p:sp>
+      <p:sp>
+        <p:nvSpPr>
+          <p:cNvPr id="16" name="Text 14"/>
+          <p:cNvSpPr txBox="1"/>
+          <p:nvPr/>
+        </p:nvSpPr>
+        <p:spPr>
+          <a:xfrm>
+            <a:off x="4818888" y="1965960"/>
+            <a:ext cx="256032" cy="2194560"/>
           </a:xfrm>
           <a:prstGeom prst="rect">
             <a:avLst/>
@@ -3148,7 +3276,7 @@
             <a:r>
               <a:rPr lang="en-US" sz="2000" b="1" dirty="0">
                 <a:solidFill>
-                  <a:srgbClr val="D4DCE6"/>
+                  <a:srgbClr val="8A8F98"/>
                 </a:solidFill>
                 <a:latin typeface="Calibri" pitchFamily="34" charset="0"/>
                 <a:ea typeface="Calibri" pitchFamily="34" charset="-122"/>
@@ -3162,14 +3290,14 @@
       </p:sp>
       <p:sp>
         <p:nvSpPr>
-          <p:cNvPr id="16" name="Shape 14"/>
+          <p:cNvPr id="17" name="Shape 15"/>
           <p:cNvSpPr/>
           <p:nvPr/>
         </p:nvSpPr>
         <p:spPr>
           <a:xfrm>
-            <a:off x="5074920" y="1783080"/>
-            <a:ext cx="2011680" cy="2286000"/>
+            <a:off x="5074920" y="1965960"/>
+            <a:ext cx="2011680" cy="2194560"/>
           </a:xfrm>
           <a:prstGeom prst="roundRect">
             <a:avLst>
@@ -3196,13 +3324,13 @@
       </p:sp>
       <p:sp>
         <p:nvSpPr>
-          <p:cNvPr id="17" name="Shape 15"/>
+          <p:cNvPr id="18" name="Shape 16"/>
           <p:cNvSpPr/>
           <p:nvPr/>
         </p:nvSpPr>
         <p:spPr>
           <a:xfrm>
-            <a:off x="5824728" y="1965960"/>
+            <a:off x="5824728" y="2139696"/>
             <a:ext cx="512064" cy="512064"/>
           </a:xfrm>
           <a:prstGeom prst="ellipse">
@@ -3216,13 +3344,13 @@
       </p:sp>
       <p:sp>
         <p:nvSpPr>
-          <p:cNvPr id="18" name="Text 16"/>
-          <p:cNvSpPr txBox="1"/>
-          <p:nvPr/>
-        </p:nvSpPr>
-        <p:spPr>
-          <a:xfrm>
-            <a:off x="5824728" y="1965960"/>
+          <p:cNvPr id="19" name="Text 17"/>
+          <p:cNvSpPr txBox="1"/>
+          <p:nvPr/>
+        </p:nvSpPr>
+        <p:spPr>
+          <a:xfrm>
+            <a:off x="5824728" y="2139696"/>
             <a:ext cx="512064" cy="512064"/>
           </a:xfrm>
           <a:prstGeom prst="rect">
@@ -3255,23 +3383,23 @@
       </p:sp>
       <p:sp>
         <p:nvSpPr>
-          <p:cNvPr id="19" name="Text 17"/>
-          <p:cNvSpPr txBox="1"/>
-          <p:nvPr/>
-        </p:nvSpPr>
-        <p:spPr>
-          <a:xfrm>
-            <a:off x="5184648" y="2606040"/>
-            <a:ext cx="1792224" cy="640080"/>
-          </a:xfrm>
-          <a:prstGeom prst="rect">
-            <a:avLst/>
-          </a:prstGeom>
-          <a:noFill/>
-          <a:ln/>
-        </p:spPr>
-        <p:txBody>
-          <a:bodyPr wrap="square" lIns="0" tIns="0" rIns="0" bIns="0" rtlCol="0" anchor="ctr">
+          <p:cNvPr id="20" name="Text 18"/>
+          <p:cNvSpPr txBox="1"/>
+          <p:nvPr/>
+        </p:nvSpPr>
+        <p:spPr>
+          <a:xfrm>
+            <a:off x="5184648" y="2761488"/>
+            <a:ext cx="1792224" cy="548640"/>
+          </a:xfrm>
+          <a:prstGeom prst="rect">
+            <a:avLst/>
+          </a:prstGeom>
+          <a:noFill/>
+          <a:ln/>
+        </p:spPr>
+        <p:txBody>
+          <a:bodyPr wrap="square" lIns="0" tIns="0" rIns="0" bIns="0" rtlCol="0" anchor="t">
             <a:normAutofit/>
           </a:bodyPr>
           <a:lstStyle/>
@@ -3280,7 +3408,7 @@
               <a:buNone/>
             </a:pPr>
             <a:r>
-              <a:rPr lang="en-US" sz="1250" b="1" dirty="0">
+              <a:rPr lang="en-US" sz="1300" b="1" dirty="0">
                 <a:solidFill>
                   <a:srgbClr val="13223B"/>
                 </a:solidFill>
@@ -3290,29 +3418,29 @@
               </a:rPr>
               <a:t>Получает замечания</a:t>
             </a:r>
-            <a:endParaRPr lang="en-US" sz="1250" dirty="0"/>
-          </a:p>
-        </p:txBody>
-      </p:sp>
-      <p:sp>
-        <p:nvSpPr>
-          <p:cNvPr id="20" name="Text 18"/>
-          <p:cNvSpPr txBox="1"/>
-          <p:nvPr/>
-        </p:nvSpPr>
-        <p:spPr>
-          <a:xfrm>
-            <a:off x="5184648" y="3200400"/>
-            <a:ext cx="1792224" cy="777240"/>
-          </a:xfrm>
-          <a:prstGeom prst="rect">
-            <a:avLst/>
-          </a:prstGeom>
-          <a:noFill/>
-          <a:ln/>
-        </p:spPr>
-        <p:txBody>
-          <a:bodyPr wrap="square" lIns="0" tIns="0" rIns="0" bIns="0" rtlCol="0" anchor="ctr">
+            <a:endParaRPr lang="en-US" sz="1300" dirty="0"/>
+          </a:p>
+        </p:txBody>
+      </p:sp>
+      <p:sp>
+        <p:nvSpPr>
+          <p:cNvPr id="21" name="Text 19"/>
+          <p:cNvSpPr txBox="1"/>
+          <p:nvPr/>
+        </p:nvSpPr>
+        <p:spPr>
+          <a:xfrm>
+            <a:off x="5184648" y="3310128"/>
+            <a:ext cx="1792224" cy="731520"/>
+          </a:xfrm>
+          <a:prstGeom prst="rect">
+            <a:avLst/>
+          </a:prstGeom>
+          <a:noFill/>
+          <a:ln/>
+        </p:spPr>
+        <p:txBody>
+          <a:bodyPr wrap="square" lIns="0" tIns="0" rIns="0" bIns="0" rtlCol="0" anchor="t">
             <a:normAutofit/>
           </a:bodyPr>
           <a:lstStyle/>
@@ -3321,9 +3449,9 @@
               <a:buNone/>
             </a:pPr>
             <a:r>
-              <a:rPr lang="en-US" sz="1080" dirty="0">
-                <a:solidFill>
-                  <a:srgbClr val="5B6B7C"/>
+              <a:rPr lang="en-US" sz="1100" dirty="0">
+                <a:solidFill>
+                  <a:srgbClr val="566173"/>
                 </a:solidFill>
                 <a:latin typeface="Calibri" pitchFamily="34" charset="0"/>
                 <a:ea typeface="Calibri" pitchFamily="34" charset="-122"/>
@@ -3331,20 +3459,20 @@
               </a:rPr>
               <a:t>с привязкой к тексту</a:t>
             </a:r>
-            <a:endParaRPr lang="en-US" sz="1080" dirty="0"/>
-          </a:p>
-        </p:txBody>
-      </p:sp>
-      <p:sp>
-        <p:nvSpPr>
-          <p:cNvPr id="21" name="Text 19"/>
-          <p:cNvSpPr txBox="1"/>
-          <p:nvPr/>
-        </p:nvSpPr>
-        <p:spPr>
-          <a:xfrm>
-            <a:off x="7104888" y="1783080"/>
-            <a:ext cx="256032" cy="2286000"/>
+            <a:endParaRPr lang="en-US" sz="1100" dirty="0"/>
+          </a:p>
+        </p:txBody>
+      </p:sp>
+      <p:sp>
+        <p:nvSpPr>
+          <p:cNvPr id="22" name="Text 20"/>
+          <p:cNvSpPr txBox="1"/>
+          <p:nvPr/>
+        </p:nvSpPr>
+        <p:spPr>
+          <a:xfrm>
+            <a:off x="7104888" y="1965960"/>
+            <a:ext cx="256032" cy="2194560"/>
           </a:xfrm>
           <a:prstGeom prst="rect">
             <a:avLst/>
@@ -3362,7 +3490,7 @@
             <a:r>
               <a:rPr lang="en-US" sz="2000" b="1" dirty="0">
                 <a:solidFill>
-                  <a:srgbClr val="D4DCE6"/>
+                  <a:srgbClr val="8A8F98"/>
                 </a:solidFill>
                 <a:latin typeface="Calibri" pitchFamily="34" charset="0"/>
                 <a:ea typeface="Calibri" pitchFamily="34" charset="-122"/>
@@ -3376,14 +3504,14 @@
       </p:sp>
       <p:sp>
         <p:nvSpPr>
-          <p:cNvPr id="22" name="Shape 20"/>
+          <p:cNvPr id="23" name="Shape 21"/>
           <p:cNvSpPr/>
           <p:nvPr/>
         </p:nvSpPr>
         <p:spPr>
           <a:xfrm>
-            <a:off x="7360920" y="1783080"/>
-            <a:ext cx="2011680" cy="2286000"/>
+            <a:off x="7360920" y="1965960"/>
+            <a:ext cx="2011680" cy="2194560"/>
           </a:xfrm>
           <a:prstGeom prst="roundRect">
             <a:avLst>
@@ -3410,13 +3538,13 @@
       </p:sp>
       <p:sp>
         <p:nvSpPr>
-          <p:cNvPr id="23" name="Shape 21"/>
+          <p:cNvPr id="24" name="Shape 22"/>
           <p:cNvSpPr/>
           <p:nvPr/>
         </p:nvSpPr>
         <p:spPr>
           <a:xfrm>
-            <a:off x="8110728" y="1965960"/>
+            <a:off x="8110728" y="2139696"/>
             <a:ext cx="512064" cy="512064"/>
           </a:xfrm>
           <a:prstGeom prst="ellipse">
@@ -3430,13 +3558,13 @@
       </p:sp>
       <p:sp>
         <p:nvSpPr>
-          <p:cNvPr id="24" name="Text 22"/>
-          <p:cNvSpPr txBox="1"/>
-          <p:nvPr/>
-        </p:nvSpPr>
-        <p:spPr>
-          <a:xfrm>
-            <a:off x="8110728" y="1965960"/>
+          <p:cNvPr id="25" name="Text 23"/>
+          <p:cNvSpPr txBox="1"/>
+          <p:nvPr/>
+        </p:nvSpPr>
+        <p:spPr>
+          <a:xfrm>
+            <a:off x="8110728" y="2139696"/>
             <a:ext cx="512064" cy="512064"/>
           </a:xfrm>
           <a:prstGeom prst="rect">
@@ -3469,23 +3597,23 @@
       </p:sp>
       <p:sp>
         <p:nvSpPr>
-          <p:cNvPr id="25" name="Text 23"/>
-          <p:cNvSpPr txBox="1"/>
-          <p:nvPr/>
-        </p:nvSpPr>
-        <p:spPr>
-          <a:xfrm>
-            <a:off x="7470648" y="2606040"/>
-            <a:ext cx="1792224" cy="640080"/>
-          </a:xfrm>
-          <a:prstGeom prst="rect">
-            <a:avLst/>
-          </a:prstGeom>
-          <a:noFill/>
-          <a:ln/>
-        </p:spPr>
-        <p:txBody>
-          <a:bodyPr wrap="square" lIns="0" tIns="0" rIns="0" bIns="0" rtlCol="0" anchor="ctr">
+          <p:cNvPr id="26" name="Text 24"/>
+          <p:cNvSpPr txBox="1"/>
+          <p:nvPr/>
+        </p:nvSpPr>
+        <p:spPr>
+          <a:xfrm>
+            <a:off x="7470648" y="2761488"/>
+            <a:ext cx="1792224" cy="548640"/>
+          </a:xfrm>
+          <a:prstGeom prst="rect">
+            <a:avLst/>
+          </a:prstGeom>
+          <a:noFill/>
+          <a:ln/>
+        </p:spPr>
+        <p:txBody>
+          <a:bodyPr wrap="square" lIns="0" tIns="0" rIns="0" bIns="0" rtlCol="0" anchor="t">
             <a:normAutofit/>
           </a:bodyPr>
           <a:lstStyle/>
@@ -3494,7 +3622,7 @@
               <a:buNone/>
             </a:pPr>
             <a:r>
-              <a:rPr lang="en-US" sz="1250" b="1" dirty="0">
+              <a:rPr lang="en-US" sz="1300" b="1" dirty="0">
                 <a:solidFill>
                   <a:srgbClr val="13223B"/>
                 </a:solidFill>
@@ -3504,29 +3632,29 @@
               </a:rPr>
               <a:t>Отбирает значимые</a:t>
             </a:r>
-            <a:endParaRPr lang="en-US" sz="1250" dirty="0"/>
-          </a:p>
-        </p:txBody>
-      </p:sp>
-      <p:sp>
-        <p:nvSpPr>
-          <p:cNvPr id="26" name="Text 24"/>
-          <p:cNvSpPr txBox="1"/>
-          <p:nvPr/>
-        </p:nvSpPr>
-        <p:spPr>
-          <a:xfrm>
-            <a:off x="7470648" y="3200400"/>
-            <a:ext cx="1792224" cy="777240"/>
-          </a:xfrm>
-          <a:prstGeom prst="rect">
-            <a:avLst/>
-          </a:prstGeom>
-          <a:noFill/>
-          <a:ln/>
-        </p:spPr>
-        <p:txBody>
-          <a:bodyPr wrap="square" lIns="0" tIns="0" rIns="0" bIns="0" rtlCol="0" anchor="ctr">
+            <a:endParaRPr lang="en-US" sz="1300" dirty="0"/>
+          </a:p>
+        </p:txBody>
+      </p:sp>
+      <p:sp>
+        <p:nvSpPr>
+          <p:cNvPr id="27" name="Text 25"/>
+          <p:cNvSpPr txBox="1"/>
+          <p:nvPr/>
+        </p:nvSpPr>
+        <p:spPr>
+          <a:xfrm>
+            <a:off x="7470648" y="3310128"/>
+            <a:ext cx="1792224" cy="731520"/>
+          </a:xfrm>
+          <a:prstGeom prst="rect">
+            <a:avLst/>
+          </a:prstGeom>
+          <a:noFill/>
+          <a:ln/>
+        </p:spPr>
+        <p:txBody>
+          <a:bodyPr wrap="square" lIns="0" tIns="0" rIns="0" bIns="0" rtlCol="0" anchor="t">
             <a:normAutofit/>
           </a:bodyPr>
           <a:lstStyle/>
@@ -3535,9 +3663,9 @@
               <a:buNone/>
             </a:pPr>
             <a:r>
-              <a:rPr lang="en-US" sz="1080" dirty="0">
-                <a:solidFill>
-                  <a:srgbClr val="5B6B7C"/>
+              <a:rPr lang="en-US" sz="1100" dirty="0">
+                <a:solidFill>
+                  <a:srgbClr val="566173"/>
                 </a:solidFill>
                 <a:latin typeface="Calibri" pitchFamily="34" charset="0"/>
                 <a:ea typeface="Calibri" pitchFamily="34" charset="-122"/>
@@ -3545,20 +3673,20 @@
               </a:rPr>
               <a:t>решает, что править</a:t>
             </a:r>
-            <a:endParaRPr lang="en-US" sz="1080" dirty="0"/>
-          </a:p>
-        </p:txBody>
-      </p:sp>
-      <p:sp>
-        <p:nvSpPr>
-          <p:cNvPr id="27" name="Text 25"/>
-          <p:cNvSpPr txBox="1"/>
-          <p:nvPr/>
-        </p:nvSpPr>
-        <p:spPr>
-          <a:xfrm>
-            <a:off x="9390888" y="1783080"/>
-            <a:ext cx="256032" cy="2286000"/>
+            <a:endParaRPr lang="en-US" sz="1100" dirty="0"/>
+          </a:p>
+        </p:txBody>
+      </p:sp>
+      <p:sp>
+        <p:nvSpPr>
+          <p:cNvPr id="28" name="Text 26"/>
+          <p:cNvSpPr txBox="1"/>
+          <p:nvPr/>
+        </p:nvSpPr>
+        <p:spPr>
+          <a:xfrm>
+            <a:off x="9390888" y="1965960"/>
+            <a:ext cx="256032" cy="2194560"/>
           </a:xfrm>
           <a:prstGeom prst="rect">
             <a:avLst/>
@@ -3576,7 +3704,7 @@
             <a:r>
               <a:rPr lang="en-US" sz="2000" b="1" dirty="0">
                 <a:solidFill>
-                  <a:srgbClr val="D4DCE6"/>
+                  <a:srgbClr val="8A8F98"/>
                 </a:solidFill>
                 <a:latin typeface="Calibri" pitchFamily="34" charset="0"/>
                 <a:ea typeface="Calibri" pitchFamily="34" charset="-122"/>
@@ -3590,14 +3718,14 @@
       </p:sp>
       <p:sp>
         <p:nvSpPr>
-          <p:cNvPr id="28" name="Shape 26"/>
+          <p:cNvPr id="29" name="Shape 27"/>
           <p:cNvSpPr/>
           <p:nvPr/>
         </p:nvSpPr>
         <p:spPr>
           <a:xfrm>
-            <a:off x="9646920" y="1783080"/>
-            <a:ext cx="2011680" cy="2286000"/>
+            <a:off x="9646920" y="1965960"/>
+            <a:ext cx="2011680" cy="2194560"/>
           </a:xfrm>
           <a:prstGeom prst="roundRect">
             <a:avLst>
@@ -3624,13 +3752,13 @@
       </p:sp>
       <p:sp>
         <p:nvSpPr>
-          <p:cNvPr id="29" name="Shape 27"/>
+          <p:cNvPr id="30" name="Shape 28"/>
           <p:cNvSpPr/>
           <p:nvPr/>
         </p:nvSpPr>
         <p:spPr>
           <a:xfrm>
-            <a:off x="10396728" y="1965960"/>
+            <a:off x="10396728" y="2139696"/>
             <a:ext cx="512064" cy="512064"/>
           </a:xfrm>
           <a:prstGeom prst="ellipse">
@@ -3644,13 +3772,13 @@
       </p:sp>
       <p:sp>
         <p:nvSpPr>
-          <p:cNvPr id="30" name="Text 28"/>
-          <p:cNvSpPr txBox="1"/>
-          <p:nvPr/>
-        </p:nvSpPr>
-        <p:spPr>
-          <a:xfrm>
-            <a:off x="10396728" y="1965960"/>
+          <p:cNvPr id="31" name="Text 29"/>
+          <p:cNvSpPr txBox="1"/>
+          <p:nvPr/>
+        </p:nvSpPr>
+        <p:spPr>
+          <a:xfrm>
+            <a:off x="10396728" y="2139696"/>
             <a:ext cx="512064" cy="512064"/>
           </a:xfrm>
           <a:prstGeom prst="rect">
@@ -3683,23 +3811,23 @@
       </p:sp>
       <p:sp>
         <p:nvSpPr>
-          <p:cNvPr id="31" name="Text 29"/>
-          <p:cNvSpPr txBox="1"/>
-          <p:nvPr/>
-        </p:nvSpPr>
-        <p:spPr>
-          <a:xfrm>
-            <a:off x="9756648" y="2606040"/>
-            <a:ext cx="1792224" cy="640080"/>
-          </a:xfrm>
-          <a:prstGeom prst="rect">
-            <a:avLst/>
-          </a:prstGeom>
-          <a:noFill/>
-          <a:ln/>
-        </p:spPr>
-        <p:txBody>
-          <a:bodyPr wrap="square" lIns="0" tIns="0" rIns="0" bIns="0" rtlCol="0" anchor="ctr">
+          <p:cNvPr id="32" name="Text 30"/>
+          <p:cNvSpPr txBox="1"/>
+          <p:nvPr/>
+        </p:nvSpPr>
+        <p:spPr>
+          <a:xfrm>
+            <a:off x="9756648" y="2761488"/>
+            <a:ext cx="1792224" cy="548640"/>
+          </a:xfrm>
+          <a:prstGeom prst="rect">
+            <a:avLst/>
+          </a:prstGeom>
+          <a:noFill/>
+          <a:ln/>
+        </p:spPr>
+        <p:txBody>
+          <a:bodyPr wrap="square" lIns="0" tIns="0" rIns="0" bIns="0" rtlCol="0" anchor="t">
             <a:normAutofit/>
           </a:bodyPr>
           <a:lstStyle/>
@@ -3708,7 +3836,7 @@
               <a:buNone/>
             </a:pPr>
             <a:r>
-              <a:rPr lang="en-US" sz="1250" b="1" dirty="0">
+              <a:rPr lang="en-US" sz="1300" b="1" dirty="0">
                 <a:solidFill>
                   <a:srgbClr val="13223B"/>
                 </a:solidFill>
@@ -3718,29 +3846,29 @@
               </a:rPr>
               <a:t>Дорабатывает ТЗ</a:t>
             </a:r>
-            <a:endParaRPr lang="en-US" sz="1250" dirty="0"/>
-          </a:p>
-        </p:txBody>
-      </p:sp>
-      <p:sp>
-        <p:nvSpPr>
-          <p:cNvPr id="32" name="Text 30"/>
-          <p:cNvSpPr txBox="1"/>
-          <p:nvPr/>
-        </p:nvSpPr>
-        <p:spPr>
-          <a:xfrm>
-            <a:off x="9756648" y="3200400"/>
-            <a:ext cx="1792224" cy="777240"/>
-          </a:xfrm>
-          <a:prstGeom prst="rect">
-            <a:avLst/>
-          </a:prstGeom>
-          <a:noFill/>
-          <a:ln/>
-        </p:spPr>
-        <p:txBody>
-          <a:bodyPr wrap="square" lIns="0" tIns="0" rIns="0" bIns="0" rtlCol="0" anchor="ctr">
+            <a:endParaRPr lang="en-US" sz="1300" dirty="0"/>
+          </a:p>
+        </p:txBody>
+      </p:sp>
+      <p:sp>
+        <p:nvSpPr>
+          <p:cNvPr id="33" name="Text 31"/>
+          <p:cNvSpPr txBox="1"/>
+          <p:nvPr/>
+        </p:nvSpPr>
+        <p:spPr>
+          <a:xfrm>
+            <a:off x="9756648" y="3310128"/>
+            <a:ext cx="1792224" cy="731520"/>
+          </a:xfrm>
+          <a:prstGeom prst="rect">
+            <a:avLst/>
+          </a:prstGeom>
+          <a:noFill/>
+          <a:ln/>
+        </p:spPr>
+        <p:txBody>
+          <a:bodyPr wrap="square" lIns="0" tIns="0" rIns="0" bIns="0" rtlCol="0" anchor="t">
             <a:normAutofit/>
           </a:bodyPr>
           <a:lstStyle/>
@@ -3749,9 +3877,9 @@
               <a:buNone/>
             </a:pPr>
             <a:r>
-              <a:rPr lang="en-US" sz="1080" dirty="0">
-                <a:solidFill>
-                  <a:srgbClr val="5B6B7C"/>
+              <a:rPr lang="en-US" sz="1100" dirty="0">
+                <a:solidFill>
+                  <a:srgbClr val="566173"/>
                 </a:solidFill>
                 <a:latin typeface="Calibri" pitchFamily="34" charset="0"/>
                 <a:ea typeface="Calibri" pitchFamily="34" charset="-122"/>
@@ -3759,24 +3887,24 @@
               </a:rPr>
               <a:t>и отдаёт в разработку</a:t>
             </a:r>
-            <a:endParaRPr lang="en-US" sz="1080" dirty="0"/>
-          </a:p>
-        </p:txBody>
-      </p:sp>
-      <p:sp>
-        <p:nvSpPr>
-          <p:cNvPr id="33" name="Shape 31"/>
+            <a:endParaRPr lang="en-US" sz="1100" dirty="0"/>
+          </a:p>
+        </p:txBody>
+      </p:sp>
+      <p:sp>
+        <p:nvSpPr>
+          <p:cNvPr id="34" name="Shape 32"/>
           <p:cNvSpPr/>
           <p:nvPr/>
         </p:nvSpPr>
         <p:spPr>
           <a:xfrm>
-            <a:off x="502920" y="4572000"/>
-            <a:ext cx="11155680" cy="1371600"/>
+            <a:off x="502920" y="4617720"/>
+            <a:ext cx="11155680" cy="1417320"/>
           </a:xfrm>
           <a:prstGeom prst="roundRect">
             <a:avLst>
-              <a:gd name="adj" fmla="val 5333"/>
+              <a:gd name="adj" fmla="val 5161"/>
             </a:avLst>
           </a:prstGeom>
           <a:solidFill>
@@ -3792,13 +3920,13 @@
       </p:sp>
       <p:sp>
         <p:nvSpPr>
-          <p:cNvPr id="34" name="Text 32"/>
-          <p:cNvSpPr txBox="1"/>
-          <p:nvPr/>
-        </p:nvSpPr>
-        <p:spPr>
-          <a:xfrm>
-            <a:off x="777240" y="4736592"/>
+          <p:cNvPr id="35" name="Text 33"/>
+          <p:cNvSpPr txBox="1"/>
+          <p:nvPr/>
+        </p:nvSpPr>
+        <p:spPr>
+          <a:xfrm>
+            <a:off x="777240" y="4791456"/>
             <a:ext cx="10607040" cy="365760"/>
           </a:xfrm>
           <a:prstGeom prst="rect">
@@ -3823,7 +3951,7 @@
                 <a:ea typeface="Calibri" pitchFamily="34" charset="-122"/>
                 <a:cs typeface="Calibri" pitchFamily="34" charset="-120"/>
               </a:rPr>
-              <a:t>Инструмент — дополнительное предварительное ревью</a:t>
+              <a:t>Дополнительное предварительное ревью, не замена аналитика</a:t>
             </a:r>
             <a:endParaRPr lang="en-US" sz="1400" dirty="0"/>
           </a:p>
@@ -3831,13 +3959,13 @@
       </p:sp>
       <p:sp>
         <p:nvSpPr>
-          <p:cNvPr id="35" name="Text 33"/>
-          <p:cNvSpPr txBox="1"/>
-          <p:nvPr/>
-        </p:nvSpPr>
-        <p:spPr>
-          <a:xfrm>
-            <a:off x="777240" y="5084064"/>
+          <p:cNvPr id="36" name="Text 34"/>
+          <p:cNvSpPr txBox="1"/>
+          <p:nvPr/>
+        </p:nvSpPr>
+        <p:spPr>
+          <a:xfrm>
+            <a:off x="777240" y="5138928"/>
             <a:ext cx="10607040" cy="777240"/>
           </a:xfrm>
           <a:prstGeom prst="rect">
@@ -3853,6 +3981,9 @@
           <a:lstStyle/>
           <a:p>
             <a:pPr marL="152400" indent="-152400">
+              <a:lnSpc>
+                <a:spcPct val="100000"/>
+              </a:lnSpc>
               <a:spcAft>
                 <a:spcPts val="500"/>
               </a:spcAft>
@@ -3868,12 +3999,15 @@
                 <a:ea typeface="Calibri" pitchFamily="34" charset="-122"/>
                 <a:cs typeface="Calibri" pitchFamily="34" charset="-120"/>
               </a:rPr>
-              <a:t>не заменяет аналитика и не выносит решение о готовности документа;</a:t>
+              <a:t>инструмент не выносит решение о готовности документа — это делает аналитик;</a:t>
             </a:r>
             <a:endParaRPr lang="en-US" sz="1250" dirty="0"/>
           </a:p>
           <a:p>
             <a:pPr marL="152400" indent="-152400">
+              <a:lnSpc>
+                <a:spcPct val="100000"/>
+              </a:lnSpc>
               <a:spcAft>
                 <a:spcPts val="500"/>
               </a:spcAft>
@@ -3889,7 +4023,7 @@
                 <a:ea typeface="Calibri" pitchFamily="34" charset="-122"/>
                 <a:cs typeface="Calibri" pitchFamily="34" charset="-120"/>
               </a:rPr>
-              <a:t>вторичные пользователи — разработчик и тимлид: быстрый входной чек перед оценкой задачи.</a:t>
+              <a:t>вторичные пользователи: разработчик и тимлид — быстрый входной чек перед оценкой.</a:t>
             </a:r>
             <a:endParaRPr lang="en-US" sz="1250" dirty="0"/>
           </a:p>
@@ -3935,7 +4069,7 @@
         </p:nvSpPr>
         <p:spPr>
           <a:xfrm>
-            <a:off x="502920" y="402336"/>
+            <a:off x="502920" y="384048"/>
             <a:ext cx="11155680" cy="292608"/>
           </a:xfrm>
           <a:prstGeom prst="rect">
@@ -3945,7 +4079,7 @@
           <a:ln/>
         </p:spPr>
         <p:txBody>
-          <a:bodyPr wrap="square" lIns="0" tIns="0" rIns="0" bIns="0" rtlCol="0" anchor="ctr"/>
+          <a:bodyPr wrap="square" lIns="0" tIns="0" rIns="0" bIns="0" rtlCol="0" anchor="t"/>
           <a:lstStyle/>
           <a:p>
             <a:pPr indent="0" marL="0">
@@ -3974,17 +4108,17 @@
         </p:nvSpPr>
         <p:spPr>
           <a:xfrm>
-            <a:off x="502920" y="676656"/>
-            <a:ext cx="11155680" cy="868680"/>
-          </a:xfrm>
-          <a:prstGeom prst="rect">
-            <a:avLst/>
-          </a:prstGeom>
-          <a:noFill/>
-          <a:ln/>
-        </p:spPr>
-        <p:txBody>
-          <a:bodyPr wrap="square" lIns="0" tIns="0" rIns="0" bIns="0" rtlCol="0" anchor="ctr">
+            <a:off x="502920" y="658368"/>
+            <a:ext cx="11155680" cy="804672"/>
+          </a:xfrm>
+          <a:prstGeom prst="rect">
+            <a:avLst/>
+          </a:prstGeom>
+          <a:noFill/>
+          <a:ln/>
+        </p:spPr>
+        <p:txBody>
+          <a:bodyPr wrap="square" lIns="0" tIns="0" rIns="0" bIns="0" rtlCol="0" anchor="t">
             <a:normAutofit/>
           </a:bodyPr>
           <a:lstStyle/>
@@ -3993,7 +4127,7 @@
               <a:buNone/>
             </a:pPr>
             <a:r>
-              <a:rPr lang="en-US" sz="3000" b="1" dirty="0">
+              <a:rPr lang="en-US" sz="2900" b="1" dirty="0">
                 <a:solidFill>
                   <a:srgbClr val="13223B"/>
                 </a:solidFill>
@@ -4003,7 +4137,7 @@
               </a:rPr>
               <a:t>Что должно делать решение</a:t>
             </a:r>
-            <a:endParaRPr lang="en-US" sz="3000" dirty="0"/>
+            <a:endParaRPr lang="en-US" sz="2900" dirty="0"/>
           </a:p>
         </p:txBody>
       </p:sp>
@@ -4016,11 +4150,11 @@
         <p:spPr>
           <a:xfrm>
             <a:off x="502920" y="1737360"/>
-            <a:ext cx="6510528" cy="3931920"/>
+            <a:ext cx="6333134" cy="4114800"/>
           </a:xfrm>
           <a:prstGeom prst="roundRect">
             <a:avLst>
-              <a:gd name="adj" fmla="val 1860"/>
+              <a:gd name="adj" fmla="val 1778"/>
             </a:avLst>
           </a:prstGeom>
           <a:solidFill>
@@ -4049,8 +4183,8 @@
         </p:nvSpPr>
         <p:spPr>
           <a:xfrm>
-            <a:off x="822960" y="2057400"/>
-            <a:ext cx="5870448" cy="3291840"/>
+            <a:off x="822960" y="2011680"/>
+            <a:ext cx="5693054" cy="3566160"/>
           </a:xfrm>
           <a:prstGeom prst="rect">
             <a:avLst/>
@@ -4065,14 +4199,17 @@
           <a:lstStyle/>
           <a:p>
             <a:pPr marL="152400" indent="-152400">
+              <a:lnSpc>
+                <a:spcPct val="100000"/>
+              </a:lnSpc>
               <a:spcAft>
-                <a:spcPts val="1400"/>
+                <a:spcPts val="1500"/>
               </a:spcAft>
               <a:buSzPct val="100000"/>
               <a:buChar char="•"/>
             </a:pPr>
             <a:r>
-              <a:rPr lang="en-US" sz="1400" dirty="0">
+              <a:rPr lang="en-US" sz="1450" dirty="0">
                 <a:solidFill>
                   <a:srgbClr val="1E3252"/>
                 </a:solidFill>
@@ -4082,18 +4219,21 @@
               </a:rPr>
               <a:t>находить конкретные фрагменты, непонятные разработчику;</a:t>
             </a:r>
-            <a:endParaRPr lang="en-US" sz="1400" dirty="0"/>
+            <a:endParaRPr lang="en-US" sz="1450" dirty="0"/>
           </a:p>
           <a:p>
             <a:pPr marL="152400" indent="-152400">
+              <a:lnSpc>
+                <a:spcPct val="100000"/>
+              </a:lnSpc>
               <a:spcAft>
-                <a:spcPts val="1400"/>
+                <a:spcPts val="1500"/>
               </a:spcAft>
               <a:buSzPct val="100000"/>
               <a:buChar char="•"/>
             </a:pPr>
             <a:r>
-              <a:rPr lang="en-US" sz="1400" dirty="0">
+              <a:rPr lang="en-US" sz="1450" dirty="0">
                 <a:solidFill>
                   <a:srgbClr val="1E3252"/>
                 </a:solidFill>
@@ -4103,18 +4243,21 @@
               </a:rPr>
               <a:t>определять недостающую и неоднозначную информацию;</a:t>
             </a:r>
-            <a:endParaRPr lang="en-US" sz="1400" dirty="0"/>
+            <a:endParaRPr lang="en-US" sz="1450" dirty="0"/>
           </a:p>
           <a:p>
             <a:pPr marL="152400" indent="-152400">
+              <a:lnSpc>
+                <a:spcPct val="100000"/>
+              </a:lnSpc>
               <a:spcAft>
-                <a:spcPts val="1400"/>
+                <a:spcPts val="1500"/>
               </a:spcAft>
               <a:buSzPct val="100000"/>
               <a:buChar char="•"/>
             </a:pPr>
             <a:r>
-              <a:rPr lang="en-US" sz="1400" dirty="0">
+              <a:rPr lang="en-US" sz="1450" dirty="0">
                 <a:solidFill>
                   <a:srgbClr val="1E3252"/>
                 </a:solidFill>
@@ -4124,18 +4267,21 @@
               </a:rPr>
               <a:t>объяснять, почему фрагмент требует внимания;</a:t>
             </a:r>
-            <a:endParaRPr lang="en-US" sz="1400" dirty="0"/>
+            <a:endParaRPr lang="en-US" sz="1450" dirty="0"/>
           </a:p>
           <a:p>
             <a:pPr marL="152400" indent="-152400">
+              <a:lnSpc>
+                <a:spcPct val="100000"/>
+              </a:lnSpc>
               <a:spcAft>
-                <a:spcPts val="1400"/>
+                <a:spcPts val="1500"/>
               </a:spcAft>
               <a:buSzPct val="100000"/>
               <a:buChar char="•"/>
             </a:pPr>
             <a:r>
-              <a:rPr lang="en-US" sz="1400" dirty="0">
+              <a:rPr lang="en-US" sz="1450" dirty="0">
                 <a:solidFill>
                   <a:srgbClr val="1E3252"/>
                 </a:solidFill>
@@ -4145,18 +4291,21 @@
               </a:rPr>
               <a:t>предлагать, что уточнить или дополнить;</a:t>
             </a:r>
-            <a:endParaRPr lang="en-US" sz="1400" dirty="0"/>
+            <a:endParaRPr lang="en-US" sz="1450" dirty="0"/>
           </a:p>
           <a:p>
             <a:pPr marL="152400" indent="-152400">
+              <a:lnSpc>
+                <a:spcPct val="100000"/>
+              </a:lnSpc>
               <a:spcAft>
-                <a:spcPts val="1400"/>
+                <a:spcPts val="1500"/>
               </a:spcAft>
               <a:buSzPct val="100000"/>
               <a:buChar char="•"/>
             </a:pPr>
             <a:r>
-              <a:rPr lang="en-US" sz="1400" dirty="0">
+              <a:rPr lang="en-US" sz="1450" dirty="0">
                 <a:solidFill>
                   <a:srgbClr val="1E3252"/>
                 </a:solidFill>
@@ -4166,18 +4315,21 @@
               </a:rPr>
               <a:t>показывать, к какому разделу ТЗ относится замечание;</a:t>
             </a:r>
-            <a:endParaRPr lang="en-US" sz="1400" dirty="0"/>
+            <a:endParaRPr lang="en-US" sz="1450" dirty="0"/>
           </a:p>
           <a:p>
             <a:pPr marL="152400" indent="-152400">
+              <a:lnSpc>
+                <a:spcPct val="100000"/>
+              </a:lnSpc>
               <a:spcAft>
-                <a:spcPts val="1400"/>
+                <a:spcPts val="1500"/>
               </a:spcAft>
               <a:buSzPct val="100000"/>
               <a:buChar char="•"/>
             </a:pPr>
             <a:r>
-              <a:rPr lang="en-US" sz="1400" dirty="0">
+              <a:rPr lang="en-US" sz="1450" dirty="0">
                 <a:solidFill>
                   <a:srgbClr val="1E3252"/>
                 </a:solidFill>
@@ -4187,7 +4339,7 @@
               </a:rPr>
               <a:t>формировать общий результат проверки документа.</a:t>
             </a:r>
-            <a:endParaRPr lang="en-US" sz="1400" dirty="0"/>
+            <a:endParaRPr lang="en-US" sz="1450" dirty="0"/>
           </a:p>
         </p:txBody>
       </p:sp>
@@ -4199,12 +4351,12 @@
         </p:nvSpPr>
         <p:spPr>
           <a:xfrm>
-            <a:off x="7287768" y="1737360"/>
-            <a:ext cx="4370832" cy="3931920"/>
+            <a:off x="7018934" y="1737360"/>
+            <a:ext cx="4639666" cy="4114800"/>
           </a:xfrm>
           <a:prstGeom prst="roundRect">
             <a:avLst>
-              <a:gd name="adj" fmla="val 1860"/>
+              <a:gd name="adj" fmla="val 1778"/>
             </a:avLst>
           </a:prstGeom>
           <a:solidFill>
@@ -4221,8 +4373,8 @@
         </p:nvSpPr>
         <p:spPr>
           <a:xfrm>
-            <a:off x="7562088" y="2011680"/>
-            <a:ext cx="3822192" cy="310896"/>
+            <a:off x="7311542" y="2057400"/>
+            <a:ext cx="4054450" cy="310896"/>
           </a:xfrm>
           <a:prstGeom prst="rect">
             <a:avLst/>
@@ -4246,7 +4398,7 @@
                 <a:ea typeface="Calibri" pitchFamily="34" charset="-122"/>
                 <a:cs typeface="Calibri" pitchFamily="34" charset="-120"/>
               </a:rPr>
-              <a:t>Ключевой принцип</a:t>
+              <a:t>КЛЮЧЕВОЙ ПРИНЦИП</a:t>
             </a:r>
             <a:endParaRPr lang="en-US" sz="1200" dirty="0"/>
           </a:p>
@@ -4260,8 +4412,8 @@
         </p:nvSpPr>
         <p:spPr>
           <a:xfrm>
-            <a:off x="7562088" y="2432304"/>
-            <a:ext cx="3822192" cy="1371600"/>
+            <a:off x="7311542" y="2468880"/>
+            <a:ext cx="4054450" cy="1554480"/>
           </a:xfrm>
           <a:prstGeom prst="rect">
             <a:avLst/>
@@ -4277,12 +4429,12 @@
           <a:p>
             <a:pPr indent="0" marL="0">
               <a:lnSpc>
-                <a:spcPct val="115000"/>
+                <a:spcPct val="118000"/>
               </a:lnSpc>
               <a:buNone/>
             </a:pPr>
             <a:r>
-              <a:rPr lang="en-US" sz="1800" b="1" dirty="0">
+              <a:rPr lang="en-US" sz="1900" b="1" dirty="0">
                 <a:solidFill>
                   <a:srgbClr val="FFFFFF"/>
                 </a:solidFill>
@@ -4290,9 +4442,9 @@
                 <a:ea typeface="Cambria" pitchFamily="34" charset="-122"/>
                 <a:cs typeface="Cambria" pitchFamily="34" charset="-120"/>
               </a:rPr>
-              <a:t>Замечание привязано к конкретному содержанию ТЗ, а не является общим советом.</a:t>
-            </a:r>
-            <a:endParaRPr lang="en-US" sz="1800" dirty="0"/>
+              <a:t>Замечание привязано к конкретному фрагменту ТЗ, а не является общим советом.</a:t>
+            </a:r>
+            <a:endParaRPr lang="en-US" sz="1900" dirty="0"/>
           </a:p>
         </p:txBody>
       </p:sp>
@@ -4304,8 +4456,8 @@
         </p:nvSpPr>
         <p:spPr>
           <a:xfrm>
-            <a:off x="7562088" y="3977640"/>
-            <a:ext cx="3822192" cy="1463040"/>
+            <a:off x="7311542" y="4160520"/>
+            <a:ext cx="4054450" cy="1463040"/>
           </a:xfrm>
           <a:prstGeom prst="rect">
             <a:avLst/>
@@ -4321,12 +4473,12 @@
           <a:p>
             <a:pPr indent="0" marL="0">
               <a:lnSpc>
-                <a:spcPct val="115000"/>
+                <a:spcPct val="120000"/>
               </a:lnSpc>
               <a:buNone/>
             </a:pPr>
             <a:r>
-              <a:rPr lang="en-US" sz="1250" dirty="0">
+              <a:rPr lang="en-US" sz="1300" dirty="0">
                 <a:solidFill>
                   <a:srgbClr val="C6D2E2"/>
                 </a:solidFill>
@@ -4336,7 +4488,7 @@
               </a:rPr>
               <a:t>Каждое замечание содержит дословную цитату из документа. Замечание без привязки к тексту отбрасывается.</a:t>
             </a:r>
-            <a:endParaRPr lang="en-US" sz="1250" dirty="0"/>
+            <a:endParaRPr lang="en-US" sz="1300" dirty="0"/>
           </a:p>
         </p:txBody>
       </p:sp>
@@ -4380,7 +4532,7 @@
         </p:nvSpPr>
         <p:spPr>
           <a:xfrm>
-            <a:off x="502920" y="402336"/>
+            <a:off x="502920" y="384048"/>
             <a:ext cx="11155680" cy="292608"/>
           </a:xfrm>
           <a:prstGeom prst="rect">
@@ -4390,7 +4542,7 @@
           <a:ln/>
         </p:spPr>
         <p:txBody>
-          <a:bodyPr wrap="square" lIns="0" tIns="0" rIns="0" bIns="0" rtlCol="0" anchor="ctr"/>
+          <a:bodyPr wrap="square" lIns="0" tIns="0" rIns="0" bIns="0" rtlCol="0" anchor="t"/>
           <a:lstStyle/>
           <a:p>
             <a:pPr indent="0" marL="0">
@@ -4419,17 +4571,17 @@
         </p:nvSpPr>
         <p:spPr>
           <a:xfrm>
-            <a:off x="502920" y="676656"/>
-            <a:ext cx="11155680" cy="868680"/>
-          </a:xfrm>
-          <a:prstGeom prst="rect">
-            <a:avLst/>
-          </a:prstGeom>
-          <a:noFill/>
-          <a:ln/>
-        </p:spPr>
-        <p:txBody>
-          <a:bodyPr wrap="square" lIns="0" tIns="0" rIns="0" bIns="0" rtlCol="0" anchor="ctr">
+            <a:off x="502920" y="658368"/>
+            <a:ext cx="11155680" cy="804672"/>
+          </a:xfrm>
+          <a:prstGeom prst="rect">
+            <a:avLst/>
+          </a:prstGeom>
+          <a:noFill/>
+          <a:ln/>
+        </p:spPr>
+        <p:txBody>
+          <a:bodyPr wrap="square" lIns="0" tIns="0" rIns="0" bIns="0" rtlCol="0" anchor="t">
             <a:normAutofit/>
           </a:bodyPr>
           <a:lstStyle/>
@@ -4438,7 +4590,7 @@
               <a:buNone/>
             </a:pPr>
             <a:r>
-              <a:rPr lang="en-US" sz="3000" b="1" dirty="0">
+              <a:rPr lang="en-US" sz="2900" b="1" dirty="0">
                 <a:solidFill>
                   <a:srgbClr val="13223B"/>
                 </a:solidFill>
@@ -4448,7 +4600,7 @@
               </a:rPr>
               <a:t>Пайплайн предварительного ревью</a:t>
             </a:r>
-            <a:endParaRPr lang="en-US" sz="3000" dirty="0"/>
+            <a:endParaRPr lang="en-US" sz="2900" dirty="0"/>
           </a:p>
         </p:txBody>
       </p:sp>
@@ -4460,12 +4612,12 @@
         </p:nvSpPr>
         <p:spPr>
           <a:xfrm>
-            <a:off x="502920" y="1783080"/>
-            <a:ext cx="6916522" cy="841248"/>
+            <a:off x="548640" y="1783080"/>
+            <a:ext cx="6693408" cy="822960"/>
           </a:xfrm>
           <a:prstGeom prst="roundRect">
             <a:avLst>
-              <a:gd name="adj" fmla="val 7609"/>
+              <a:gd name="adj" fmla="val 7778"/>
             </a:avLst>
           </a:prstGeom>
           <a:solidFill>
@@ -4487,8 +4639,8 @@
         </p:nvSpPr>
         <p:spPr>
           <a:xfrm>
-            <a:off x="667512" y="2020824"/>
-            <a:ext cx="365760" cy="365760"/>
+            <a:off x="731520" y="2002536"/>
+            <a:ext cx="384048" cy="384048"/>
           </a:xfrm>
           <a:prstGeom prst="ellipse">
             <a:avLst/>
@@ -4507,8 +4659,8 @@
         </p:nvSpPr>
         <p:spPr>
           <a:xfrm>
-            <a:off x="667512" y="2020824"/>
-            <a:ext cx="365760" cy="365760"/>
+            <a:off x="731520" y="2002536"/>
+            <a:ext cx="384048" cy="384048"/>
           </a:xfrm>
           <a:prstGeom prst="rect">
             <a:avLst/>
@@ -4524,7 +4676,7 @@
               <a:buNone/>
             </a:pPr>
             <a:r>
-              <a:rPr lang="en-US" sz="1100" b="1" dirty="0">
+              <a:rPr lang="en-US" sz="1200" b="1" dirty="0">
                 <a:solidFill>
                   <a:srgbClr val="FFFFFF"/>
                 </a:solidFill>
@@ -4534,7 +4686,7 @@
               </a:rPr>
               <a:t>1</a:t>
             </a:r>
-            <a:endParaRPr lang="en-US" sz="1100" dirty="0"/>
+            <a:endParaRPr lang="en-US" sz="1200" dirty="0"/>
           </a:p>
         </p:txBody>
       </p:sp>
@@ -4546,24 +4698,24 @@
         </p:nvSpPr>
         <p:spPr>
           <a:xfrm>
-            <a:off x="1188720" y="1874520"/>
-            <a:ext cx="6047842" cy="310896"/>
-          </a:xfrm>
-          <a:prstGeom prst="rect">
-            <a:avLst/>
-          </a:prstGeom>
-          <a:noFill/>
-          <a:ln/>
-        </p:spPr>
-        <p:txBody>
-          <a:bodyPr wrap="square" lIns="0" tIns="0" rIns="0" bIns="0" rtlCol="0" anchor="ctr"/>
-          <a:lstStyle/>
-          <a:p>
-            <a:pPr indent="0" marL="0">
-              <a:buNone/>
-            </a:pPr>
-            <a:r>
-              <a:rPr lang="en-US" sz="1350" b="1" dirty="0">
+            <a:off x="1280160" y="1901952"/>
+            <a:ext cx="5687568" cy="310896"/>
+          </a:xfrm>
+          <a:prstGeom prst="rect">
+            <a:avLst/>
+          </a:prstGeom>
+          <a:noFill/>
+          <a:ln/>
+        </p:spPr>
+        <p:txBody>
+          <a:bodyPr wrap="square" lIns="0" tIns="0" rIns="0" bIns="0" rtlCol="0" anchor="t"/>
+          <a:lstStyle/>
+          <a:p>
+            <a:pPr indent="0" marL="0">
+              <a:buNone/>
+            </a:pPr>
+            <a:r>
+              <a:rPr lang="en-US" sz="1450" b="1" dirty="0">
                 <a:solidFill>
                   <a:srgbClr val="13223B"/>
                 </a:solidFill>
@@ -4573,7 +4725,7 @@
               </a:rPr>
               <a:t>Разбор документа</a:t>
             </a:r>
-            <a:endParaRPr lang="en-US" sz="1350" dirty="0"/>
+            <a:endParaRPr lang="en-US" sz="1450" dirty="0"/>
           </a:p>
         </p:txBody>
       </p:sp>
@@ -4585,17 +4737,17 @@
         </p:nvSpPr>
         <p:spPr>
           <a:xfrm>
-            <a:off x="1188720" y="2167128"/>
-            <a:ext cx="6047842" cy="402336"/>
-          </a:xfrm>
-          <a:prstGeom prst="rect">
-            <a:avLst/>
-          </a:prstGeom>
-          <a:noFill/>
-          <a:ln/>
-        </p:spPr>
-        <p:txBody>
-          <a:bodyPr wrap="square" lIns="0" tIns="0" rIns="0" bIns="0" rtlCol="0" anchor="ctr">
+            <a:off x="1280160" y="2212848"/>
+            <a:ext cx="5687568" cy="329184"/>
+          </a:xfrm>
+          <a:prstGeom prst="rect">
+            <a:avLst/>
+          </a:prstGeom>
+          <a:noFill/>
+          <a:ln/>
+        </p:spPr>
+        <p:txBody>
+          <a:bodyPr wrap="square" lIns="0" tIns="0" rIns="0" bIns="0" rtlCol="0" anchor="t">
             <a:normAutofit/>
           </a:bodyPr>
           <a:lstStyle/>
@@ -4604,17 +4756,17 @@
               <a:buNone/>
             </a:pPr>
             <a:r>
-              <a:rPr lang="en-US" sz="1050" dirty="0">
-                <a:solidFill>
-                  <a:srgbClr val="5B6B7C"/>
-                </a:solidFill>
-                <a:latin typeface="Calibri" pitchFamily="34" charset="0"/>
-                <a:ea typeface="Calibri" pitchFamily="34" charset="-122"/>
-                <a:cs typeface="Calibri" pitchFamily="34" charset="-120"/>
-              </a:rPr>
-              <a:t>.md / .txt / .docx (с таблицами) → разделы по заголовкам и нумерации</a:t>
-            </a:r>
-            <a:endParaRPr lang="en-US" sz="1050" dirty="0"/>
+              <a:rPr lang="en-US" sz="1150" dirty="0">
+                <a:solidFill>
+                  <a:srgbClr val="566173"/>
+                </a:solidFill>
+                <a:latin typeface="Calibri" pitchFamily="34" charset="0"/>
+                <a:ea typeface="Calibri" pitchFamily="34" charset="-122"/>
+                <a:cs typeface="Calibri" pitchFamily="34" charset="-120"/>
+              </a:rPr>
+              <a:t>.md / .txt / .docx с таблицами → разбивка на разделы</a:t>
+            </a:r>
+            <a:endParaRPr lang="en-US" sz="1150" dirty="0"/>
           </a:p>
         </p:txBody>
       </p:sp>
@@ -4626,12 +4778,12 @@
         </p:nvSpPr>
         <p:spPr>
           <a:xfrm>
-            <a:off x="502920" y="2734056"/>
-            <a:ext cx="6916522" cy="841248"/>
+            <a:off x="548640" y="2734056"/>
+            <a:ext cx="6693408" cy="822960"/>
           </a:xfrm>
           <a:prstGeom prst="roundRect">
             <a:avLst>
-              <a:gd name="adj" fmla="val 7609"/>
+              <a:gd name="adj" fmla="val 7778"/>
             </a:avLst>
           </a:prstGeom>
           <a:solidFill>
@@ -4653,8 +4805,8 @@
         </p:nvSpPr>
         <p:spPr>
           <a:xfrm>
-            <a:off x="667512" y="2971800"/>
-            <a:ext cx="365760" cy="365760"/>
+            <a:off x="731520" y="2953512"/>
+            <a:ext cx="384048" cy="384048"/>
           </a:xfrm>
           <a:prstGeom prst="ellipse">
             <a:avLst/>
@@ -4673,8 +4825,8 @@
         </p:nvSpPr>
         <p:spPr>
           <a:xfrm>
-            <a:off x="667512" y="2971800"/>
-            <a:ext cx="365760" cy="365760"/>
+            <a:off x="731520" y="2953512"/>
+            <a:ext cx="384048" cy="384048"/>
           </a:xfrm>
           <a:prstGeom prst="rect">
             <a:avLst/>
@@ -4690,7 +4842,7 @@
               <a:buNone/>
             </a:pPr>
             <a:r>
-              <a:rPr lang="en-US" sz="1100" b="1" dirty="0">
+              <a:rPr lang="en-US" sz="1200" b="1" dirty="0">
                 <a:solidFill>
                   <a:srgbClr val="FFFFFF"/>
                 </a:solidFill>
@@ -4700,7 +4852,7 @@
               </a:rPr>
               <a:t>2</a:t>
             </a:r>
-            <a:endParaRPr lang="en-US" sz="1100" dirty="0"/>
+            <a:endParaRPr lang="en-US" sz="1200" dirty="0"/>
           </a:p>
         </p:txBody>
       </p:sp>
@@ -4712,24 +4864,24 @@
         </p:nvSpPr>
         <p:spPr>
           <a:xfrm>
-            <a:off x="1188720" y="2825496"/>
-            <a:ext cx="6047842" cy="310896"/>
-          </a:xfrm>
-          <a:prstGeom prst="rect">
-            <a:avLst/>
-          </a:prstGeom>
-          <a:noFill/>
-          <a:ln/>
-        </p:spPr>
-        <p:txBody>
-          <a:bodyPr wrap="square" lIns="0" tIns="0" rIns="0" bIns="0" rtlCol="0" anchor="ctr"/>
-          <a:lstStyle/>
-          <a:p>
-            <a:pPr indent="0" marL="0">
-              <a:buNone/>
-            </a:pPr>
-            <a:r>
-              <a:rPr lang="en-US" sz="1350" b="1" dirty="0">
+            <a:off x="1280160" y="2852928"/>
+            <a:ext cx="5687568" cy="310896"/>
+          </a:xfrm>
+          <a:prstGeom prst="rect">
+            <a:avLst/>
+          </a:prstGeom>
+          <a:noFill/>
+          <a:ln/>
+        </p:spPr>
+        <p:txBody>
+          <a:bodyPr wrap="square" lIns="0" tIns="0" rIns="0" bIns="0" rtlCol="0" anchor="t"/>
+          <a:lstStyle/>
+          <a:p>
+            <a:pPr indent="0" marL="0">
+              <a:buNone/>
+            </a:pPr>
+            <a:r>
+              <a:rPr lang="en-US" sz="1450" b="1" dirty="0">
                 <a:solidFill>
                   <a:srgbClr val="13223B"/>
                 </a:solidFill>
@@ -4739,7 +4891,7 @@
               </a:rPr>
               <a:t>Покрытие шаблона</a:t>
             </a:r>
-            <a:endParaRPr lang="en-US" sz="1350" dirty="0"/>
+            <a:endParaRPr lang="en-US" sz="1450" dirty="0"/>
           </a:p>
         </p:txBody>
       </p:sp>
@@ -4751,17 +4903,17 @@
         </p:nvSpPr>
         <p:spPr>
           <a:xfrm>
-            <a:off x="1188720" y="3118104"/>
-            <a:ext cx="6047842" cy="402336"/>
-          </a:xfrm>
-          <a:prstGeom prst="rect">
-            <a:avLst/>
-          </a:prstGeom>
-          <a:noFill/>
-          <a:ln/>
-        </p:spPr>
-        <p:txBody>
-          <a:bodyPr wrap="square" lIns="0" tIns="0" rIns="0" bIns="0" rtlCol="0" anchor="ctr">
+            <a:off x="1280160" y="3163824"/>
+            <a:ext cx="5687568" cy="329184"/>
+          </a:xfrm>
+          <a:prstGeom prst="rect">
+            <a:avLst/>
+          </a:prstGeom>
+          <a:noFill/>
+          <a:ln/>
+        </p:spPr>
+        <p:txBody>
+          <a:bodyPr wrap="square" lIns="0" tIns="0" rIns="0" bIns="0" rtlCol="0" anchor="t">
             <a:normAutofit/>
           </a:bodyPr>
           <a:lstStyle/>
@@ -4770,17 +4922,17 @@
               <a:buNone/>
             </a:pPr>
             <a:r>
-              <a:rPr lang="en-US" sz="1050" dirty="0">
-                <a:solidFill>
-                  <a:srgbClr val="5B6B7C"/>
-                </a:solidFill>
-                <a:latin typeface="Calibri" pitchFamily="34" charset="0"/>
-                <a:ea typeface="Calibri" pitchFamily="34" charset="-122"/>
-                <a:cs typeface="Calibri" pitchFamily="34" charset="-120"/>
-              </a:rPr>
-              <a:t>сверка с каноническим шаблоном ТЗ — каких разделов не хватает</a:t>
-            </a:r>
-            <a:endParaRPr lang="en-US" sz="1050" dirty="0"/>
+              <a:rPr lang="en-US" sz="1150" dirty="0">
+                <a:solidFill>
+                  <a:srgbClr val="566173"/>
+                </a:solidFill>
+                <a:latin typeface="Calibri" pitchFamily="34" charset="0"/>
+                <a:ea typeface="Calibri" pitchFamily="34" charset="-122"/>
+                <a:cs typeface="Calibri" pitchFamily="34" charset="-120"/>
+              </a:rPr>
+              <a:t>каких разделов канонического шаблона ТЗ не хватает</a:t>
+            </a:r>
+            <a:endParaRPr lang="en-US" sz="1150" dirty="0"/>
           </a:p>
         </p:txBody>
       </p:sp>
@@ -4792,12 +4944,12 @@
         </p:nvSpPr>
         <p:spPr>
           <a:xfrm>
-            <a:off x="502920" y="3685032"/>
-            <a:ext cx="6916522" cy="841248"/>
+            <a:off x="548640" y="3685032"/>
+            <a:ext cx="6693408" cy="822960"/>
           </a:xfrm>
           <a:prstGeom prst="roundRect">
             <a:avLst>
-              <a:gd name="adj" fmla="val 7609"/>
+              <a:gd name="adj" fmla="val 7778"/>
             </a:avLst>
           </a:prstGeom>
           <a:solidFill>
@@ -4819,8 +4971,8 @@
         </p:nvSpPr>
         <p:spPr>
           <a:xfrm>
-            <a:off x="667512" y="3922776"/>
-            <a:ext cx="365760" cy="365760"/>
+            <a:off x="731520" y="3904488"/>
+            <a:ext cx="384048" cy="384048"/>
           </a:xfrm>
           <a:prstGeom prst="ellipse">
             <a:avLst/>
@@ -4839,8 +4991,8 @@
         </p:nvSpPr>
         <p:spPr>
           <a:xfrm>
-            <a:off x="667512" y="3922776"/>
-            <a:ext cx="365760" cy="365760"/>
+            <a:off x="731520" y="3904488"/>
+            <a:ext cx="384048" cy="384048"/>
           </a:xfrm>
           <a:prstGeom prst="rect">
             <a:avLst/>
@@ -4856,7 +5008,7 @@
               <a:buNone/>
             </a:pPr>
             <a:r>
-              <a:rPr lang="en-US" sz="1100" b="1" dirty="0">
+              <a:rPr lang="en-US" sz="1200" b="1" dirty="0">
                 <a:solidFill>
                   <a:srgbClr val="FFFFFF"/>
                 </a:solidFill>
@@ -4866,7 +5018,7 @@
               </a:rPr>
               <a:t>3</a:t>
             </a:r>
-            <a:endParaRPr lang="en-US" sz="1100" dirty="0"/>
+            <a:endParaRPr lang="en-US" sz="1200" dirty="0"/>
           </a:p>
         </p:txBody>
       </p:sp>
@@ -4878,24 +5030,24 @@
         </p:nvSpPr>
         <p:spPr>
           <a:xfrm>
-            <a:off x="1188720" y="3776472"/>
-            <a:ext cx="6047842" cy="310896"/>
-          </a:xfrm>
-          <a:prstGeom prst="rect">
-            <a:avLst/>
-          </a:prstGeom>
-          <a:noFill/>
-          <a:ln/>
-        </p:spPr>
-        <p:txBody>
-          <a:bodyPr wrap="square" lIns="0" tIns="0" rIns="0" bIns="0" rtlCol="0" anchor="ctr"/>
-          <a:lstStyle/>
-          <a:p>
-            <a:pPr indent="0" marL="0">
-              <a:buNone/>
-            </a:pPr>
-            <a:r>
-              <a:rPr lang="en-US" sz="1350" b="1" dirty="0">
+            <a:off x="1280160" y="3803904"/>
+            <a:ext cx="5687568" cy="310896"/>
+          </a:xfrm>
+          <a:prstGeom prst="rect">
+            <a:avLst/>
+          </a:prstGeom>
+          <a:noFill/>
+          <a:ln/>
+        </p:spPr>
+        <p:txBody>
+          <a:bodyPr wrap="square" lIns="0" tIns="0" rIns="0" bIns="0" rtlCol="0" anchor="t"/>
+          <a:lstStyle/>
+          <a:p>
+            <a:pPr indent="0" marL="0">
+              <a:buNone/>
+            </a:pPr>
+            <a:r>
+              <a:rPr lang="en-US" sz="1450" b="1" dirty="0">
                 <a:solidFill>
                   <a:srgbClr val="13223B"/>
                 </a:solidFill>
@@ -4905,7 +5057,7 @@
               </a:rPr>
               <a:t>LLM-ревью по рубрике</a:t>
             </a:r>
-            <a:endParaRPr lang="en-US" sz="1350" dirty="0"/>
+            <a:endParaRPr lang="en-US" sz="1450" dirty="0"/>
           </a:p>
         </p:txBody>
       </p:sp>
@@ -4917,17 +5069,17 @@
         </p:nvSpPr>
         <p:spPr>
           <a:xfrm>
-            <a:off x="1188720" y="4069080"/>
-            <a:ext cx="6047842" cy="402336"/>
-          </a:xfrm>
-          <a:prstGeom prst="rect">
-            <a:avLst/>
-          </a:prstGeom>
-          <a:noFill/>
-          <a:ln/>
-        </p:spPr>
-        <p:txBody>
-          <a:bodyPr wrap="square" lIns="0" tIns="0" rIns="0" bIns="0" rtlCol="0" anchor="ctr">
+            <a:off x="1280160" y="4114800"/>
+            <a:ext cx="5687568" cy="329184"/>
+          </a:xfrm>
+          <a:prstGeom prst="rect">
+            <a:avLst/>
+          </a:prstGeom>
+          <a:noFill/>
+          <a:ln/>
+        </p:spPr>
+        <p:txBody>
+          <a:bodyPr wrap="square" lIns="0" tIns="0" rIns="0" bIns="0" rtlCol="0" anchor="t">
             <a:normAutofit/>
           </a:bodyPr>
           <a:lstStyle/>
@@ -4936,17 +5088,17 @@
               <a:buNone/>
             </a:pPr>
             <a:r>
-              <a:rPr lang="en-US" sz="1050" dirty="0">
-                <a:solidFill>
-                  <a:srgbClr val="5B6B7C"/>
-                </a:solidFill>
-                <a:latin typeface="Calibri" pitchFamily="34" charset="0"/>
-                <a:ea typeface="Calibri" pitchFamily="34" charset="-122"/>
-                <a:cs typeface="Calibri" pitchFamily="34" charset="-120"/>
-              </a:rPr>
-              <a:t>19 доменных категорий + few-shot на паттернах корректировок разработчиков</a:t>
-            </a:r>
-            <a:endParaRPr lang="en-US" sz="1050" dirty="0"/>
+              <a:rPr lang="en-US" sz="1150" dirty="0">
+                <a:solidFill>
+                  <a:srgbClr val="566173"/>
+                </a:solidFill>
+                <a:latin typeface="Calibri" pitchFamily="34" charset="0"/>
+                <a:ea typeface="Calibri" pitchFamily="34" charset="-122"/>
+                <a:cs typeface="Calibri" pitchFamily="34" charset="-120"/>
+              </a:rPr>
+              <a:t>19 доменных категорий + few-shot на реальных правках</a:t>
+            </a:r>
+            <a:endParaRPr lang="en-US" sz="1150" dirty="0"/>
           </a:p>
         </p:txBody>
       </p:sp>
@@ -4958,12 +5110,12 @@
         </p:nvSpPr>
         <p:spPr>
           <a:xfrm>
-            <a:off x="502920" y="4636008"/>
-            <a:ext cx="6916522" cy="841248"/>
+            <a:off x="548640" y="4636008"/>
+            <a:ext cx="6693408" cy="822960"/>
           </a:xfrm>
           <a:prstGeom prst="roundRect">
             <a:avLst>
-              <a:gd name="adj" fmla="val 7609"/>
+              <a:gd name="adj" fmla="val 7778"/>
             </a:avLst>
           </a:prstGeom>
           <a:solidFill>
@@ -4985,8 +5137,8 @@
         </p:nvSpPr>
         <p:spPr>
           <a:xfrm>
-            <a:off x="667512" y="4873752"/>
-            <a:ext cx="365760" cy="365760"/>
+            <a:off x="731520" y="4855464"/>
+            <a:ext cx="384048" cy="384048"/>
           </a:xfrm>
           <a:prstGeom prst="ellipse">
             <a:avLst/>
@@ -5005,8 +5157,8 @@
         </p:nvSpPr>
         <p:spPr>
           <a:xfrm>
-            <a:off x="667512" y="4873752"/>
-            <a:ext cx="365760" cy="365760"/>
+            <a:off x="731520" y="4855464"/>
+            <a:ext cx="384048" cy="384048"/>
           </a:xfrm>
           <a:prstGeom prst="rect">
             <a:avLst/>
@@ -5022,7 +5174,7 @@
               <a:buNone/>
             </a:pPr>
             <a:r>
-              <a:rPr lang="en-US" sz="1100" b="1" dirty="0">
+              <a:rPr lang="en-US" sz="1200" b="1" dirty="0">
                 <a:solidFill>
                   <a:srgbClr val="FFFFFF"/>
                 </a:solidFill>
@@ -5032,7 +5184,7 @@
               </a:rPr>
               <a:t>4</a:t>
             </a:r>
-            <a:endParaRPr lang="en-US" sz="1100" dirty="0"/>
+            <a:endParaRPr lang="en-US" sz="1200" dirty="0"/>
           </a:p>
         </p:txBody>
       </p:sp>
@@ -5044,24 +5196,24 @@
         </p:nvSpPr>
         <p:spPr>
           <a:xfrm>
-            <a:off x="1188720" y="4727448"/>
-            <a:ext cx="6047842" cy="310896"/>
-          </a:xfrm>
-          <a:prstGeom prst="rect">
-            <a:avLst/>
-          </a:prstGeom>
-          <a:noFill/>
-          <a:ln/>
-        </p:spPr>
-        <p:txBody>
-          <a:bodyPr wrap="square" lIns="0" tIns="0" rIns="0" bIns="0" rtlCol="0" anchor="ctr"/>
-          <a:lstStyle/>
-          <a:p>
-            <a:pPr indent="0" marL="0">
-              <a:buNone/>
-            </a:pPr>
-            <a:r>
-              <a:rPr lang="en-US" sz="1350" b="1" dirty="0">
+            <a:off x="1280160" y="4754880"/>
+            <a:ext cx="5687568" cy="310896"/>
+          </a:xfrm>
+          <a:prstGeom prst="rect">
+            <a:avLst/>
+          </a:prstGeom>
+          <a:noFill/>
+          <a:ln/>
+        </p:spPr>
+        <p:txBody>
+          <a:bodyPr wrap="square" lIns="0" tIns="0" rIns="0" bIns="0" rtlCol="0" anchor="t"/>
+          <a:lstStyle/>
+          <a:p>
+            <a:pPr indent="0" marL="0">
+              <a:buNone/>
+            </a:pPr>
+            <a:r>
+              <a:rPr lang="en-US" sz="1450" b="1" dirty="0">
                 <a:solidFill>
                   <a:srgbClr val="13223B"/>
                 </a:solidFill>
@@ -5069,9 +5221,9 @@
                 <a:ea typeface="Calibri" pitchFamily="34" charset="-122"/>
                 <a:cs typeface="Calibri" pitchFamily="34" charset="-120"/>
               </a:rPr>
-              <a:t>Эвристики</a:t>
-            </a:r>
-            <a:endParaRPr lang="en-US" sz="1350" dirty="0"/>
+              <a:t>Эвристики (без LLM)</a:t>
+            </a:r>
+            <a:endParaRPr lang="en-US" sz="1450" dirty="0"/>
           </a:p>
         </p:txBody>
       </p:sp>
@@ -5083,17 +5235,17 @@
         </p:nvSpPr>
         <p:spPr>
           <a:xfrm>
-            <a:off x="1188720" y="5020056"/>
-            <a:ext cx="6047842" cy="402336"/>
-          </a:xfrm>
-          <a:prstGeom prst="rect">
-            <a:avLst/>
-          </a:prstGeom>
-          <a:noFill/>
-          <a:ln/>
-        </p:spPr>
-        <p:txBody>
-          <a:bodyPr wrap="square" lIns="0" tIns="0" rIns="0" bIns="0" rtlCol="0" anchor="ctr">
+            <a:off x="1280160" y="5065776"/>
+            <a:ext cx="5687568" cy="329184"/>
+          </a:xfrm>
+          <a:prstGeom prst="rect">
+            <a:avLst/>
+          </a:prstGeom>
+          <a:noFill/>
+          <a:ln/>
+        </p:spPr>
+        <p:txBody>
+          <a:bodyPr wrap="square" lIns="0" tIns="0" rIns="0" bIns="0" rtlCol="0" anchor="t">
             <a:normAutofit/>
           </a:bodyPr>
           <a:lstStyle/>
@@ -5102,17 +5254,17 @@
               <a:buNone/>
             </a:pPr>
             <a:r>
-              <a:rPr lang="en-US" sz="1050" dirty="0">
-                <a:solidFill>
-                  <a:srgbClr val="5B6B7C"/>
-                </a:solidFill>
-                <a:latin typeface="Calibri" pitchFamily="34" charset="0"/>
-                <a:ea typeface="Calibri" pitchFamily="34" charset="-122"/>
-                <a:cs typeface="Calibri" pitchFamily="34" charset="-120"/>
-              </a:rPr>
-              <a:t>заглушки, «и т.д.», поле без типа, расчёт без формулы — работают и без LLM</a:t>
-            </a:r>
-            <a:endParaRPr lang="en-US" sz="1050" dirty="0"/>
+              <a:rPr lang="en-US" sz="1150" dirty="0">
+                <a:solidFill>
+                  <a:srgbClr val="566173"/>
+                </a:solidFill>
+                <a:latin typeface="Calibri" pitchFamily="34" charset="0"/>
+                <a:ea typeface="Calibri" pitchFamily="34" charset="-122"/>
+                <a:cs typeface="Calibri" pitchFamily="34" charset="-120"/>
+              </a:rPr>
+              <a:t>заглушки, «и т.д.», поле без типа, расчёт без формулы</a:t>
+            </a:r>
+            <a:endParaRPr lang="en-US" sz="1150" dirty="0"/>
           </a:p>
         </p:txBody>
       </p:sp>
@@ -5124,12 +5276,12 @@
         </p:nvSpPr>
         <p:spPr>
           <a:xfrm>
-            <a:off x="502920" y="5586984"/>
-            <a:ext cx="6916522" cy="841248"/>
+            <a:off x="548640" y="5586984"/>
+            <a:ext cx="6693408" cy="822960"/>
           </a:xfrm>
           <a:prstGeom prst="roundRect">
             <a:avLst>
-              <a:gd name="adj" fmla="val 7609"/>
+              <a:gd name="adj" fmla="val 7778"/>
             </a:avLst>
           </a:prstGeom>
           <a:solidFill>
@@ -5151,8 +5303,8 @@
         </p:nvSpPr>
         <p:spPr>
           <a:xfrm>
-            <a:off x="667512" y="5824728"/>
-            <a:ext cx="365760" cy="365760"/>
+            <a:off x="731520" y="5806440"/>
+            <a:ext cx="384048" cy="384048"/>
           </a:xfrm>
           <a:prstGeom prst="ellipse">
             <a:avLst/>
@@ -5171,8 +5323,8 @@
         </p:nvSpPr>
         <p:spPr>
           <a:xfrm>
-            <a:off x="667512" y="5824728"/>
-            <a:ext cx="365760" cy="365760"/>
+            <a:off x="731520" y="5806440"/>
+            <a:ext cx="384048" cy="384048"/>
           </a:xfrm>
           <a:prstGeom prst="rect">
             <a:avLst/>
@@ -5188,7 +5340,7 @@
               <a:buNone/>
             </a:pPr>
             <a:r>
-              <a:rPr lang="en-US" sz="1100" b="1" dirty="0">
+              <a:rPr lang="en-US" sz="1200" b="1" dirty="0">
                 <a:solidFill>
                   <a:srgbClr val="FFFFFF"/>
                 </a:solidFill>
@@ -5198,7 +5350,7 @@
               </a:rPr>
               <a:t>5</a:t>
             </a:r>
-            <a:endParaRPr lang="en-US" sz="1100" dirty="0"/>
+            <a:endParaRPr lang="en-US" sz="1200" dirty="0"/>
           </a:p>
         </p:txBody>
       </p:sp>
@@ -5210,24 +5362,24 @@
         </p:nvSpPr>
         <p:spPr>
           <a:xfrm>
-            <a:off x="1188720" y="5678424"/>
-            <a:ext cx="6047842" cy="310896"/>
-          </a:xfrm>
-          <a:prstGeom prst="rect">
-            <a:avLst/>
-          </a:prstGeom>
-          <a:noFill/>
-          <a:ln/>
-        </p:spPr>
-        <p:txBody>
-          <a:bodyPr wrap="square" lIns="0" tIns="0" rIns="0" bIns="0" rtlCol="0" anchor="ctr"/>
-          <a:lstStyle/>
-          <a:p>
-            <a:pPr indent="0" marL="0">
-              <a:buNone/>
-            </a:pPr>
-            <a:r>
-              <a:rPr lang="en-US" sz="1350" b="1" dirty="0">
+            <a:off x="1280160" y="5705856"/>
+            <a:ext cx="5687568" cy="310896"/>
+          </a:xfrm>
+          <a:prstGeom prst="rect">
+            <a:avLst/>
+          </a:prstGeom>
+          <a:noFill/>
+          <a:ln/>
+        </p:spPr>
+        <p:txBody>
+          <a:bodyPr wrap="square" lIns="0" tIns="0" rIns="0" bIns="0" rtlCol="0" anchor="t"/>
+          <a:lstStyle/>
+          <a:p>
+            <a:pPr indent="0" marL="0">
+              <a:buNone/>
+            </a:pPr>
+            <a:r>
+              <a:rPr lang="en-US" sz="1450" b="1" dirty="0">
                 <a:solidFill>
                   <a:srgbClr val="13223B"/>
                 </a:solidFill>
@@ -5237,7 +5389,7 @@
               </a:rPr>
               <a:t>Структурированный отчёт</a:t>
             </a:r>
-            <a:endParaRPr lang="en-US" sz="1350" dirty="0"/>
+            <a:endParaRPr lang="en-US" sz="1450" dirty="0"/>
           </a:p>
         </p:txBody>
       </p:sp>
@@ -5249,17 +5401,17 @@
         </p:nvSpPr>
         <p:spPr>
           <a:xfrm>
-            <a:off x="1188720" y="5971032"/>
-            <a:ext cx="6047842" cy="402336"/>
-          </a:xfrm>
-          <a:prstGeom prst="rect">
-            <a:avLst/>
-          </a:prstGeom>
-          <a:noFill/>
-          <a:ln/>
-        </p:spPr>
-        <p:txBody>
-          <a:bodyPr wrap="square" lIns="0" tIns="0" rIns="0" bIns="0" rtlCol="0" anchor="ctr">
+            <a:off x="1280160" y="6016752"/>
+            <a:ext cx="5687568" cy="329184"/>
+          </a:xfrm>
+          <a:prstGeom prst="rect">
+            <a:avLst/>
+          </a:prstGeom>
+          <a:noFill/>
+          <a:ln/>
+        </p:spPr>
+        <p:txBody>
+          <a:bodyPr wrap="square" lIns="0" tIns="0" rIns="0" bIns="0" rtlCol="0" anchor="t">
             <a:normAutofit/>
           </a:bodyPr>
           <a:lstStyle/>
@@ -5268,17 +5420,17 @@
               <a:buNone/>
             </a:pPr>
             <a:r>
-              <a:rPr lang="en-US" sz="1050" dirty="0">
-                <a:solidFill>
-                  <a:srgbClr val="5B6B7C"/>
-                </a:solidFill>
-                <a:latin typeface="Calibri" pitchFamily="34" charset="0"/>
-                <a:ea typeface="Calibri" pitchFamily="34" charset="-122"/>
-                <a:cs typeface="Calibri" pitchFamily="34" charset="-120"/>
-              </a:rPr>
-              <a:t>замечания + критичность + индекс готовности + вопросы аналитику</a:t>
-            </a:r>
-            <a:endParaRPr lang="en-US" sz="1050" dirty="0"/>
+              <a:rPr lang="en-US" sz="1150" dirty="0">
+                <a:solidFill>
+                  <a:srgbClr val="566173"/>
+                </a:solidFill>
+                <a:latin typeface="Calibri" pitchFamily="34" charset="0"/>
+                <a:ea typeface="Calibri" pitchFamily="34" charset="-122"/>
+                <a:cs typeface="Calibri" pitchFamily="34" charset="-120"/>
+              </a:rPr>
+              <a:t>замечания, критичность, вопросы аналитику, покрытие шаблона</a:t>
+            </a:r>
+            <a:endParaRPr lang="en-US" sz="1150" dirty="0"/>
           </a:p>
         </p:txBody>
       </p:sp>
@@ -5290,12 +5442,12 @@
         </p:nvSpPr>
         <p:spPr>
           <a:xfrm>
-            <a:off x="7693762" y="1783080"/>
-            <a:ext cx="3964838" cy="4681728"/>
+            <a:off x="7516368" y="1783080"/>
+            <a:ext cx="4142232" cy="4690872"/>
           </a:xfrm>
           <a:prstGeom prst="roundRect">
             <a:avLst>
-              <a:gd name="adj" fmla="val 1845"/>
+              <a:gd name="adj" fmla="val 1766"/>
             </a:avLst>
           </a:prstGeom>
           <a:solidFill>
@@ -5312,24 +5464,24 @@
         </p:nvSpPr>
         <p:spPr>
           <a:xfrm>
-            <a:off x="7949794" y="1993392"/>
-            <a:ext cx="3452774" cy="329184"/>
-          </a:xfrm>
-          <a:prstGeom prst="rect">
-            <a:avLst/>
-          </a:prstGeom>
-          <a:noFill/>
-          <a:ln/>
-        </p:spPr>
-        <p:txBody>
-          <a:bodyPr wrap="square" lIns="0" tIns="0" rIns="0" bIns="0" rtlCol="0" anchor="ctr"/>
-          <a:lstStyle/>
-          <a:p>
-            <a:pPr indent="0" marL="0">
-              <a:buNone/>
-            </a:pPr>
-            <a:r>
-              <a:rPr lang="en-US" sz="1200" b="1" spc="150" kern="0" dirty="0">
+            <a:off x="7790688" y="2011680"/>
+            <a:ext cx="3593592" cy="310896"/>
+          </a:xfrm>
+          <a:prstGeom prst="rect">
+            <a:avLst/>
+          </a:prstGeom>
+          <a:noFill/>
+          <a:ln/>
+        </p:spPr>
+        <p:txBody>
+          <a:bodyPr wrap="square" lIns="0" tIns="0" rIns="0" bIns="0" rtlCol="0" anchor="t"/>
+          <a:lstStyle/>
+          <a:p>
+            <a:pPr indent="0" marL="0">
+              <a:buNone/>
+            </a:pPr>
+            <a:r>
+              <a:rPr lang="en-US" sz="1150" b="1" spc="150" kern="0" dirty="0">
                 <a:solidFill>
                   <a:srgbClr val="D98324"/>
                 </a:solidFill>
@@ -5337,9 +5489,9 @@
                 <a:ea typeface="Calibri" pitchFamily="34" charset="-122"/>
                 <a:cs typeface="Calibri" pitchFamily="34" charset="-120"/>
               </a:rPr>
-              <a:t>Провайдер-независимость</a:t>
-            </a:r>
-            <a:endParaRPr lang="en-US" sz="1200" dirty="0"/>
+              <a:t>ПРОВАЙДЕР-НЕЗАВИСИМОСТЬ</a:t>
+            </a:r>
+            <a:endParaRPr lang="en-US" sz="1150" dirty="0"/>
           </a:p>
         </p:txBody>
       </p:sp>
@@ -5351,8 +5503,8 @@
         </p:nvSpPr>
         <p:spPr>
           <a:xfrm>
-            <a:off x="7949794" y="2395728"/>
-            <a:ext cx="3452774" cy="1828800"/>
+            <a:off x="7790688" y="2395728"/>
+            <a:ext cx="3593592" cy="2103120"/>
           </a:xfrm>
           <a:prstGeom prst="rect">
             <a:avLst/>
@@ -5367,14 +5519,17 @@
           <a:lstStyle/>
           <a:p>
             <a:pPr marL="152400" indent="-152400">
+              <a:lnSpc>
+                <a:spcPct val="108000"/>
+              </a:lnSpc>
               <a:spcAft>
-                <a:spcPts val="1000"/>
+                <a:spcPts val="1300"/>
               </a:spcAft>
               <a:buSzPct val="100000"/>
               <a:buChar char="•"/>
             </a:pPr>
             <a:r>
-              <a:rPr lang="en-US" sz="1150" dirty="0">
+              <a:rPr lang="en-US" sz="1200" dirty="0">
                 <a:solidFill>
                   <a:srgbClr val="D6DFEC"/>
                 </a:solidFill>
@@ -5384,18 +5539,21 @@
               </a:rPr>
               <a:t>Anthropic API (Claude);</a:t>
             </a:r>
-            <a:endParaRPr lang="en-US" sz="1150" dirty="0"/>
+            <a:endParaRPr lang="en-US" sz="1200" dirty="0"/>
           </a:p>
           <a:p>
             <a:pPr marL="152400" indent="-152400">
+              <a:lnSpc>
+                <a:spcPct val="108000"/>
+              </a:lnSpc>
               <a:spcAft>
-                <a:spcPts val="1000"/>
+                <a:spcPts val="1300"/>
               </a:spcAft>
               <a:buSzPct val="100000"/>
               <a:buChar char="•"/>
             </a:pPr>
             <a:r>
-              <a:rPr lang="en-US" sz="1150" dirty="0">
+              <a:rPr lang="en-US" sz="1200" dirty="0">
                 <a:solidFill>
                   <a:srgbClr val="D6DFEC"/>
                 </a:solidFill>
@@ -5403,20 +5561,23 @@
                 <a:ea typeface="Calibri" pitchFamily="34" charset="-122"/>
                 <a:cs typeface="Calibri" pitchFamily="34" charset="-120"/>
               </a:rPr>
-              <a:t>OpenAI-совместимый эндпоинт: OpenRouter, локальный vLLM / Ollama, внутренний контур МТС;</a:t>
-            </a:r>
-            <a:endParaRPr lang="en-US" sz="1150" dirty="0"/>
+              <a:t>OpenAI-совместимый: OpenRouter, локальный Ollama / vLLM, контур МТС;</a:t>
+            </a:r>
+            <a:endParaRPr lang="en-US" sz="1200" dirty="0"/>
           </a:p>
           <a:p>
             <a:pPr marL="152400" indent="-152400">
+              <a:lnSpc>
+                <a:spcPct val="108000"/>
+              </a:lnSpc>
               <a:spcAft>
-                <a:spcPts val="1000"/>
+                <a:spcPts val="1300"/>
               </a:spcAft>
               <a:buSzPct val="100000"/>
               <a:buChar char="•"/>
             </a:pPr>
             <a:r>
-              <a:rPr lang="en-US" sz="1150" dirty="0">
+              <a:rPr lang="en-US" sz="1200" dirty="0">
                 <a:solidFill>
                   <a:srgbClr val="D6DFEC"/>
                 </a:solidFill>
@@ -5426,7 +5587,7 @@
               </a:rPr>
               <a:t>офлайн-режим — эвристики без внешних вызовов.</a:t>
             </a:r>
-            <a:endParaRPr lang="en-US" sz="1150" dirty="0"/>
+            <a:endParaRPr lang="en-US" sz="1200" dirty="0"/>
           </a:p>
         </p:txBody>
       </p:sp>
@@ -5438,8 +5599,8 @@
         </p:nvSpPr>
         <p:spPr>
           <a:xfrm>
-            <a:off x="7949794" y="4315968"/>
-            <a:ext cx="3452774" cy="0"/>
+            <a:off x="7790688" y="4160520"/>
+            <a:ext cx="3593592" cy="0"/>
           </a:xfrm>
           <a:prstGeom prst="line">
             <a:avLst/>
@@ -5461,8 +5622,8 @@
         </p:nvSpPr>
         <p:spPr>
           <a:xfrm>
-            <a:off x="7949794" y="4498848"/>
-            <a:ext cx="3452774" cy="274320"/>
+            <a:off x="7790688" y="4370832"/>
+            <a:ext cx="3593592" cy="274320"/>
           </a:xfrm>
           <a:prstGeom prst="rect">
             <a:avLst/>
@@ -5486,7 +5647,7 @@
                 <a:ea typeface="Calibri" pitchFamily="34" charset="-122"/>
                 <a:cs typeface="Calibri" pitchFamily="34" charset="-120"/>
               </a:rPr>
-              <a:t>В каждом замечании</a:t>
+              <a:t>В КАЖДОМ ЗАМЕЧАНИИ</a:t>
             </a:r>
             <a:endParaRPr lang="en-US" sz="1100" dirty="0"/>
           </a:p>
@@ -5500,8 +5661,8 @@
         </p:nvSpPr>
         <p:spPr>
           <a:xfrm>
-            <a:off x="7949794" y="4791456"/>
-            <a:ext cx="3452774" cy="1097280"/>
+            <a:off x="7790688" y="4681728"/>
+            <a:ext cx="3593592" cy="1554480"/>
           </a:xfrm>
           <a:prstGeom prst="rect">
             <a:avLst/>
@@ -5517,12 +5678,12 @@
           <a:p>
             <a:pPr indent="0" marL="0">
               <a:lnSpc>
-                <a:spcPct val="125000"/>
+                <a:spcPct val="145000"/>
               </a:lnSpc>
               <a:buNone/>
             </a:pPr>
             <a:r>
-              <a:rPr lang="en-US" sz="1100" dirty="0">
+              <a:rPr lang="en-US" sz="1250" dirty="0">
                 <a:solidFill>
                   <a:srgbClr val="D6DFEC"/>
                 </a:solidFill>
@@ -5532,48 +5693,7 @@
               </a:rPr>
               <a:t>раздел · цитата · критичность · что неясно · почему важно · что уточнить · вопрос аналитику</a:t>
             </a:r>
-            <a:endParaRPr lang="en-US" sz="1100" dirty="0"/>
-          </a:p>
-        </p:txBody>
-      </p:sp>
-      <p:sp>
-        <p:nvSpPr>
-          <p:cNvPr id="35" name="Text 33"/>
-          <p:cNvSpPr txBox="1"/>
-          <p:nvPr/>
-        </p:nvSpPr>
-        <p:spPr>
-          <a:xfrm>
-            <a:off x="7949794" y="5943600"/>
-            <a:ext cx="3452774" cy="457200"/>
-          </a:xfrm>
-          <a:prstGeom prst="rect">
-            <a:avLst/>
-          </a:prstGeom>
-          <a:noFill/>
-          <a:ln/>
-        </p:spPr>
-        <p:txBody>
-          <a:bodyPr wrap="square" lIns="0" tIns="0" rIns="0" bIns="0" rtlCol="0" anchor="t">
-            <a:normAutofit/>
-          </a:bodyPr>
-          <a:lstStyle/>
-          <a:p>
-            <a:pPr indent="0" marL="0">
-              <a:buNone/>
-            </a:pPr>
-            <a:r>
-              <a:rPr lang="en-US" sz="1050" i="1" dirty="0">
-                <a:solidFill>
-                  <a:srgbClr val="9FB0C6"/>
-                </a:solidFill>
-                <a:latin typeface="Calibri" pitchFamily="34" charset="0"/>
-                <a:ea typeface="Calibri" pitchFamily="34" charset="-122"/>
-                <a:cs typeface="Calibri" pitchFamily="34" charset="-120"/>
-              </a:rPr>
-              <a:t>Стек: Python · Streamlit (демо) · CLI · pydantic-схема ответа</a:t>
-            </a:r>
-            <a:endParaRPr lang="en-US" sz="1050" dirty="0"/>
+            <a:endParaRPr lang="en-US" sz="1250" dirty="0"/>
           </a:p>
         </p:txBody>
       </p:sp>
@@ -5617,7 +5737,7 @@
         </p:nvSpPr>
         <p:spPr>
           <a:xfrm>
-            <a:off x="502920" y="402336"/>
+            <a:off x="502920" y="384048"/>
             <a:ext cx="11155680" cy="292608"/>
           </a:xfrm>
           <a:prstGeom prst="rect">
@@ -5627,7 +5747,7 @@
           <a:ln/>
         </p:spPr>
         <p:txBody>
-          <a:bodyPr wrap="square" lIns="0" tIns="0" rIns="0" bIns="0" rtlCol="0" anchor="ctr"/>
+          <a:bodyPr wrap="square" lIns="0" tIns="0" rIns="0" bIns="0" rtlCol="0" anchor="t"/>
           <a:lstStyle/>
           <a:p>
             <a:pPr indent="0" marL="0">
@@ -5656,17 +5776,17 @@
         </p:nvSpPr>
         <p:spPr>
           <a:xfrm>
-            <a:off x="502920" y="676656"/>
-            <a:ext cx="11155680" cy="868680"/>
-          </a:xfrm>
-          <a:prstGeom prst="rect">
-            <a:avLst/>
-          </a:prstGeom>
-          <a:noFill/>
-          <a:ln/>
-        </p:spPr>
-        <p:txBody>
-          <a:bodyPr wrap="square" lIns="0" tIns="0" rIns="0" bIns="0" rtlCol="0" anchor="ctr">
+            <a:off x="502920" y="658368"/>
+            <a:ext cx="11155680" cy="804672"/>
+          </a:xfrm>
+          <a:prstGeom prst="rect">
+            <a:avLst/>
+          </a:prstGeom>
+          <a:noFill/>
+          <a:ln/>
+        </p:spPr>
+        <p:txBody>
+          <a:bodyPr wrap="square" lIns="0" tIns="0" rIns="0" bIns="0" rtlCol="0" anchor="t">
             <a:normAutofit/>
           </a:bodyPr>
           <a:lstStyle/>
@@ -5675,7 +5795,7 @@
               <a:buNone/>
             </a:pPr>
             <a:r>
-              <a:rPr lang="en-US" sz="3000" b="1" dirty="0">
+              <a:rPr lang="en-US" sz="2900" b="1" dirty="0">
                 <a:solidFill>
                   <a:srgbClr val="13223B"/>
                 </a:solidFill>
@@ -5683,9 +5803,9 @@
                 <a:ea typeface="Cambria" pitchFamily="34" charset="-122"/>
                 <a:cs typeface="Cambria" pitchFamily="34" charset="-120"/>
               </a:rPr>
-              <a:t>Формат одного замечания</a:t>
-            </a:r>
-            <a:endParaRPr lang="en-US" sz="3000" dirty="0"/>
+              <a:t>Формат замечания (структура вывода)</a:t>
+            </a:r>
+            <a:endParaRPr lang="en-US" sz="2900" dirty="0"/>
           </a:p>
         </p:txBody>
       </p:sp>
@@ -5698,11 +5818,11 @@
         <p:spPr>
           <a:xfrm>
             <a:off x="502920" y="1783080"/>
-            <a:ext cx="6733642" cy="4480560"/>
+            <a:ext cx="6779362" cy="4343400"/>
           </a:xfrm>
           <a:prstGeom prst="roundRect">
             <a:avLst>
-              <a:gd name="adj" fmla="val 1633"/>
+              <a:gd name="adj" fmla="val 1684"/>
             </a:avLst>
           </a:prstGeom>
           <a:solidFill>
@@ -5731,8 +5851,8 @@
         </p:nvSpPr>
         <p:spPr>
           <a:xfrm>
-            <a:off x="777240" y="2011680"/>
-            <a:ext cx="1737360" cy="548640"/>
+            <a:off x="758952" y="2011680"/>
+            <a:ext cx="1691640" cy="566928"/>
           </a:xfrm>
           <a:prstGeom prst="rect">
             <a:avLst/>
@@ -5770,8 +5890,8 @@
         </p:nvSpPr>
         <p:spPr>
           <a:xfrm>
-            <a:off x="2606040" y="2011680"/>
-            <a:ext cx="4401922" cy="566928"/>
+            <a:off x="2514600" y="2011680"/>
+            <a:ext cx="4493362" cy="566928"/>
           </a:xfrm>
           <a:prstGeom prst="rect">
             <a:avLst/>
@@ -5789,7 +5909,7 @@
               <a:buNone/>
             </a:pPr>
             <a:r>
-              <a:rPr lang="en-US" sz="1150" dirty="0">
+              <a:rPr lang="en-US" sz="1200" dirty="0">
                 <a:solidFill>
                   <a:srgbClr val="1E3252"/>
                 </a:solidFill>
@@ -5799,7 +5919,7 @@
               </a:rPr>
               <a:t>4. Логика загрузки</a:t>
             </a:r>
-            <a:endParaRPr lang="en-US" sz="1150" dirty="0"/>
+            <a:endParaRPr lang="en-US" sz="1200" dirty="0"/>
           </a:p>
         </p:txBody>
       </p:sp>
@@ -5811,8 +5931,8 @@
         </p:nvSpPr>
         <p:spPr>
           <a:xfrm>
-            <a:off x="777240" y="2606040"/>
-            <a:ext cx="1737360" cy="548640"/>
+            <a:off x="758952" y="2596896"/>
+            <a:ext cx="1691640" cy="566928"/>
           </a:xfrm>
           <a:prstGeom prst="rect">
             <a:avLst/>
@@ -5850,8 +5970,8 @@
         </p:nvSpPr>
         <p:spPr>
           <a:xfrm>
-            <a:off x="2606040" y="2606040"/>
-            <a:ext cx="4401922" cy="566928"/>
+            <a:off x="2514600" y="2596896"/>
+            <a:ext cx="4493362" cy="566928"/>
           </a:xfrm>
           <a:prstGeom prst="rect">
             <a:avLst/>
@@ -5869,7 +5989,7 @@
               <a:buNone/>
             </a:pPr>
             <a:r>
-              <a:rPr lang="en-US" sz="1150" dirty="0">
+              <a:rPr lang="en-US" sz="1200" dirty="0">
                 <a:solidFill>
                   <a:srgbClr val="1E3252"/>
                 </a:solidFill>
@@ -5877,9 +5997,9 @@
                 <a:ea typeface="Calibri" pitchFamily="34" charset="-122"/>
                 <a:cs typeface="Calibri" pitchFamily="34" charset="-120"/>
               </a:rPr>
-              <a:t>blocker  —  без этого нельзя начинать разработку</a:t>
-            </a:r>
-            <a:endParaRPr lang="en-US" sz="1150" dirty="0"/>
+              <a:t>blocker — без этого нельзя начинать разработку</a:t>
+            </a:r>
+            <a:endParaRPr lang="en-US" sz="1200" dirty="0"/>
           </a:p>
         </p:txBody>
       </p:sp>
@@ -5891,8 +6011,8 @@
         </p:nvSpPr>
         <p:spPr>
           <a:xfrm>
-            <a:off x="777240" y="3200400"/>
-            <a:ext cx="1737360" cy="548640"/>
+            <a:off x="758952" y="3182112"/>
+            <a:ext cx="1691640" cy="566928"/>
           </a:xfrm>
           <a:prstGeom prst="rect">
             <a:avLst/>
@@ -5930,8 +6050,8 @@
         </p:nvSpPr>
         <p:spPr>
           <a:xfrm>
-            <a:off x="2606040" y="3200400"/>
-            <a:ext cx="4401922" cy="566928"/>
+            <a:off x="2514600" y="3182112"/>
+            <a:ext cx="4493362" cy="566928"/>
           </a:xfrm>
           <a:prstGeom prst="rect">
             <a:avLst/>
@@ -5949,7 +6069,7 @@
               <a:buNone/>
             </a:pPr>
             <a:r>
-              <a:rPr lang="en-US" sz="1150" dirty="0">
+              <a:rPr lang="en-US" sz="1200" dirty="0">
                 <a:solidFill>
                   <a:srgbClr val="1E3252"/>
                 </a:solidFill>
@@ -5959,7 +6079,7 @@
               </a:rPr>
               <a:t>«Данные грузятся инкрементально по дате.»</a:t>
             </a:r>
-            <a:endParaRPr lang="en-US" sz="1150" dirty="0"/>
+            <a:endParaRPr lang="en-US" sz="1200" dirty="0"/>
           </a:p>
         </p:txBody>
       </p:sp>
@@ -5971,8 +6091,8 @@
         </p:nvSpPr>
         <p:spPr>
           <a:xfrm>
-            <a:off x="777240" y="3794760"/>
-            <a:ext cx="1737360" cy="548640"/>
+            <a:off x="758952" y="3767328"/>
+            <a:ext cx="1691640" cy="566928"/>
           </a:xfrm>
           <a:prstGeom prst="rect">
             <a:avLst/>
@@ -6010,8 +6130,8 @@
         </p:nvSpPr>
         <p:spPr>
           <a:xfrm>
-            <a:off x="2606040" y="3794760"/>
-            <a:ext cx="4401922" cy="566928"/>
+            <a:off x="2514600" y="3767328"/>
+            <a:ext cx="4493362" cy="566928"/>
           </a:xfrm>
           <a:prstGeom prst="rect">
             <a:avLst/>
@@ -6029,7 +6149,7 @@
               <a:buNone/>
             </a:pPr>
             <a:r>
-              <a:rPr lang="en-US" sz="1150" dirty="0">
+              <a:rPr lang="en-US" sz="1200" dirty="0">
                 <a:solidFill>
                   <a:srgbClr val="1E3252"/>
                 </a:solidFill>
@@ -6039,7 +6159,7 @@
               </a:rPr>
               <a:t>Не указано поле-приращение и обработка опоздавших записей.</a:t>
             </a:r>
-            <a:endParaRPr lang="en-US" sz="1150" dirty="0"/>
+            <a:endParaRPr lang="en-US" sz="1200" dirty="0"/>
           </a:p>
         </p:txBody>
       </p:sp>
@@ -6051,8 +6171,8 @@
         </p:nvSpPr>
         <p:spPr>
           <a:xfrm>
-            <a:off x="777240" y="4389120"/>
-            <a:ext cx="1737360" cy="548640"/>
+            <a:off x="758952" y="4352544"/>
+            <a:ext cx="1691640" cy="566928"/>
           </a:xfrm>
           <a:prstGeom prst="rect">
             <a:avLst/>
@@ -6090,8 +6210,8 @@
         </p:nvSpPr>
         <p:spPr>
           <a:xfrm>
-            <a:off x="2606040" y="4389120"/>
-            <a:ext cx="4401922" cy="566928"/>
+            <a:off x="2514600" y="4352544"/>
+            <a:ext cx="4493362" cy="566928"/>
           </a:xfrm>
           <a:prstGeom prst="rect">
             <a:avLst/>
@@ -6109,7 +6229,7 @@
               <a:buNone/>
             </a:pPr>
             <a:r>
-              <a:rPr lang="en-US" sz="1150" dirty="0">
+              <a:rPr lang="en-US" sz="1200" dirty="0">
                 <a:solidFill>
                   <a:srgbClr val="1E3252"/>
                 </a:solidFill>
@@ -6119,7 +6239,7 @@
               </a:rPr>
               <a:t>Разработчик выберет поле сам — риск потери строк или дублей.</a:t>
             </a:r>
-            <a:endParaRPr lang="en-US" sz="1150" dirty="0"/>
+            <a:endParaRPr lang="en-US" sz="1200" dirty="0"/>
           </a:p>
         </p:txBody>
       </p:sp>
@@ -6131,8 +6251,8 @@
         </p:nvSpPr>
         <p:spPr>
           <a:xfrm>
-            <a:off x="777240" y="4983480"/>
-            <a:ext cx="1737360" cy="548640"/>
+            <a:off x="758952" y="4937760"/>
+            <a:ext cx="1691640" cy="566928"/>
           </a:xfrm>
           <a:prstGeom prst="rect">
             <a:avLst/>
@@ -6170,8 +6290,8 @@
         </p:nvSpPr>
         <p:spPr>
           <a:xfrm>
-            <a:off x="2606040" y="4983480"/>
-            <a:ext cx="4401922" cy="566928"/>
+            <a:off x="2514600" y="4937760"/>
+            <a:ext cx="4493362" cy="566928"/>
           </a:xfrm>
           <a:prstGeom prst="rect">
             <a:avLst/>
@@ -6189,7 +6309,7 @@
               <a:buNone/>
             </a:pPr>
             <a:r>
-              <a:rPr lang="en-US" sz="1150" dirty="0">
+              <a:rPr lang="en-US" sz="1200" dirty="0">
                 <a:solidFill>
                   <a:srgbClr val="1E3252"/>
                 </a:solidFill>
@@ -6199,7 +6319,7 @@
               </a:rPr>
               <a:t>Поле watermark, окно перекрытия, поведение при повторном запуске.</a:t>
             </a:r>
-            <a:endParaRPr lang="en-US" sz="1150" dirty="0"/>
+            <a:endParaRPr lang="en-US" sz="1200" dirty="0"/>
           </a:p>
         </p:txBody>
       </p:sp>
@@ -6211,8 +6331,8 @@
         </p:nvSpPr>
         <p:spPr>
           <a:xfrm>
-            <a:off x="777240" y="5577840"/>
-            <a:ext cx="1737360" cy="548640"/>
+            <a:off x="758952" y="5522976"/>
+            <a:ext cx="1691640" cy="566928"/>
           </a:xfrm>
           <a:prstGeom prst="rect">
             <a:avLst/>
@@ -6250,8 +6370,8 @@
         </p:nvSpPr>
         <p:spPr>
           <a:xfrm>
-            <a:off x="2606040" y="5577840"/>
-            <a:ext cx="4401922" cy="566928"/>
+            <a:off x="2514600" y="5522976"/>
+            <a:ext cx="4493362" cy="566928"/>
           </a:xfrm>
           <a:prstGeom prst="rect">
             <a:avLst/>
@@ -6269,7 +6389,7 @@
               <a:buNone/>
             </a:pPr>
             <a:r>
-              <a:rPr lang="en-US" sz="1150" dirty="0">
+              <a:rPr lang="en-US" sz="1200" dirty="0">
                 <a:solidFill>
                   <a:srgbClr val="1E3252"/>
                 </a:solidFill>
@@ -6279,7 +6399,7 @@
               </a:rPr>
               <a:t>По какому полю считаем приращение и на сколько назад перечитываем?</a:t>
             </a:r>
-            <a:endParaRPr lang="en-US" sz="1150" dirty="0"/>
+            <a:endParaRPr lang="en-US" sz="1200" dirty="0"/>
           </a:p>
         </p:txBody>
       </p:sp>
@@ -6291,12 +6411,12 @@
         </p:nvSpPr>
         <p:spPr>
           <a:xfrm>
-            <a:off x="7693762" y="1783080"/>
-            <a:ext cx="3964838" cy="2148840"/>
+            <a:off x="7556602" y="1783080"/>
+            <a:ext cx="4101998" cy="2103120"/>
           </a:xfrm>
           <a:prstGeom prst="roundRect">
             <a:avLst>
-              <a:gd name="adj" fmla="val 3404"/>
+              <a:gd name="adj" fmla="val 3478"/>
             </a:avLst>
           </a:prstGeom>
           <a:solidFill>
@@ -6325,8 +6445,8 @@
         </p:nvSpPr>
         <p:spPr>
           <a:xfrm>
-            <a:off x="7922362" y="1993392"/>
-            <a:ext cx="3507638" cy="310896"/>
+            <a:off x="7794346" y="1975104"/>
+            <a:ext cx="3626510" cy="292608"/>
           </a:xfrm>
           <a:prstGeom prst="rect">
             <a:avLst/>
@@ -6342,17 +6462,17 @@
               <a:buNone/>
             </a:pPr>
             <a:r>
-              <a:rPr lang="en-US" sz="1200" b="1" dirty="0">
-                <a:solidFill>
-                  <a:srgbClr val="13223B"/>
-                </a:solidFill>
-                <a:latin typeface="Calibri" pitchFamily="34" charset="0"/>
-                <a:ea typeface="Calibri" pitchFamily="34" charset="-122"/>
-                <a:cs typeface="Calibri" pitchFamily="34" charset="-120"/>
-              </a:rPr>
-              <a:t>Сводка по документу</a:t>
-            </a:r>
-            <a:endParaRPr lang="en-US" sz="1200" dirty="0"/>
+              <a:rPr lang="en-US" sz="1050" b="1" spc="50" kern="0" dirty="0">
+                <a:solidFill>
+                  <a:srgbClr val="566173"/>
+                </a:solidFill>
+                <a:latin typeface="Calibri" pitchFamily="34" charset="0"/>
+                <a:ea typeface="Calibri" pitchFamily="34" charset="-122"/>
+                <a:cs typeface="Calibri" pitchFamily="34" charset="-120"/>
+              </a:rPr>
+              <a:t>СВОДКА ПО ДОКУМЕНТУ (пример)</a:t>
+            </a:r>
+            <a:endParaRPr lang="en-US" sz="1050" dirty="0"/>
           </a:p>
         </p:txBody>
       </p:sp>
@@ -6364,8 +6484,8 @@
         </p:nvSpPr>
         <p:spPr>
           <a:xfrm>
-            <a:off x="7922362" y="2395728"/>
-            <a:ext cx="3507638" cy="1371600"/>
+            <a:off x="7794346" y="2340864"/>
+            <a:ext cx="3626510" cy="914400"/>
           </a:xfrm>
           <a:prstGeom prst="rect">
             <a:avLst/>
@@ -6379,85 +6499,106 @@
           <a:p>
             <a:pPr indent="0" marL="0">
               <a:lnSpc>
-                <a:spcPct val="125000"/>
+                <a:spcPct val="130000"/>
               </a:lnSpc>
               <a:spcAft>
-                <a:spcPts val="600"/>
+                <a:spcPts val="500"/>
               </a:spcAft>
               <a:buNone/>
             </a:pPr>
             <a:r>
-              <a:rPr lang="en-US" sz="1150" dirty="0">
-                <a:solidFill>
-                  <a:srgbClr val="5B6B7C"/>
-                </a:solidFill>
-                <a:latin typeface="Calibri" pitchFamily="34" charset="0"/>
-                <a:ea typeface="Calibri" pitchFamily="34" charset="-122"/>
-                <a:cs typeface="Calibri" pitchFamily="34" charset="-120"/>
-              </a:rPr>
-              <a:t>Индекс готовности: </a:t>
-            </a:r>
+              <a:rPr lang="en-US" sz="1300" b="1" dirty="0">
+                <a:solidFill>
+                  <a:srgbClr val="13223B"/>
+                </a:solidFill>
+                <a:latin typeface="Calibri" pitchFamily="34" charset="0"/>
+                <a:ea typeface="Calibri" pitchFamily="34" charset="-122"/>
+                <a:cs typeface="Calibri" pitchFamily="34" charset="-120"/>
+              </a:rPr>
+              <a:t>🔴 3   ·   🟠 6   ·   🟡 4</a:t>
+            </a:r>
+            <a:endParaRPr lang="en-US" sz="1300" dirty="0"/>
+          </a:p>
+          <a:p>
             <a:pPr indent="0" marL="0">
               <a:lnSpc>
-                <a:spcPct val="125000"/>
+                <a:spcPct val="130000"/>
               </a:lnSpc>
               <a:spcAft>
-                <a:spcPts val="600"/>
+                <a:spcPts val="500"/>
               </a:spcAft>
               <a:buNone/>
             </a:pPr>
             <a:r>
-              <a:rPr lang="en-US" sz="1150" b="1" dirty="0">
-                <a:solidFill>
-                  <a:srgbClr val="13223B"/>
-                </a:solidFill>
-                <a:latin typeface="Calibri" pitchFamily="34" charset="0"/>
-                <a:ea typeface="Calibri" pitchFamily="34" charset="-122"/>
-                <a:cs typeface="Calibri" pitchFamily="34" charset="-120"/>
-              </a:rPr>
-              <a:t>63 / 100</a:t>
-            </a:r>
-            <a:endParaRPr lang="en-US" sz="1150" dirty="0"/>
-          </a:p>
-          <a:p>
-            <a:pPr indent="0" marL="0">
-              <a:lnSpc>
-                <a:spcPct val="125000"/>
-              </a:lnSpc>
-              <a:spcAft>
-                <a:spcPts val="600"/>
-              </a:spcAft>
-              <a:buNone/>
-            </a:pPr>
-            <a:r>
-              <a:rPr lang="en-US" sz="1150" dirty="0">
-                <a:solidFill>
-                  <a:srgbClr val="1E3252"/>
-                </a:solidFill>
-                <a:latin typeface="Calibri" pitchFamily="34" charset="0"/>
-                <a:ea typeface="Calibri" pitchFamily="34" charset="-122"/>
-                <a:cs typeface="Calibri" pitchFamily="34" charset="-120"/>
-              </a:rPr>
-              <a:t>Блокеры 3 · Существенные 6 · Незначительные 4</a:t>
-            </a:r>
-            <a:endParaRPr lang="en-US" sz="1150" dirty="0"/>
-          </a:p>
-        </p:txBody>
-      </p:sp>
-      <p:sp>
-        <p:nvSpPr>
-          <p:cNvPr id="22" name="Shape 20"/>
+              <a:rPr lang="en-US" sz="1300" dirty="0">
+                <a:solidFill>
+                  <a:srgbClr val="566173"/>
+                </a:solidFill>
+                <a:latin typeface="Calibri" pitchFamily="34" charset="0"/>
+                <a:ea typeface="Calibri" pitchFamily="34" charset="-122"/>
+                <a:cs typeface="Calibri" pitchFamily="34" charset="-120"/>
+              </a:rPr>
+              <a:t>замечания по критичности</a:t>
+            </a:r>
+            <a:endParaRPr lang="en-US" sz="1300" dirty="0"/>
+          </a:p>
+        </p:txBody>
+      </p:sp>
+      <p:sp>
+        <p:nvSpPr>
+          <p:cNvPr id="22" name="Text 20"/>
+          <p:cNvSpPr txBox="1"/>
+          <p:nvPr/>
+        </p:nvSpPr>
+        <p:spPr>
+          <a:xfrm>
+            <a:off x="7794346" y="3200400"/>
+            <a:ext cx="3626510" cy="640080"/>
+          </a:xfrm>
+          <a:prstGeom prst="rect">
+            <a:avLst/>
+          </a:prstGeom>
+          <a:noFill/>
+          <a:ln/>
+        </p:spPr>
+        <p:txBody>
+          <a:bodyPr wrap="square" lIns="0" tIns="0" rIns="0" bIns="0" rtlCol="0" anchor="t">
+            <a:normAutofit/>
+          </a:bodyPr>
+          <a:lstStyle/>
+          <a:p>
+            <a:pPr indent="0" marL="0">
+              <a:buNone/>
+            </a:pPr>
+            <a:r>
+              <a:rPr lang="en-US" sz="1050" i="1" dirty="0">
+                <a:solidFill>
+                  <a:srgbClr val="566173"/>
+                </a:solidFill>
+                <a:latin typeface="Calibri" pitchFamily="34" charset="0"/>
+                <a:ea typeface="Calibri" pitchFamily="34" charset="-122"/>
+                <a:cs typeface="Calibri" pitchFamily="34" charset="-120"/>
+              </a:rPr>
+              <a:t>Итог: есть блокирующие вопросы — рекомендуется уточнение. Инструмент не оценивает готовность ТЗ.</a:t>
+            </a:r>
+            <a:endParaRPr lang="en-US" sz="1050" dirty="0"/>
+          </a:p>
+        </p:txBody>
+      </p:sp>
+      <p:sp>
+        <p:nvSpPr>
+          <p:cNvPr id="23" name="Shape 21"/>
           <p:cNvSpPr/>
           <p:nvPr/>
         </p:nvSpPr>
         <p:spPr>
           <a:xfrm>
-            <a:off x="7693762" y="4114800"/>
-            <a:ext cx="3964838" cy="2148840"/>
+            <a:off x="7556602" y="4069080"/>
+            <a:ext cx="4101998" cy="2057400"/>
           </a:xfrm>
           <a:prstGeom prst="roundRect">
             <a:avLst>
-              <a:gd name="adj" fmla="val 3404"/>
+              <a:gd name="adj" fmla="val 3556"/>
             </a:avLst>
           </a:prstGeom>
           <a:solidFill>
@@ -6480,14 +6621,14 @@
       </p:sp>
       <p:sp>
         <p:nvSpPr>
-          <p:cNvPr id="23" name="Text 21"/>
-          <p:cNvSpPr txBox="1"/>
-          <p:nvPr/>
-        </p:nvSpPr>
-        <p:spPr>
-          <a:xfrm>
-            <a:off x="7922362" y="4315968"/>
-            <a:ext cx="3507638" cy="310896"/>
+          <p:cNvPr id="24" name="Text 22"/>
+          <p:cNvSpPr txBox="1"/>
+          <p:nvPr/>
+        </p:nvSpPr>
+        <p:spPr>
+          <a:xfrm>
+            <a:off x="7794346" y="4261104"/>
+            <a:ext cx="3626510" cy="292608"/>
           </a:xfrm>
           <a:prstGeom prst="rect">
             <a:avLst/>
@@ -6503,7 +6644,7 @@
               <a:buNone/>
             </a:pPr>
             <a:r>
-              <a:rPr lang="en-US" sz="1200" b="1" dirty="0">
+              <a:rPr lang="en-US" sz="1100" b="1" spc="100" kern="0" dirty="0">
                 <a:solidFill>
                   <a:srgbClr val="D98324"/>
                 </a:solidFill>
@@ -6511,22 +6652,22 @@
                 <a:ea typeface="Calibri" pitchFamily="34" charset="-122"/>
                 <a:cs typeface="Calibri" pitchFamily="34" charset="-120"/>
               </a:rPr>
-              <a:t>Офлайн-режим</a:t>
-            </a:r>
-            <a:endParaRPr lang="en-US" sz="1200" dirty="0"/>
-          </a:p>
-        </p:txBody>
-      </p:sp>
-      <p:sp>
-        <p:nvSpPr>
-          <p:cNvPr id="24" name="Text 22"/>
-          <p:cNvSpPr txBox="1"/>
-          <p:nvPr/>
-        </p:nvSpPr>
-        <p:spPr>
-          <a:xfrm>
-            <a:off x="7922362" y="4700016"/>
-            <a:ext cx="3507638" cy="1371600"/>
+              <a:t>ОФЛАЙН-РЕЖИМ</a:t>
+            </a:r>
+            <a:endParaRPr lang="en-US" sz="1100" dirty="0"/>
+          </a:p>
+        </p:txBody>
+      </p:sp>
+      <p:sp>
+        <p:nvSpPr>
+          <p:cNvPr id="25" name="Text 23"/>
+          <p:cNvSpPr txBox="1"/>
+          <p:nvPr/>
+        </p:nvSpPr>
+        <p:spPr>
+          <a:xfrm>
+            <a:off x="7794346" y="4608576"/>
+            <a:ext cx="3626510" cy="1371600"/>
           </a:xfrm>
           <a:prstGeom prst="rect">
             <a:avLst/>
@@ -6542,7 +6683,7 @@
           <a:p>
             <a:pPr indent="0" marL="0">
               <a:lnSpc>
-                <a:spcPct val="120000"/>
+                <a:spcPct val="122000"/>
               </a:lnSpc>
               <a:buNone/>
             </a:pPr>
@@ -6601,7 +6742,7 @@
         </p:nvSpPr>
         <p:spPr>
           <a:xfrm>
-            <a:off x="502920" y="402336"/>
+            <a:off x="502920" y="384048"/>
             <a:ext cx="11155680" cy="292608"/>
           </a:xfrm>
           <a:prstGeom prst="rect">
@@ -6611,7 +6752,7 @@
           <a:ln/>
         </p:spPr>
         <p:txBody>
-          <a:bodyPr wrap="square" lIns="0" tIns="0" rIns="0" bIns="0" rtlCol="0" anchor="ctr"/>
+          <a:bodyPr wrap="square" lIns="0" tIns="0" rIns="0" bIns="0" rtlCol="0" anchor="t"/>
           <a:lstStyle/>
           <a:p>
             <a:pPr indent="0" marL="0">
@@ -6626,7 +6767,7 @@
                 <a:ea typeface="Calibri" pitchFamily="34" charset="-122"/>
                 <a:cs typeface="Calibri" pitchFamily="34" charset="-120"/>
               </a:rPr>
-              <a:t>КАЧЕСТВО И РИСКИ</a:t>
+              <a:t>СТАТУС</a:t>
             </a:r>
             <a:endParaRPr lang="en-US" sz="1200" dirty="0"/>
           </a:p>
@@ -6640,17 +6781,17 @@
         </p:nvSpPr>
         <p:spPr>
           <a:xfrm>
-            <a:off x="502920" y="676656"/>
-            <a:ext cx="11155680" cy="868680"/>
-          </a:xfrm>
-          <a:prstGeom prst="rect">
-            <a:avLst/>
-          </a:prstGeom>
-          <a:noFill/>
-          <a:ln/>
-        </p:spPr>
-        <p:txBody>
-          <a:bodyPr wrap="square" lIns="0" tIns="0" rIns="0" bIns="0" rtlCol="0" anchor="ctr">
+            <a:off x="502920" y="658368"/>
+            <a:ext cx="11155680" cy="804672"/>
+          </a:xfrm>
+          <a:prstGeom prst="rect">
+            <a:avLst/>
+          </a:prstGeom>
+          <a:noFill/>
+          <a:ln/>
+        </p:spPr>
+        <p:txBody>
+          <a:bodyPr wrap="square" lIns="0" tIns="0" rIns="0" bIns="0" rtlCol="0" anchor="t">
             <a:normAutofit/>
           </a:bodyPr>
           <a:lstStyle/>
@@ -6659,7 +6800,7 @@
               <a:buNone/>
             </a:pPr>
             <a:r>
-              <a:rPr lang="en-US" sz="3000" b="1" dirty="0">
+              <a:rPr lang="en-US" sz="2900" b="1" dirty="0">
                 <a:solidFill>
                   <a:srgbClr val="13223B"/>
                 </a:solidFill>
@@ -6667,616 +6808,26 @@
                 <a:ea typeface="Cambria" pitchFamily="34" charset="-122"/>
                 <a:cs typeface="Cambria" pitchFamily="34" charset="-120"/>
               </a:rPr>
-              <a:t>Как оцениваем и что может пойти не так</a:t>
-            </a:r>
-            <a:endParaRPr lang="en-US" sz="3000" dirty="0"/>
-          </a:p>
-        </p:txBody>
-      </p:sp>
-      <p:sp>
-        <p:nvSpPr>
-          <p:cNvPr id="4" name="Text 2"/>
-          <p:cNvSpPr txBox="1"/>
-          <p:nvPr/>
-        </p:nvSpPr>
-        <p:spPr>
-          <a:xfrm>
-            <a:off x="502920" y="1737360"/>
-            <a:ext cx="5303520" cy="329184"/>
-          </a:xfrm>
-          <a:prstGeom prst="rect">
-            <a:avLst/>
-          </a:prstGeom>
-          <a:noFill/>
-          <a:ln/>
-        </p:spPr>
-        <p:txBody>
-          <a:bodyPr wrap="square" lIns="0" tIns="0" rIns="0" bIns="0" rtlCol="0" anchor="t"/>
-          <a:lstStyle/>
-          <a:p>
-            <a:pPr indent="0" marL="0">
-              <a:buNone/>
-            </a:pPr>
-            <a:r>
-              <a:rPr lang="en-US" sz="1300" b="1" dirty="0">
-                <a:solidFill>
-                  <a:srgbClr val="13223B"/>
-                </a:solidFill>
-                <a:latin typeface="Calibri" pitchFamily="34" charset="0"/>
-                <a:ea typeface="Calibri" pitchFamily="34" charset="-122"/>
-                <a:cs typeface="Calibri" pitchFamily="34" charset="-120"/>
-              </a:rPr>
-              <a:t>Критерии успеха</a:t>
-            </a:r>
-            <a:endParaRPr lang="en-US" sz="1300" dirty="0"/>
-          </a:p>
-        </p:txBody>
-      </p:sp>
-      <p:sp>
-        <p:nvSpPr>
-          <p:cNvPr id="5" name="Text 3"/>
-          <p:cNvSpPr txBox="1"/>
-          <p:nvPr/>
-        </p:nvSpPr>
-        <p:spPr>
-          <a:xfrm>
-            <a:off x="502920" y="2121408"/>
-            <a:ext cx="5303520" cy="1920240"/>
-          </a:xfrm>
-          <a:prstGeom prst="rect">
-            <a:avLst/>
-          </a:prstGeom>
-          <a:noFill/>
-          <a:ln/>
-        </p:spPr>
-        <p:txBody>
-          <a:bodyPr wrap="square" lIns="0" tIns="0" rIns="0" bIns="0" rtlCol="0" anchor="t">
-            <a:normAutofit/>
-          </a:bodyPr>
-          <a:lstStyle/>
-          <a:p>
-            <a:pPr marL="152400" indent="-152400">
-              <a:spcAft>
-                <a:spcPts val="1000"/>
-              </a:spcAft>
-              <a:buSzPct val="100000"/>
-              <a:buChar char="•"/>
-            </a:pPr>
-            <a:r>
-              <a:rPr lang="en-US" sz="1200" dirty="0">
-                <a:solidFill>
-                  <a:srgbClr val="1E3252"/>
-                </a:solidFill>
-                <a:latin typeface="Calibri" pitchFamily="34" charset="0"/>
-                <a:ea typeface="Calibri" pitchFamily="34" charset="-122"/>
-                <a:cs typeface="Calibri" pitchFamily="34" charset="-120"/>
-              </a:rPr>
-              <a:t>замечания указывают на места, которые реально стоит уточнить;</a:t>
-            </a:r>
-            <a:endParaRPr lang="en-US" sz="1200" dirty="0"/>
-          </a:p>
-          <a:p>
-            <a:pPr marL="152400" indent="-152400">
-              <a:spcAft>
-                <a:spcPts val="1000"/>
-              </a:spcAft>
-              <a:buSzPct val="100000"/>
-              <a:buChar char="•"/>
-            </a:pPr>
-            <a:r>
-              <a:rPr lang="en-US" sz="1200" dirty="0">
-                <a:solidFill>
-                  <a:srgbClr val="1E3252"/>
-                </a:solidFill>
-                <a:latin typeface="Calibri" pitchFamily="34" charset="0"/>
-                <a:ea typeface="Calibri" pitchFamily="34" charset="-122"/>
-                <a:cs typeface="Calibri" pitchFamily="34" charset="-120"/>
-              </a:rPr>
-              <a:t>каждое замечание привязано к фрагменту ТЗ (доля с валидной цитатой → ~100%);</a:t>
-            </a:r>
-            <a:endParaRPr lang="en-US" sz="1200" dirty="0"/>
-          </a:p>
-          <a:p>
-            <a:pPr marL="152400" indent="-152400">
-              <a:spcAft>
-                <a:spcPts val="1000"/>
-              </a:spcAft>
-              <a:buSzPct val="100000"/>
-              <a:buChar char="•"/>
-            </a:pPr>
-            <a:r>
-              <a:rPr lang="en-US" sz="1200" dirty="0">
-                <a:solidFill>
-                  <a:srgbClr val="1E3252"/>
-                </a:solidFill>
-                <a:latin typeface="Calibri" pitchFamily="34" charset="0"/>
-                <a:ea typeface="Calibri" pitchFamily="34" charset="-122"/>
-                <a:cs typeface="Calibri" pitchFamily="34" charset="-120"/>
-              </a:rPr>
-              <a:t>по замечанию видно: где, что не так, что дописать, какой вопрос задать;</a:t>
-            </a:r>
-            <a:endParaRPr lang="en-US" sz="1200" dirty="0"/>
-          </a:p>
-          <a:p>
-            <a:pPr marL="152400" indent="-152400">
-              <a:spcAft>
-                <a:spcPts val="1000"/>
-              </a:spcAft>
-              <a:buSzPct val="100000"/>
-              <a:buChar char="•"/>
-            </a:pPr>
-            <a:r>
-              <a:rPr lang="en-US" sz="1200" dirty="0">
-                <a:solidFill>
-                  <a:srgbClr val="1E3252"/>
-                </a:solidFill>
-                <a:latin typeface="Calibri" pitchFamily="34" charset="0"/>
-                <a:ea typeface="Calibri" pitchFamily="34" charset="-122"/>
-                <a:cs typeface="Calibri" pitchFamily="34" charset="-120"/>
-              </a:rPr>
-              <a:t>нет советов, не связанных с этим ТЗ.</a:t>
-            </a:r>
-            <a:endParaRPr lang="en-US" sz="1200" dirty="0"/>
-          </a:p>
-        </p:txBody>
-      </p:sp>
-      <p:sp>
-        <p:nvSpPr>
-          <p:cNvPr id="6" name="Text 4"/>
-          <p:cNvSpPr txBox="1"/>
-          <p:nvPr/>
-        </p:nvSpPr>
-        <p:spPr>
-          <a:xfrm>
-            <a:off x="502920" y="4160520"/>
-            <a:ext cx="5303520" cy="329184"/>
-          </a:xfrm>
-          <a:prstGeom prst="rect">
-            <a:avLst/>
-          </a:prstGeom>
-          <a:noFill/>
-          <a:ln/>
-        </p:spPr>
-        <p:txBody>
-          <a:bodyPr wrap="square" lIns="0" tIns="0" rIns="0" bIns="0" rtlCol="0" anchor="t"/>
-          <a:lstStyle/>
-          <a:p>
-            <a:pPr indent="0" marL="0">
-              <a:buNone/>
-            </a:pPr>
-            <a:r>
-              <a:rPr lang="en-US" sz="1300" b="1" dirty="0">
-                <a:solidFill>
-                  <a:srgbClr val="13223B"/>
-                </a:solidFill>
-                <a:latin typeface="Calibri" pitchFamily="34" charset="0"/>
-                <a:ea typeface="Calibri" pitchFamily="34" charset="-122"/>
-                <a:cs typeface="Calibri" pitchFamily="34" charset="-120"/>
-              </a:rPr>
-              <a:t>Прокси-метрики (тест без эталона)</a:t>
-            </a:r>
-            <a:endParaRPr lang="en-US" sz="1300" dirty="0"/>
-          </a:p>
-        </p:txBody>
-      </p:sp>
-      <p:sp>
-        <p:nvSpPr>
-          <p:cNvPr id="7" name="Shape 5"/>
+              <a:t>Что уже работает</a:t>
+            </a:r>
+            <a:endParaRPr lang="en-US" sz="2900" dirty="0"/>
+          </a:p>
+        </p:txBody>
+      </p:sp>
+      <p:sp>
+        <p:nvSpPr>
+          <p:cNvPr id="4" name="Shape 2"/>
           <p:cNvSpPr/>
           <p:nvPr/>
         </p:nvSpPr>
         <p:spPr>
           <a:xfrm>
-            <a:off x="502920" y="4956048"/>
-            <a:ext cx="5303520" cy="0"/>
-          </a:xfrm>
-          <a:prstGeom prst="line">
-            <a:avLst/>
-          </a:prstGeom>
-          <a:noFill/>
-          <a:ln w="12700">
-            <a:solidFill>
-              <a:srgbClr val="D4DCE6"/>
-            </a:solidFill>
-            <a:prstDash val="solid"/>
-          </a:ln>
-        </p:spPr>
-      </p:sp>
-      <p:sp>
-        <p:nvSpPr>
-          <p:cNvPr id="8" name="Text 6"/>
-          <p:cNvSpPr txBox="1"/>
-          <p:nvPr/>
-        </p:nvSpPr>
-        <p:spPr>
-          <a:xfrm>
-            <a:off x="502920" y="4572000"/>
-            <a:ext cx="4297680" cy="365760"/>
-          </a:xfrm>
-          <a:prstGeom prst="rect">
-            <a:avLst/>
-          </a:prstGeom>
-          <a:noFill/>
-          <a:ln/>
-        </p:spPr>
-        <p:txBody>
-          <a:bodyPr wrap="square" lIns="0" tIns="0" rIns="0" bIns="0" rtlCol="0" anchor="ctr"/>
-          <a:lstStyle/>
-          <a:p>
-            <a:pPr indent="0" marL="0">
-              <a:buNone/>
-            </a:pPr>
-            <a:r>
-              <a:rPr lang="en-US" sz="1150" dirty="0">
-                <a:solidFill>
-                  <a:srgbClr val="1E3252"/>
-                </a:solidFill>
-                <a:latin typeface="Calibri" pitchFamily="34" charset="0"/>
-                <a:ea typeface="Calibri" pitchFamily="34" charset="-122"/>
-                <a:cs typeface="Calibri" pitchFamily="34" charset="-120"/>
-              </a:rPr>
-              <a:t>Precision@отчёт</a:t>
-            </a:r>
-            <a:endParaRPr lang="en-US" sz="1150" dirty="0"/>
-          </a:p>
-        </p:txBody>
-      </p:sp>
-      <p:sp>
-        <p:nvSpPr>
-          <p:cNvPr id="9" name="Text 7"/>
-          <p:cNvSpPr txBox="1"/>
-          <p:nvPr/>
-        </p:nvSpPr>
-        <p:spPr>
-          <a:xfrm>
-            <a:off x="4800600" y="4572000"/>
-            <a:ext cx="1005840" cy="365760"/>
-          </a:xfrm>
-          <a:prstGeom prst="rect">
-            <a:avLst/>
-          </a:prstGeom>
-          <a:noFill/>
-          <a:ln/>
-        </p:spPr>
-        <p:txBody>
-          <a:bodyPr wrap="square" lIns="0" tIns="0" rIns="0" bIns="0" rtlCol="0" anchor="ctr"/>
-          <a:lstStyle/>
-          <a:p>
-            <a:pPr algn="r" indent="0" marL="0">
-              <a:buNone/>
-            </a:pPr>
-            <a:r>
-              <a:rPr lang="en-US" sz="1150" b="1" dirty="0">
-                <a:solidFill>
-                  <a:srgbClr val="2E7D5B"/>
-                </a:solidFill>
-                <a:latin typeface="Calibri" pitchFamily="34" charset="0"/>
-                <a:ea typeface="Calibri" pitchFamily="34" charset="-122"/>
-                <a:cs typeface="Calibri" pitchFamily="34" charset="-120"/>
-              </a:rPr>
-              <a:t>≥ 0.7</a:t>
-            </a:r>
-            <a:endParaRPr lang="en-US" sz="1150" dirty="0"/>
-          </a:p>
-        </p:txBody>
-      </p:sp>
-      <p:sp>
-        <p:nvSpPr>
-          <p:cNvPr id="10" name="Shape 8"/>
-          <p:cNvSpPr/>
-          <p:nvPr/>
-        </p:nvSpPr>
-        <p:spPr>
-          <a:xfrm>
-            <a:off x="502920" y="5376672"/>
-            <a:ext cx="5303520" cy="0"/>
-          </a:xfrm>
-          <a:prstGeom prst="line">
-            <a:avLst/>
-          </a:prstGeom>
-          <a:noFill/>
-          <a:ln w="12700">
-            <a:solidFill>
-              <a:srgbClr val="D4DCE6"/>
-            </a:solidFill>
-            <a:prstDash val="solid"/>
-          </a:ln>
-        </p:spPr>
-      </p:sp>
-      <p:sp>
-        <p:nvSpPr>
-          <p:cNvPr id="11" name="Text 9"/>
-          <p:cNvSpPr txBox="1"/>
-          <p:nvPr/>
-        </p:nvSpPr>
-        <p:spPr>
-          <a:xfrm>
-            <a:off x="502920" y="4992624"/>
-            <a:ext cx="4297680" cy="365760"/>
-          </a:xfrm>
-          <a:prstGeom prst="rect">
-            <a:avLst/>
-          </a:prstGeom>
-          <a:noFill/>
-          <a:ln/>
-        </p:spPr>
-        <p:txBody>
-          <a:bodyPr wrap="square" lIns="0" tIns="0" rIns="0" bIns="0" rtlCol="0" anchor="ctr"/>
-          <a:lstStyle/>
-          <a:p>
-            <a:pPr indent="0" marL="0">
-              <a:buNone/>
-            </a:pPr>
-            <a:r>
-              <a:rPr lang="en-US" sz="1150" dirty="0">
-                <a:solidFill>
-                  <a:srgbClr val="1E3252"/>
-                </a:solidFill>
-                <a:latin typeface="Calibri" pitchFamily="34" charset="0"/>
-                <a:ea typeface="Calibri" pitchFamily="34" charset="-122"/>
-                <a:cs typeface="Calibri" pitchFamily="34" charset="-120"/>
-              </a:rPr>
-              <a:t>Recall по известным правкам</a:t>
-            </a:r>
-            <a:endParaRPr lang="en-US" sz="1150" dirty="0"/>
-          </a:p>
-        </p:txBody>
-      </p:sp>
-      <p:sp>
-        <p:nvSpPr>
-          <p:cNvPr id="12" name="Text 10"/>
-          <p:cNvSpPr txBox="1"/>
-          <p:nvPr/>
-        </p:nvSpPr>
-        <p:spPr>
-          <a:xfrm>
-            <a:off x="4800600" y="4992624"/>
-            <a:ext cx="1005840" cy="365760"/>
-          </a:xfrm>
-          <a:prstGeom prst="rect">
-            <a:avLst/>
-          </a:prstGeom>
-          <a:noFill/>
-          <a:ln/>
-        </p:spPr>
-        <p:txBody>
-          <a:bodyPr wrap="square" lIns="0" tIns="0" rIns="0" bIns="0" rtlCol="0" anchor="ctr"/>
-          <a:lstStyle/>
-          <a:p>
-            <a:pPr algn="r" indent="0" marL="0">
-              <a:buNone/>
-            </a:pPr>
-            <a:r>
-              <a:rPr lang="en-US" sz="1150" b="1" dirty="0">
-                <a:solidFill>
-                  <a:srgbClr val="2E7D5B"/>
-                </a:solidFill>
-                <a:latin typeface="Calibri" pitchFamily="34" charset="0"/>
-                <a:ea typeface="Calibri" pitchFamily="34" charset="-122"/>
-                <a:cs typeface="Calibri" pitchFamily="34" charset="-120"/>
-              </a:rPr>
-              <a:t>≥ 0.6</a:t>
-            </a:r>
-            <a:endParaRPr lang="en-US" sz="1150" dirty="0"/>
-          </a:p>
-        </p:txBody>
-      </p:sp>
-      <p:sp>
-        <p:nvSpPr>
-          <p:cNvPr id="13" name="Shape 11"/>
-          <p:cNvSpPr/>
-          <p:nvPr/>
-        </p:nvSpPr>
-        <p:spPr>
-          <a:xfrm>
-            <a:off x="502920" y="5797296"/>
-            <a:ext cx="5303520" cy="0"/>
-          </a:xfrm>
-          <a:prstGeom prst="line">
-            <a:avLst/>
-          </a:prstGeom>
-          <a:noFill/>
-          <a:ln w="12700">
-            <a:solidFill>
-              <a:srgbClr val="D4DCE6"/>
-            </a:solidFill>
-            <a:prstDash val="solid"/>
-          </a:ln>
-        </p:spPr>
-      </p:sp>
-      <p:sp>
-        <p:nvSpPr>
-          <p:cNvPr id="14" name="Text 12"/>
-          <p:cNvSpPr txBox="1"/>
-          <p:nvPr/>
-        </p:nvSpPr>
-        <p:spPr>
-          <a:xfrm>
-            <a:off x="502920" y="5413248"/>
-            <a:ext cx="4297680" cy="365760"/>
-          </a:xfrm>
-          <a:prstGeom prst="rect">
-            <a:avLst/>
-          </a:prstGeom>
-          <a:noFill/>
-          <a:ln/>
-        </p:spPr>
-        <p:txBody>
-          <a:bodyPr wrap="square" lIns="0" tIns="0" rIns="0" bIns="0" rtlCol="0" anchor="ctr"/>
-          <a:lstStyle/>
-          <a:p>
-            <a:pPr indent="0" marL="0">
-              <a:buNone/>
-            </a:pPr>
-            <a:r>
-              <a:rPr lang="en-US" sz="1150" dirty="0">
-                <a:solidFill>
-                  <a:srgbClr val="1E3252"/>
-                </a:solidFill>
-                <a:latin typeface="Calibri" pitchFamily="34" charset="0"/>
-                <a:ea typeface="Calibri" pitchFamily="34" charset="-122"/>
-                <a:cs typeface="Calibri" pitchFamily="34" charset="-120"/>
-              </a:rPr>
-              <a:t>Доля валидных цитат</a:t>
-            </a:r>
-            <a:endParaRPr lang="en-US" sz="1150" dirty="0"/>
-          </a:p>
-        </p:txBody>
-      </p:sp>
-      <p:sp>
-        <p:nvSpPr>
-          <p:cNvPr id="15" name="Text 13"/>
-          <p:cNvSpPr txBox="1"/>
-          <p:nvPr/>
-        </p:nvSpPr>
-        <p:spPr>
-          <a:xfrm>
-            <a:off x="4800600" y="5413248"/>
-            <a:ext cx="1005840" cy="365760"/>
-          </a:xfrm>
-          <a:prstGeom prst="rect">
-            <a:avLst/>
-          </a:prstGeom>
-          <a:noFill/>
-          <a:ln/>
-        </p:spPr>
-        <p:txBody>
-          <a:bodyPr wrap="square" lIns="0" tIns="0" rIns="0" bIns="0" rtlCol="0" anchor="ctr"/>
-          <a:lstStyle/>
-          <a:p>
-            <a:pPr algn="r" indent="0" marL="0">
-              <a:buNone/>
-            </a:pPr>
-            <a:r>
-              <a:rPr lang="en-US" sz="1150" b="1" dirty="0">
-                <a:solidFill>
-                  <a:srgbClr val="2E7D5B"/>
-                </a:solidFill>
-                <a:latin typeface="Calibri" pitchFamily="34" charset="0"/>
-                <a:ea typeface="Calibri" pitchFamily="34" charset="-122"/>
-                <a:cs typeface="Calibri" pitchFamily="34" charset="-120"/>
-              </a:rPr>
-              <a:t>≥ 0.95</a:t>
-            </a:r>
-            <a:endParaRPr lang="en-US" sz="1150" dirty="0"/>
-          </a:p>
-        </p:txBody>
-      </p:sp>
-      <p:sp>
-        <p:nvSpPr>
-          <p:cNvPr id="16" name="Shape 14"/>
-          <p:cNvSpPr/>
-          <p:nvPr/>
-        </p:nvSpPr>
-        <p:spPr>
-          <a:xfrm>
-            <a:off x="502920" y="6217920"/>
-            <a:ext cx="5303520" cy="0"/>
-          </a:xfrm>
-          <a:prstGeom prst="line">
-            <a:avLst/>
-          </a:prstGeom>
-          <a:noFill/>
-          <a:ln w="12700">
-            <a:solidFill>
-              <a:srgbClr val="D4DCE6"/>
-            </a:solidFill>
-            <a:prstDash val="solid"/>
-          </a:ln>
-        </p:spPr>
-      </p:sp>
-      <p:sp>
-        <p:nvSpPr>
-          <p:cNvPr id="17" name="Text 15"/>
-          <p:cNvSpPr txBox="1"/>
-          <p:nvPr/>
-        </p:nvSpPr>
-        <p:spPr>
-          <a:xfrm>
-            <a:off x="502920" y="5833872"/>
-            <a:ext cx="4297680" cy="365760"/>
-          </a:xfrm>
-          <a:prstGeom prst="rect">
-            <a:avLst/>
-          </a:prstGeom>
-          <a:noFill/>
-          <a:ln/>
-        </p:spPr>
-        <p:txBody>
-          <a:bodyPr wrap="square" lIns="0" tIns="0" rIns="0" bIns="0" rtlCol="0" anchor="ctr"/>
-          <a:lstStyle/>
-          <a:p>
-            <a:pPr indent="0" marL="0">
-              <a:buNone/>
-            </a:pPr>
-            <a:r>
-              <a:rPr lang="en-US" sz="1150" dirty="0">
-                <a:solidFill>
-                  <a:srgbClr val="1E3252"/>
-                </a:solidFill>
-                <a:latin typeface="Calibri" pitchFamily="34" charset="0"/>
-                <a:ea typeface="Calibri" pitchFamily="34" charset="-122"/>
-                <a:cs typeface="Calibri" pitchFamily="34" charset="-120"/>
-              </a:rPr>
-              <a:t>Стабильность двух прогонов</a:t>
-            </a:r>
-            <a:endParaRPr lang="en-US" sz="1150" dirty="0"/>
-          </a:p>
-        </p:txBody>
-      </p:sp>
-      <p:sp>
-        <p:nvSpPr>
-          <p:cNvPr id="18" name="Text 16"/>
-          <p:cNvSpPr txBox="1"/>
-          <p:nvPr/>
-        </p:nvSpPr>
-        <p:spPr>
-          <a:xfrm>
-            <a:off x="4800600" y="5833872"/>
-            <a:ext cx="1005840" cy="365760"/>
-          </a:xfrm>
-          <a:prstGeom prst="rect">
-            <a:avLst/>
-          </a:prstGeom>
-          <a:noFill/>
-          <a:ln/>
-        </p:spPr>
-        <p:txBody>
-          <a:bodyPr wrap="square" lIns="0" tIns="0" rIns="0" bIns="0" rtlCol="0" anchor="ctr"/>
-          <a:lstStyle/>
-          <a:p>
-            <a:pPr algn="r" indent="0" marL="0">
-              <a:buNone/>
-            </a:pPr>
-            <a:r>
-              <a:rPr lang="en-US" sz="1150" b="1" dirty="0">
-                <a:solidFill>
-                  <a:srgbClr val="2E7D5B"/>
-                </a:solidFill>
-                <a:latin typeface="Calibri" pitchFamily="34" charset="0"/>
-                <a:ea typeface="Calibri" pitchFamily="34" charset="-122"/>
-                <a:cs typeface="Calibri" pitchFamily="34" charset="-120"/>
-              </a:rPr>
-              <a:t>≥ 0.7</a:t>
-            </a:r>
-            <a:endParaRPr lang="en-US" sz="1150" dirty="0"/>
-          </a:p>
-        </p:txBody>
-      </p:sp>
-      <p:sp>
-        <p:nvSpPr>
-          <p:cNvPr id="19" name="Shape 17"/>
-          <p:cNvSpPr/>
-          <p:nvPr/>
-        </p:nvSpPr>
-        <p:spPr>
-          <a:xfrm>
-            <a:off x="6355080" y="1737360"/>
-            <a:ext cx="5303520" cy="4526280"/>
+            <a:off x="502920" y="1783080"/>
+            <a:ext cx="6135624" cy="1645920"/>
           </a:xfrm>
           <a:prstGeom prst="roundRect">
             <a:avLst>
-              <a:gd name="adj" fmla="val 1616"/>
+              <a:gd name="adj" fmla="val 4444"/>
             </a:avLst>
           </a:prstGeom>
           <a:solidFill>
@@ -7292,14 +6843,34 @@
       </p:sp>
       <p:sp>
         <p:nvSpPr>
-          <p:cNvPr id="20" name="Text 18"/>
-          <p:cNvSpPr txBox="1"/>
-          <p:nvPr/>
-        </p:nvSpPr>
-        <p:spPr>
-          <a:xfrm>
-            <a:off x="6629400" y="1965960"/>
-            <a:ext cx="4754880" cy="329184"/>
+          <p:cNvPr id="5" name="Shape 3"/>
+          <p:cNvSpPr/>
+          <p:nvPr/>
+        </p:nvSpPr>
+        <p:spPr>
+          <a:xfrm>
+            <a:off x="740664" y="2020824"/>
+            <a:ext cx="146304" cy="146304"/>
+          </a:xfrm>
+          <a:prstGeom prst="ellipse">
+            <a:avLst/>
+          </a:prstGeom>
+          <a:solidFill>
+            <a:srgbClr val="2E7D5B"/>
+          </a:solidFill>
+          <a:ln/>
+        </p:spPr>
+      </p:sp>
+      <p:sp>
+        <p:nvSpPr>
+          <p:cNvPr id="6" name="Text 4"/>
+          <p:cNvSpPr txBox="1"/>
+          <p:nvPr/>
+        </p:nvSpPr>
+        <p:spPr>
+          <a:xfrm>
+            <a:off x="996696" y="1929384"/>
+            <a:ext cx="5404104" cy="310896"/>
           </a:xfrm>
           <a:prstGeom prst="rect">
             <a:avLst/>
@@ -7315,15 +6886,15 @@
               <a:buNone/>
             </a:pPr>
             <a:r>
-              <a:rPr lang="en-US" sz="1300" b="1" dirty="0">
-                <a:solidFill>
-                  <a:srgbClr val="13223B"/>
-                </a:solidFill>
-                <a:latin typeface="Calibri" pitchFamily="34" charset="0"/>
-                <a:ea typeface="Calibri" pitchFamily="34" charset="-122"/>
-                <a:cs typeface="Calibri" pitchFamily="34" charset="-120"/>
-              </a:rPr>
-              <a:t>Ключевые риски AI-решения</a:t>
+              <a:rPr lang="en-US" sz="1300" b="1" spc="150" kern="0" dirty="0">
+                <a:solidFill>
+                  <a:srgbClr val="2E7D5B"/>
+                </a:solidFill>
+                <a:latin typeface="Calibri" pitchFamily="34" charset="0"/>
+                <a:ea typeface="Calibri" pitchFamily="34" charset="-122"/>
+                <a:cs typeface="Calibri" pitchFamily="34" charset="-120"/>
+              </a:rPr>
+              <a:t>ГОТОВО</a:t>
             </a:r>
             <a:endParaRPr lang="en-US" sz="1300" dirty="0"/>
           </a:p>
@@ -7331,53 +6902,14 @@
       </p:sp>
       <p:sp>
         <p:nvSpPr>
-          <p:cNvPr id="21" name="Text 19"/>
-          <p:cNvSpPr txBox="1"/>
-          <p:nvPr/>
-        </p:nvSpPr>
-        <p:spPr>
-          <a:xfrm>
-            <a:off x="6629400" y="2450592"/>
-            <a:ext cx="4754880" cy="292608"/>
-          </a:xfrm>
-          <a:prstGeom prst="rect">
-            <a:avLst/>
-          </a:prstGeom>
-          <a:noFill/>
-          <a:ln/>
-        </p:spPr>
-        <p:txBody>
-          <a:bodyPr wrap="square" lIns="0" tIns="0" rIns="0" bIns="0" rtlCol="0" anchor="t"/>
-          <a:lstStyle/>
-          <a:p>
-            <a:pPr indent="0" marL="0">
-              <a:buNone/>
-            </a:pPr>
-            <a:r>
-              <a:rPr lang="en-US" sz="1150" b="1" dirty="0">
-                <a:solidFill>
-                  <a:srgbClr val="1E3252"/>
-                </a:solidFill>
-                <a:latin typeface="Calibri" pitchFamily="34" charset="0"/>
-                <a:ea typeface="Calibri" pitchFamily="34" charset="-122"/>
-                <a:cs typeface="Calibri" pitchFamily="34" charset="-120"/>
-              </a:rPr>
-              <a:t>Ложноположительные замечания</a:t>
-            </a:r>
-            <a:endParaRPr lang="en-US" sz="1150" dirty="0"/>
-          </a:p>
-        </p:txBody>
-      </p:sp>
-      <p:sp>
-        <p:nvSpPr>
-          <p:cNvPr id="22" name="Text 20"/>
-          <p:cNvSpPr txBox="1"/>
-          <p:nvPr/>
-        </p:nvSpPr>
-        <p:spPr>
-          <a:xfrm>
-            <a:off x="6629400" y="2761488"/>
-            <a:ext cx="4754880" cy="457200"/>
+          <p:cNvPr id="7" name="Text 5"/>
+          <p:cNvSpPr txBox="1"/>
+          <p:nvPr/>
+        </p:nvSpPr>
+        <p:spPr>
+          <a:xfrm>
+            <a:off x="996696" y="2276856"/>
+            <a:ext cx="5358384" cy="1024128"/>
           </a:xfrm>
           <a:prstGeom prst="rect">
             <a:avLst/>
@@ -7392,33 +6924,83 @@
           <a:lstStyle/>
           <a:p>
             <a:pPr indent="0" marL="0">
-              <a:buNone/>
-            </a:pPr>
-            <a:r>
-              <a:rPr lang="en-US" sz="1030" dirty="0">
-                <a:solidFill>
-                  <a:srgbClr val="5B6B7C"/>
-                </a:solidFill>
-                <a:latin typeface="Calibri" pitchFamily="34" charset="0"/>
-                <a:ea typeface="Calibri" pitchFamily="34" charset="-122"/>
-                <a:cs typeface="Calibri" pitchFamily="34" charset="-120"/>
-              </a:rPr>
-              <a:t>→ критичность + сортировка + фильтр; few-shot на реальных правках</a:t>
-            </a:r>
-            <a:endParaRPr lang="en-US" sz="1030" dirty="0"/>
-          </a:p>
-        </p:txBody>
-      </p:sp>
-      <p:sp>
-        <p:nvSpPr>
-          <p:cNvPr id="23" name="Text 21"/>
-          <p:cNvSpPr txBox="1"/>
-          <p:nvPr/>
-        </p:nvSpPr>
-        <p:spPr>
-          <a:xfrm>
-            <a:off x="6629400" y="3410712"/>
-            <a:ext cx="4754880" cy="292608"/>
+              <a:lnSpc>
+                <a:spcPct val="132000"/>
+              </a:lnSpc>
+              <a:buNone/>
+            </a:pPr>
+            <a:r>
+              <a:rPr lang="en-US" sz="1200" dirty="0">
+                <a:solidFill>
+                  <a:srgbClr val="1E3252"/>
+                </a:solidFill>
+                <a:latin typeface="Calibri" pitchFamily="34" charset="0"/>
+                <a:ea typeface="Calibri" pitchFamily="34" charset="-122"/>
+                <a:cs typeface="Calibri" pitchFamily="34" charset="-120"/>
+              </a:rPr>
+              <a:t>ядро и пайплайн · разбор .md / .txt / .docx · покрытие шаблона · рубрика 19 категорий · эвристики · офлайн-режим · отчёт md / html / json · Streamlit-демо · CLI · 12 автотестов</a:t>
+            </a:r>
+            <a:endParaRPr lang="en-US" sz="1200" dirty="0"/>
+          </a:p>
+        </p:txBody>
+      </p:sp>
+      <p:sp>
+        <p:nvSpPr>
+          <p:cNvPr id="8" name="Shape 6"/>
+          <p:cNvSpPr/>
+          <p:nvPr/>
+        </p:nvSpPr>
+        <p:spPr>
+          <a:xfrm>
+            <a:off x="502920" y="3630168"/>
+            <a:ext cx="6135624" cy="1280160"/>
+          </a:xfrm>
+          <a:prstGeom prst="roundRect">
+            <a:avLst>
+              <a:gd name="adj" fmla="val 5714"/>
+            </a:avLst>
+          </a:prstGeom>
+          <a:solidFill>
+            <a:srgbClr val="F4F7FB"/>
+          </a:solidFill>
+          <a:ln w="12700">
+            <a:solidFill>
+              <a:srgbClr val="D4DCE6"/>
+            </a:solidFill>
+            <a:prstDash val="solid"/>
+          </a:ln>
+        </p:spPr>
+      </p:sp>
+      <p:sp>
+        <p:nvSpPr>
+          <p:cNvPr id="9" name="Shape 7"/>
+          <p:cNvSpPr/>
+          <p:nvPr/>
+        </p:nvSpPr>
+        <p:spPr>
+          <a:xfrm>
+            <a:off x="740664" y="3867912"/>
+            <a:ext cx="146304" cy="146304"/>
+          </a:xfrm>
+          <a:prstGeom prst="ellipse">
+            <a:avLst/>
+          </a:prstGeom>
+          <a:solidFill>
+            <a:srgbClr val="D98324"/>
+          </a:solidFill>
+          <a:ln/>
+        </p:spPr>
+      </p:sp>
+      <p:sp>
+        <p:nvSpPr>
+          <p:cNvPr id="10" name="Text 8"/>
+          <p:cNvSpPr txBox="1"/>
+          <p:nvPr/>
+        </p:nvSpPr>
+        <p:spPr>
+          <a:xfrm>
+            <a:off x="996696" y="3776472"/>
+            <a:ext cx="5404104" cy="310896"/>
           </a:xfrm>
           <a:prstGeom prst="rect">
             <a:avLst/>
@@ -7434,30 +7016,30 @@
               <a:buNone/>
             </a:pPr>
             <a:r>
-              <a:rPr lang="en-US" sz="1150" b="1" dirty="0">
-                <a:solidFill>
-                  <a:srgbClr val="1E3252"/>
-                </a:solidFill>
-                <a:latin typeface="Calibri" pitchFamily="34" charset="0"/>
-                <a:ea typeface="Calibri" pitchFamily="34" charset="-122"/>
-                <a:cs typeface="Calibri" pitchFamily="34" charset="-120"/>
-              </a:rPr>
-              <a:t>Слишком общие советы</a:t>
-            </a:r>
-            <a:endParaRPr lang="en-US" sz="1150" dirty="0"/>
-          </a:p>
-        </p:txBody>
-      </p:sp>
-      <p:sp>
-        <p:nvSpPr>
-          <p:cNvPr id="24" name="Text 22"/>
-          <p:cNvSpPr txBox="1"/>
-          <p:nvPr/>
-        </p:nvSpPr>
-        <p:spPr>
-          <a:xfrm>
-            <a:off x="6629400" y="3721608"/>
-            <a:ext cx="4754880" cy="457200"/>
+              <a:rPr lang="en-US" sz="1300" b="1" spc="150" kern="0" dirty="0">
+                <a:solidFill>
+                  <a:srgbClr val="D98324"/>
+                </a:solidFill>
+                <a:latin typeface="Calibri" pitchFamily="34" charset="0"/>
+                <a:ea typeface="Calibri" pitchFamily="34" charset="-122"/>
+                <a:cs typeface="Calibri" pitchFamily="34" charset="-120"/>
+              </a:rPr>
+              <a:t>В РАБОТЕ</a:t>
+            </a:r>
+            <a:endParaRPr lang="en-US" sz="1300" dirty="0"/>
+          </a:p>
+        </p:txBody>
+      </p:sp>
+      <p:sp>
+        <p:nvSpPr>
+          <p:cNvPr id="11" name="Text 9"/>
+          <p:cNvSpPr txBox="1"/>
+          <p:nvPr/>
+        </p:nvSpPr>
+        <p:spPr>
+          <a:xfrm>
+            <a:off x="996696" y="4123944"/>
+            <a:ext cx="5358384" cy="658368"/>
           </a:xfrm>
           <a:prstGeom prst="rect">
             <a:avLst/>
@@ -7472,33 +7054,83 @@
           <a:lstStyle/>
           <a:p>
             <a:pPr indent="0" marL="0">
-              <a:buNone/>
-            </a:pPr>
-            <a:r>
-              <a:rPr lang="en-US" sz="1030" dirty="0">
-                <a:solidFill>
-                  <a:srgbClr val="5B6B7C"/>
-                </a:solidFill>
-                <a:latin typeface="Calibri" pitchFamily="34" charset="0"/>
-                <a:ea typeface="Calibri" pitchFamily="34" charset="-122"/>
-                <a:cs typeface="Calibri" pitchFamily="34" charset="-120"/>
-              </a:rPr>
-              <a:t>→ обязательная цитата в схеме; отбрасывание замечаний без привязки</a:t>
-            </a:r>
-            <a:endParaRPr lang="en-US" sz="1030" dirty="0"/>
-          </a:p>
-        </p:txBody>
-      </p:sp>
-      <p:sp>
-        <p:nvSpPr>
-          <p:cNvPr id="25" name="Text 23"/>
-          <p:cNvSpPr txBox="1"/>
-          <p:nvPr/>
-        </p:nvSpPr>
-        <p:spPr>
-          <a:xfrm>
-            <a:off x="6629400" y="4370832"/>
-            <a:ext cx="4754880" cy="292608"/>
+              <a:lnSpc>
+                <a:spcPct val="132000"/>
+              </a:lnSpc>
+              <a:buNone/>
+            </a:pPr>
+            <a:r>
+              <a:rPr lang="en-US" sz="1200" dirty="0">
+                <a:solidFill>
+                  <a:srgbClr val="1E3252"/>
+                </a:solidFill>
+                <a:latin typeface="Calibri" pitchFamily="34" charset="0"/>
+                <a:ea typeface="Calibri" pitchFamily="34" charset="-122"/>
+                <a:cs typeface="Calibri" pitchFamily="34" charset="-120"/>
+              </a:rPr>
+              <a:t>прогон на реальном LLM (нужен доступ / ключ) · прогон на примерах ТЗ кейсодателя</a:t>
+            </a:r>
+            <a:endParaRPr lang="en-US" sz="1200" dirty="0"/>
+          </a:p>
+        </p:txBody>
+      </p:sp>
+      <p:sp>
+        <p:nvSpPr>
+          <p:cNvPr id="12" name="Shape 10"/>
+          <p:cNvSpPr/>
+          <p:nvPr/>
+        </p:nvSpPr>
+        <p:spPr>
+          <a:xfrm>
+            <a:off x="502920" y="5111496"/>
+            <a:ext cx="6135624" cy="1463040"/>
+          </a:xfrm>
+          <a:prstGeom prst="roundRect">
+            <a:avLst>
+              <a:gd name="adj" fmla="val 5000"/>
+            </a:avLst>
+          </a:prstGeom>
+          <a:solidFill>
+            <a:srgbClr val="F4F7FB"/>
+          </a:solidFill>
+          <a:ln w="12700">
+            <a:solidFill>
+              <a:srgbClr val="D4DCE6"/>
+            </a:solidFill>
+            <a:prstDash val="solid"/>
+          </a:ln>
+        </p:spPr>
+      </p:sp>
+      <p:sp>
+        <p:nvSpPr>
+          <p:cNvPr id="13" name="Shape 11"/>
+          <p:cNvSpPr/>
+          <p:nvPr/>
+        </p:nvSpPr>
+        <p:spPr>
+          <a:xfrm>
+            <a:off x="740664" y="5349240"/>
+            <a:ext cx="146304" cy="146304"/>
+          </a:xfrm>
+          <a:prstGeom prst="ellipse">
+            <a:avLst/>
+          </a:prstGeom>
+          <a:solidFill>
+            <a:srgbClr val="566173"/>
+          </a:solidFill>
+          <a:ln/>
+        </p:spPr>
+      </p:sp>
+      <p:sp>
+        <p:nvSpPr>
+          <p:cNvPr id="14" name="Text 12"/>
+          <p:cNvSpPr txBox="1"/>
+          <p:nvPr/>
+        </p:nvSpPr>
+        <p:spPr>
+          <a:xfrm>
+            <a:off x="996696" y="5257800"/>
+            <a:ext cx="5404104" cy="310896"/>
           </a:xfrm>
           <a:prstGeom prst="rect">
             <a:avLst/>
@@ -7514,30 +7146,30 @@
               <a:buNone/>
             </a:pPr>
             <a:r>
-              <a:rPr lang="en-US" sz="1150" b="1" dirty="0">
-                <a:solidFill>
-                  <a:srgbClr val="1E3252"/>
-                </a:solidFill>
-                <a:latin typeface="Calibri" pitchFamily="34" charset="0"/>
-                <a:ea typeface="Calibri" pitchFamily="34" charset="-122"/>
-                <a:cs typeface="Calibri" pitchFamily="34" charset="-120"/>
-              </a:rPr>
-              <a:t>Пропуск важной проблемы</a:t>
-            </a:r>
-            <a:endParaRPr lang="en-US" sz="1150" dirty="0"/>
-          </a:p>
-        </p:txBody>
-      </p:sp>
-      <p:sp>
-        <p:nvSpPr>
-          <p:cNvPr id="26" name="Text 24"/>
-          <p:cNvSpPr txBox="1"/>
-          <p:nvPr/>
-        </p:nvSpPr>
-        <p:spPr>
-          <a:xfrm>
-            <a:off x="6629400" y="4681728"/>
-            <a:ext cx="4754880" cy="457200"/>
+              <a:rPr lang="en-US" sz="1300" b="1" spc="150" kern="0" dirty="0">
+                <a:solidFill>
+                  <a:srgbClr val="566173"/>
+                </a:solidFill>
+                <a:latin typeface="Calibri" pitchFamily="34" charset="0"/>
+                <a:ea typeface="Calibri" pitchFamily="34" charset="-122"/>
+                <a:cs typeface="Calibri" pitchFamily="34" charset="-120"/>
+              </a:rPr>
+              <a:t>ДО ФИНАЛА</a:t>
+            </a:r>
+            <a:endParaRPr lang="en-US" sz="1300" dirty="0"/>
+          </a:p>
+        </p:txBody>
+      </p:sp>
+      <p:sp>
+        <p:nvSpPr>
+          <p:cNvPr id="15" name="Text 13"/>
+          <p:cNvSpPr txBox="1"/>
+          <p:nvPr/>
+        </p:nvSpPr>
+        <p:spPr>
+          <a:xfrm>
+            <a:off x="996696" y="5605272"/>
+            <a:ext cx="5358384" cy="841248"/>
           </a:xfrm>
           <a:prstGeom prst="rect">
             <a:avLst/>
@@ -7552,49 +7184,13 @@
           <a:lstStyle/>
           <a:p>
             <a:pPr indent="0" marL="0">
-              <a:buNone/>
-            </a:pPr>
-            <a:r>
-              <a:rPr lang="en-US" sz="1030" dirty="0">
-                <a:solidFill>
-                  <a:srgbClr val="5B6B7C"/>
-                </a:solidFill>
-                <a:latin typeface="Calibri" pitchFamily="34" charset="0"/>
-                <a:ea typeface="Calibri" pitchFamily="34" charset="-122"/>
-                <a:cs typeface="Calibri" pitchFamily="34" charset="-120"/>
-              </a:rPr>
-              <a:t>→ эвристики поверх LLM; покрытие шаблона; «не заменяет аналитика»</a:t>
-            </a:r>
-            <a:endParaRPr lang="en-US" sz="1030" dirty="0"/>
-          </a:p>
-        </p:txBody>
-      </p:sp>
-      <p:sp>
-        <p:nvSpPr>
-          <p:cNvPr id="27" name="Text 25"/>
-          <p:cNvSpPr txBox="1"/>
-          <p:nvPr/>
-        </p:nvSpPr>
-        <p:spPr>
-          <a:xfrm>
-            <a:off x="6629400" y="5330952"/>
-            <a:ext cx="4754880" cy="292608"/>
-          </a:xfrm>
-          <a:prstGeom prst="rect">
-            <a:avLst/>
-          </a:prstGeom>
-          <a:noFill/>
-          <a:ln/>
-        </p:spPr>
-        <p:txBody>
-          <a:bodyPr wrap="square" lIns="0" tIns="0" rIns="0" bIns="0" rtlCol="0" anchor="t"/>
-          <a:lstStyle/>
-          <a:p>
-            <a:pPr indent="0" marL="0">
-              <a:buNone/>
-            </a:pPr>
-            <a:r>
-              <a:rPr lang="en-US" sz="1150" b="1" dirty="0">
+              <a:lnSpc>
+                <a:spcPct val="132000"/>
+              </a:lnSpc>
+              <a:buNone/>
+            </a:pPr>
+            <a:r>
+              <a:rPr lang="en-US" sz="1200" dirty="0">
                 <a:solidFill>
                   <a:srgbClr val="1E3252"/>
                 </a:solidFill>
@@ -7602,22 +7198,75 @@
                 <a:ea typeface="Calibri" pitchFamily="34" charset="-122"/>
                 <a:cs typeface="Calibri" pitchFamily="34" charset="-120"/>
               </a:rPr>
-              <a:t>Данные не должны уходить наружу</a:t>
-            </a:r>
-            <a:endParaRPr lang="en-US" sz="1150" dirty="0"/>
-          </a:p>
-        </p:txBody>
-      </p:sp>
-      <p:sp>
-        <p:nvSpPr>
-          <p:cNvPr id="28" name="Text 26"/>
-          <p:cNvSpPr txBox="1"/>
-          <p:nvPr/>
-        </p:nvSpPr>
-        <p:spPr>
-          <a:xfrm>
-            <a:off x="6629400" y="5641848"/>
-            <a:ext cx="4754880" cy="457200"/>
+              <a:t>пост-проверка цитат · подсветка фрагмента в тексте · доработка промптов и few-shot · замер прокси-метрик · финальная демонстрация</a:t>
+            </a:r>
+            <a:endParaRPr lang="en-US" sz="1200" dirty="0"/>
+          </a:p>
+        </p:txBody>
+      </p:sp>
+      <p:sp>
+        <p:nvSpPr>
+          <p:cNvPr id="16" name="Shape 14"/>
+          <p:cNvSpPr/>
+          <p:nvPr/>
+        </p:nvSpPr>
+        <p:spPr>
+          <a:xfrm>
+            <a:off x="6903720" y="1728216"/>
+            <a:ext cx="4809744" cy="3437339"/>
+          </a:xfrm>
+          <a:prstGeom prst="roundRect">
+            <a:avLst>
+              <a:gd name="adj" fmla="val 1596"/>
+            </a:avLst>
+          </a:prstGeom>
+          <a:solidFill>
+            <a:srgbClr val="13223B"/>
+          </a:solidFill>
+          <a:ln/>
+          <a:effectLst>
+            <a:outerShdw sx="100000" sy="100000" kx="0" ky="0" algn="bl" rotWithShape="0" blurRad="114300" dist="38100" dir="5400000">
+              <a:srgbClr val="AAB4C0">
+                <a:alpha val="34000"/>
+              </a:srgbClr>
+            </a:outerShdw>
+          </a:effectLst>
+        </p:spPr>
+      </p:sp>
+      <p:pic>
+        <p:nvPicPr>
+          <p:cNvPr id="17" name="Image 0" descr="C:\Masaüstü\tz-reviewer\presentation\assets\real-output.png">    </p:cNvPr>
+          <p:cNvPicPr>
+            <a:picLocks noChangeAspect="1"/>
+          </p:cNvPicPr>
+          <p:nvPr/>
+        </p:nvPicPr>
+        <p:blipFill>
+          <a:blip r:embed="rId1"/>
+          <a:stretch>
+            <a:fillRect/>
+          </a:stretch>
+        </p:blipFill>
+        <p:spPr>
+          <a:xfrm>
+            <a:off x="6958584" y="1783080"/>
+            <a:ext cx="4700016" cy="3327611"/>
+          </a:xfrm>
+          <a:prstGeom prst="rect">
+            <a:avLst/>
+          </a:prstGeom>
+        </p:spPr>
+      </p:pic>
+      <p:sp>
+        <p:nvSpPr>
+          <p:cNvPr id="18" name="Text 15"/>
+          <p:cNvSpPr txBox="1"/>
+          <p:nvPr/>
+        </p:nvSpPr>
+        <p:spPr>
+          <a:xfrm>
+            <a:off x="6958584" y="5293571"/>
+            <a:ext cx="4700016" cy="1097280"/>
           </a:xfrm>
           <a:prstGeom prst="rect">
             <a:avLst/>
@@ -7632,20 +7281,23 @@
           <a:lstStyle/>
           <a:p>
             <a:pPr indent="0" marL="0">
-              <a:buNone/>
-            </a:pPr>
-            <a:r>
-              <a:rPr lang="en-US" sz="1030" dirty="0">
-                <a:solidFill>
-                  <a:srgbClr val="5B6B7C"/>
-                </a:solidFill>
-                <a:latin typeface="Calibri" pitchFamily="34" charset="0"/>
-                <a:ea typeface="Calibri" pitchFamily="34" charset="-122"/>
-                <a:cs typeface="Calibri" pitchFamily="34" charset="-120"/>
-              </a:rPr>
-              <a:t>→ локальный эндпоинт / офлайн-режим; ключи только через окружение</a:t>
-            </a:r>
-            <a:endParaRPr lang="en-US" sz="1030" dirty="0"/>
+              <a:lnSpc>
+                <a:spcPct val="125000"/>
+              </a:lnSpc>
+              <a:buNone/>
+            </a:pPr>
+            <a:r>
+              <a:rPr lang="en-US" sz="1100" i="1" dirty="0">
+                <a:solidFill>
+                  <a:srgbClr val="566173"/>
+                </a:solidFill>
+                <a:latin typeface="Calibri" pitchFamily="34" charset="0"/>
+                <a:ea typeface="Calibri" pitchFamily="34" charset="-122"/>
+                <a:cs typeface="Calibri" pitchFamily="34" charset="-120"/>
+              </a:rPr>
+              <a:t>Реальный вывод инструмента: офлайн-режим, демо-ТЗ «поток загрузки услуг». Полный прогон с LLM даёт и блокеры.</a:t>
+            </a:r>
+            <a:endParaRPr lang="en-US" sz="1100" dirty="0"/>
           </a:p>
         </p:txBody>
       </p:sp>
@@ -7660,6 +7312,1118 @@
 <file path=ppt/slides/slide8.xml><?xml version="1.0" encoding="utf-8"?>
 <p:sld xmlns:a="http://schemas.openxmlformats.org/drawingml/2006/main" xmlns:r="http://schemas.openxmlformats.org/officeDocument/2006/relationships" xmlns:p="http://schemas.openxmlformats.org/presentationml/2006/main">
   <p:cSld name="Slide 8">
+    <p:bg>
+      <p:bgPr>
+        <a:solidFill>
+          <a:srgbClr val="FFFFFF"/>
+        </a:solidFill>
+      </p:bgPr>
+    </p:bg>
+    <p:spTree>
+      <p:nvGrpSpPr>
+        <p:cNvPr id="1" name=""/>
+        <p:cNvGrpSpPr/>
+        <p:nvPr/>
+      </p:nvGrpSpPr>
+      <p:grpSpPr>
+        <a:xfrm>
+          <a:off x="0" y="0"/>
+          <a:ext cx="0" cy="0"/>
+          <a:chOff x="0" y="0"/>
+          <a:chExt cx="0" cy="0"/>
+        </a:xfrm>
+      </p:grpSpPr>
+      <p:sp>
+        <p:nvSpPr>
+          <p:cNvPr id="2" name="Text 0"/>
+          <p:cNvSpPr txBox="1"/>
+          <p:nvPr/>
+        </p:nvSpPr>
+        <p:spPr>
+          <a:xfrm>
+            <a:off x="502920" y="384048"/>
+            <a:ext cx="11155680" cy="292608"/>
+          </a:xfrm>
+          <a:prstGeom prst="rect">
+            <a:avLst/>
+          </a:prstGeom>
+          <a:noFill/>
+          <a:ln/>
+        </p:spPr>
+        <p:txBody>
+          <a:bodyPr wrap="square" lIns="0" tIns="0" rIns="0" bIns="0" rtlCol="0" anchor="t"/>
+          <a:lstStyle/>
+          <a:p>
+            <a:pPr indent="0" marL="0">
+              <a:buNone/>
+            </a:pPr>
+            <a:r>
+              <a:rPr lang="en-US" sz="1200" b="1" spc="300" kern="0" dirty="0">
+                <a:solidFill>
+                  <a:srgbClr val="E5534B"/>
+                </a:solidFill>
+                <a:latin typeface="Calibri" pitchFamily="34" charset="0"/>
+                <a:ea typeface="Calibri" pitchFamily="34" charset="-122"/>
+                <a:cs typeface="Calibri" pitchFamily="34" charset="-120"/>
+              </a:rPr>
+              <a:t>КАЧЕСТВО И РИСКИ</a:t>
+            </a:r>
+            <a:endParaRPr lang="en-US" sz="1200" dirty="0"/>
+          </a:p>
+        </p:txBody>
+      </p:sp>
+      <p:sp>
+        <p:nvSpPr>
+          <p:cNvPr id="3" name="Text 1"/>
+          <p:cNvSpPr txBox="1"/>
+          <p:nvPr/>
+        </p:nvSpPr>
+        <p:spPr>
+          <a:xfrm>
+            <a:off x="502920" y="658368"/>
+            <a:ext cx="11155680" cy="804672"/>
+          </a:xfrm>
+          <a:prstGeom prst="rect">
+            <a:avLst/>
+          </a:prstGeom>
+          <a:noFill/>
+          <a:ln/>
+        </p:spPr>
+        <p:txBody>
+          <a:bodyPr wrap="square" lIns="0" tIns="0" rIns="0" bIns="0" rtlCol="0" anchor="t">
+            <a:normAutofit/>
+          </a:bodyPr>
+          <a:lstStyle/>
+          <a:p>
+            <a:pPr indent="0" marL="0">
+              <a:buNone/>
+            </a:pPr>
+            <a:r>
+              <a:rPr lang="en-US" sz="2900" b="1" dirty="0">
+                <a:solidFill>
+                  <a:srgbClr val="13223B"/>
+                </a:solidFill>
+                <a:latin typeface="Cambria" pitchFamily="34" charset="0"/>
+                <a:ea typeface="Cambria" pitchFamily="34" charset="-122"/>
+                <a:cs typeface="Cambria" pitchFamily="34" charset="-120"/>
+              </a:rPr>
+              <a:t>Как оцениваем и что может пойти не так</a:t>
+            </a:r>
+            <a:endParaRPr lang="en-US" sz="2900" dirty="0"/>
+          </a:p>
+        </p:txBody>
+      </p:sp>
+      <p:sp>
+        <p:nvSpPr>
+          <p:cNvPr id="4" name="Text 2"/>
+          <p:cNvSpPr txBox="1"/>
+          <p:nvPr/>
+        </p:nvSpPr>
+        <p:spPr>
+          <a:xfrm>
+            <a:off x="502920" y="1737360"/>
+            <a:ext cx="5303520" cy="292608"/>
+          </a:xfrm>
+          <a:prstGeom prst="rect">
+            <a:avLst/>
+          </a:prstGeom>
+          <a:noFill/>
+          <a:ln/>
+        </p:spPr>
+        <p:txBody>
+          <a:bodyPr wrap="square" lIns="0" tIns="0" rIns="0" bIns="0" rtlCol="0" anchor="t"/>
+          <a:lstStyle/>
+          <a:p>
+            <a:pPr indent="0" marL="0">
+              <a:buNone/>
+            </a:pPr>
+            <a:r>
+              <a:rPr lang="en-US" sz="1200" b="1" spc="100" kern="0" dirty="0">
+                <a:solidFill>
+                  <a:srgbClr val="13223B"/>
+                </a:solidFill>
+                <a:latin typeface="Calibri" pitchFamily="34" charset="0"/>
+                <a:ea typeface="Calibri" pitchFamily="34" charset="-122"/>
+                <a:cs typeface="Calibri" pitchFamily="34" charset="-120"/>
+              </a:rPr>
+              <a:t>КРИТЕРИИ УСПЕХА</a:t>
+            </a:r>
+            <a:endParaRPr lang="en-US" sz="1200" dirty="0"/>
+          </a:p>
+        </p:txBody>
+      </p:sp>
+      <p:sp>
+        <p:nvSpPr>
+          <p:cNvPr id="5" name="Text 3"/>
+          <p:cNvSpPr txBox="1"/>
+          <p:nvPr/>
+        </p:nvSpPr>
+        <p:spPr>
+          <a:xfrm>
+            <a:off x="502920" y="2103120"/>
+            <a:ext cx="5303520" cy="1828800"/>
+          </a:xfrm>
+          <a:prstGeom prst="rect">
+            <a:avLst/>
+          </a:prstGeom>
+          <a:noFill/>
+          <a:ln/>
+        </p:spPr>
+        <p:txBody>
+          <a:bodyPr wrap="square" lIns="0" tIns="0" rIns="0" bIns="0" rtlCol="0" anchor="t">
+            <a:normAutofit/>
+          </a:bodyPr>
+          <a:lstStyle/>
+          <a:p>
+            <a:pPr marL="152400" indent="-152400">
+              <a:lnSpc>
+                <a:spcPct val="100000"/>
+              </a:lnSpc>
+              <a:spcAft>
+                <a:spcPts val="1100"/>
+              </a:spcAft>
+              <a:buSzPct val="100000"/>
+              <a:buChar char="•"/>
+            </a:pPr>
+            <a:r>
+              <a:rPr lang="en-US" sz="1250" dirty="0">
+                <a:solidFill>
+                  <a:srgbClr val="1E3252"/>
+                </a:solidFill>
+                <a:latin typeface="Calibri" pitchFamily="34" charset="0"/>
+                <a:ea typeface="Calibri" pitchFamily="34" charset="-122"/>
+                <a:cs typeface="Calibri" pitchFamily="34" charset="-120"/>
+              </a:rPr>
+              <a:t>замечания указывают на места, которые реально стоит уточнить;</a:t>
+            </a:r>
+            <a:endParaRPr lang="en-US" sz="1250" dirty="0"/>
+          </a:p>
+          <a:p>
+            <a:pPr marL="152400" indent="-152400">
+              <a:lnSpc>
+                <a:spcPct val="100000"/>
+              </a:lnSpc>
+              <a:spcAft>
+                <a:spcPts val="1100"/>
+              </a:spcAft>
+              <a:buSzPct val="100000"/>
+              <a:buChar char="•"/>
+            </a:pPr>
+            <a:r>
+              <a:rPr lang="en-US" sz="1250" dirty="0">
+                <a:solidFill>
+                  <a:srgbClr val="1E3252"/>
+                </a:solidFill>
+                <a:latin typeface="Calibri" pitchFamily="34" charset="0"/>
+                <a:ea typeface="Calibri" pitchFamily="34" charset="-122"/>
+                <a:cs typeface="Calibri" pitchFamily="34" charset="-120"/>
+              </a:rPr>
+              <a:t>каждое замечание привязано к фрагменту ТЗ (валидная цитата → ~100%);</a:t>
+            </a:r>
+            <a:endParaRPr lang="en-US" sz="1250" dirty="0"/>
+          </a:p>
+          <a:p>
+            <a:pPr marL="152400" indent="-152400">
+              <a:lnSpc>
+                <a:spcPct val="100000"/>
+              </a:lnSpc>
+              <a:spcAft>
+                <a:spcPts val="1100"/>
+              </a:spcAft>
+              <a:buSzPct val="100000"/>
+              <a:buChar char="•"/>
+            </a:pPr>
+            <a:r>
+              <a:rPr lang="en-US" sz="1250" dirty="0">
+                <a:solidFill>
+                  <a:srgbClr val="1E3252"/>
+                </a:solidFill>
+                <a:latin typeface="Calibri" pitchFamily="34" charset="0"/>
+                <a:ea typeface="Calibri" pitchFamily="34" charset="-122"/>
+                <a:cs typeface="Calibri" pitchFamily="34" charset="-120"/>
+              </a:rPr>
+              <a:t>по замечанию видно: где, что не так, что дописать, какой вопрос задать;</a:t>
+            </a:r>
+            <a:endParaRPr lang="en-US" sz="1250" dirty="0"/>
+          </a:p>
+          <a:p>
+            <a:pPr marL="152400" indent="-152400">
+              <a:lnSpc>
+                <a:spcPct val="100000"/>
+              </a:lnSpc>
+              <a:spcAft>
+                <a:spcPts val="1100"/>
+              </a:spcAft>
+              <a:buSzPct val="100000"/>
+              <a:buChar char="•"/>
+            </a:pPr>
+            <a:r>
+              <a:rPr lang="en-US" sz="1250" dirty="0">
+                <a:solidFill>
+                  <a:srgbClr val="1E3252"/>
+                </a:solidFill>
+                <a:latin typeface="Calibri" pitchFamily="34" charset="0"/>
+                <a:ea typeface="Calibri" pitchFamily="34" charset="-122"/>
+                <a:cs typeface="Calibri" pitchFamily="34" charset="-120"/>
+              </a:rPr>
+              <a:t>нет советов, не связанных с этим ТЗ.</a:t>
+            </a:r>
+            <a:endParaRPr lang="en-US" sz="1250" dirty="0"/>
+          </a:p>
+        </p:txBody>
+      </p:sp>
+      <p:sp>
+        <p:nvSpPr>
+          <p:cNvPr id="6" name="Text 4"/>
+          <p:cNvSpPr txBox="1"/>
+          <p:nvPr/>
+        </p:nvSpPr>
+        <p:spPr>
+          <a:xfrm>
+            <a:off x="502920" y="3794760"/>
+            <a:ext cx="5303520" cy="292608"/>
+          </a:xfrm>
+          <a:prstGeom prst="rect">
+            <a:avLst/>
+          </a:prstGeom>
+          <a:noFill/>
+          <a:ln/>
+        </p:spPr>
+        <p:txBody>
+          <a:bodyPr wrap="square" lIns="0" tIns="0" rIns="0" bIns="0" rtlCol="0" anchor="t"/>
+          <a:lstStyle/>
+          <a:p>
+            <a:pPr indent="0" marL="0">
+              <a:buNone/>
+            </a:pPr>
+            <a:r>
+              <a:rPr lang="en-US" sz="1200" b="1" spc="100" kern="0" dirty="0">
+                <a:solidFill>
+                  <a:srgbClr val="13223B"/>
+                </a:solidFill>
+                <a:latin typeface="Calibri" pitchFamily="34" charset="0"/>
+                <a:ea typeface="Calibri" pitchFamily="34" charset="-122"/>
+                <a:cs typeface="Calibri" pitchFamily="34" charset="-120"/>
+              </a:rPr>
+              <a:t>ПРОКСИ-МЕТРИКИ — ЦЕЛЬ MVP (в кейсе порогов нет)</a:t>
+            </a:r>
+            <a:endParaRPr lang="en-US" sz="1200" dirty="0"/>
+          </a:p>
+        </p:txBody>
+      </p:sp>
+      <p:sp>
+        <p:nvSpPr>
+          <p:cNvPr id="7" name="Shape 5"/>
+          <p:cNvSpPr/>
+          <p:nvPr/>
+        </p:nvSpPr>
+        <p:spPr>
+          <a:xfrm>
+            <a:off x="502920" y="4626864"/>
+            <a:ext cx="5303520" cy="0"/>
+          </a:xfrm>
+          <a:prstGeom prst="line">
+            <a:avLst/>
+          </a:prstGeom>
+          <a:noFill/>
+          <a:ln w="12700">
+            <a:solidFill>
+              <a:srgbClr val="D4DCE6"/>
+            </a:solidFill>
+            <a:prstDash val="solid"/>
+          </a:ln>
+        </p:spPr>
+      </p:sp>
+      <p:sp>
+        <p:nvSpPr>
+          <p:cNvPr id="8" name="Text 6"/>
+          <p:cNvSpPr txBox="1"/>
+          <p:nvPr/>
+        </p:nvSpPr>
+        <p:spPr>
+          <a:xfrm>
+            <a:off x="502920" y="4224528"/>
+            <a:ext cx="4297680" cy="384048"/>
+          </a:xfrm>
+          <a:prstGeom prst="rect">
+            <a:avLst/>
+          </a:prstGeom>
+          <a:noFill/>
+          <a:ln/>
+        </p:spPr>
+        <p:txBody>
+          <a:bodyPr wrap="square" lIns="0" tIns="0" rIns="0" bIns="0" rtlCol="0" anchor="ctr"/>
+          <a:lstStyle/>
+          <a:p>
+            <a:pPr indent="0" marL="0">
+              <a:buNone/>
+            </a:pPr>
+            <a:r>
+              <a:rPr lang="en-US" sz="1200" dirty="0">
+                <a:solidFill>
+                  <a:srgbClr val="1E3252"/>
+                </a:solidFill>
+                <a:latin typeface="Calibri" pitchFamily="34" charset="0"/>
+                <a:ea typeface="Calibri" pitchFamily="34" charset="-122"/>
+                <a:cs typeface="Calibri" pitchFamily="34" charset="-120"/>
+              </a:rPr>
+              <a:t>Precision выдачи</a:t>
+            </a:r>
+            <a:endParaRPr lang="en-US" sz="1200" dirty="0"/>
+          </a:p>
+        </p:txBody>
+      </p:sp>
+      <p:sp>
+        <p:nvSpPr>
+          <p:cNvPr id="9" name="Text 7"/>
+          <p:cNvSpPr txBox="1"/>
+          <p:nvPr/>
+        </p:nvSpPr>
+        <p:spPr>
+          <a:xfrm>
+            <a:off x="4800600" y="4224528"/>
+            <a:ext cx="1005840" cy="384048"/>
+          </a:xfrm>
+          <a:prstGeom prst="rect">
+            <a:avLst/>
+          </a:prstGeom>
+          <a:noFill/>
+          <a:ln/>
+        </p:spPr>
+        <p:txBody>
+          <a:bodyPr wrap="square" lIns="0" tIns="0" rIns="0" bIns="0" rtlCol="0" anchor="ctr"/>
+          <a:lstStyle/>
+          <a:p>
+            <a:pPr algn="r" indent="0" marL="0">
+              <a:buNone/>
+            </a:pPr>
+            <a:r>
+              <a:rPr lang="en-US" sz="1200" b="1" dirty="0">
+                <a:solidFill>
+                  <a:srgbClr val="2E7D5B"/>
+                </a:solidFill>
+                <a:latin typeface="Calibri" pitchFamily="34" charset="0"/>
+                <a:ea typeface="Calibri" pitchFamily="34" charset="-122"/>
+                <a:cs typeface="Calibri" pitchFamily="34" charset="-120"/>
+              </a:rPr>
+              <a:t>≥ 0.7</a:t>
+            </a:r>
+            <a:endParaRPr lang="en-US" sz="1200" dirty="0"/>
+          </a:p>
+        </p:txBody>
+      </p:sp>
+      <p:sp>
+        <p:nvSpPr>
+          <p:cNvPr id="10" name="Shape 8"/>
+          <p:cNvSpPr/>
+          <p:nvPr/>
+        </p:nvSpPr>
+        <p:spPr>
+          <a:xfrm>
+            <a:off x="502920" y="5084064"/>
+            <a:ext cx="5303520" cy="0"/>
+          </a:xfrm>
+          <a:prstGeom prst="line">
+            <a:avLst/>
+          </a:prstGeom>
+          <a:noFill/>
+          <a:ln w="12700">
+            <a:solidFill>
+              <a:srgbClr val="D4DCE6"/>
+            </a:solidFill>
+            <a:prstDash val="solid"/>
+          </a:ln>
+        </p:spPr>
+      </p:sp>
+      <p:sp>
+        <p:nvSpPr>
+          <p:cNvPr id="11" name="Text 9"/>
+          <p:cNvSpPr txBox="1"/>
+          <p:nvPr/>
+        </p:nvSpPr>
+        <p:spPr>
+          <a:xfrm>
+            <a:off x="502920" y="4681728"/>
+            <a:ext cx="4297680" cy="384048"/>
+          </a:xfrm>
+          <a:prstGeom prst="rect">
+            <a:avLst/>
+          </a:prstGeom>
+          <a:noFill/>
+          <a:ln/>
+        </p:spPr>
+        <p:txBody>
+          <a:bodyPr wrap="square" lIns="0" tIns="0" rIns="0" bIns="0" rtlCol="0" anchor="ctr"/>
+          <a:lstStyle/>
+          <a:p>
+            <a:pPr indent="0" marL="0">
+              <a:buNone/>
+            </a:pPr>
+            <a:r>
+              <a:rPr lang="en-US" sz="1200" dirty="0">
+                <a:solidFill>
+                  <a:srgbClr val="1E3252"/>
+                </a:solidFill>
+                <a:latin typeface="Calibri" pitchFamily="34" charset="0"/>
+                <a:ea typeface="Calibri" pitchFamily="34" charset="-122"/>
+                <a:cs typeface="Calibri" pitchFamily="34" charset="-120"/>
+              </a:rPr>
+              <a:t>Recall по известным правкам</a:t>
+            </a:r>
+            <a:endParaRPr lang="en-US" sz="1200" dirty="0"/>
+          </a:p>
+        </p:txBody>
+      </p:sp>
+      <p:sp>
+        <p:nvSpPr>
+          <p:cNvPr id="12" name="Text 10"/>
+          <p:cNvSpPr txBox="1"/>
+          <p:nvPr/>
+        </p:nvSpPr>
+        <p:spPr>
+          <a:xfrm>
+            <a:off x="4800600" y="4681728"/>
+            <a:ext cx="1005840" cy="384048"/>
+          </a:xfrm>
+          <a:prstGeom prst="rect">
+            <a:avLst/>
+          </a:prstGeom>
+          <a:noFill/>
+          <a:ln/>
+        </p:spPr>
+        <p:txBody>
+          <a:bodyPr wrap="square" lIns="0" tIns="0" rIns="0" bIns="0" rtlCol="0" anchor="ctr"/>
+          <a:lstStyle/>
+          <a:p>
+            <a:pPr algn="r" indent="0" marL="0">
+              <a:buNone/>
+            </a:pPr>
+            <a:r>
+              <a:rPr lang="en-US" sz="1200" b="1" dirty="0">
+                <a:solidFill>
+                  <a:srgbClr val="2E7D5B"/>
+                </a:solidFill>
+                <a:latin typeface="Calibri" pitchFamily="34" charset="0"/>
+                <a:ea typeface="Calibri" pitchFamily="34" charset="-122"/>
+                <a:cs typeface="Calibri" pitchFamily="34" charset="-120"/>
+              </a:rPr>
+              <a:t>≥ 0.6</a:t>
+            </a:r>
+            <a:endParaRPr lang="en-US" sz="1200" dirty="0"/>
+          </a:p>
+        </p:txBody>
+      </p:sp>
+      <p:sp>
+        <p:nvSpPr>
+          <p:cNvPr id="13" name="Shape 11"/>
+          <p:cNvSpPr/>
+          <p:nvPr/>
+        </p:nvSpPr>
+        <p:spPr>
+          <a:xfrm>
+            <a:off x="502920" y="5541264"/>
+            <a:ext cx="5303520" cy="0"/>
+          </a:xfrm>
+          <a:prstGeom prst="line">
+            <a:avLst/>
+          </a:prstGeom>
+          <a:noFill/>
+          <a:ln w="12700">
+            <a:solidFill>
+              <a:srgbClr val="D4DCE6"/>
+            </a:solidFill>
+            <a:prstDash val="solid"/>
+          </a:ln>
+        </p:spPr>
+      </p:sp>
+      <p:sp>
+        <p:nvSpPr>
+          <p:cNvPr id="14" name="Text 12"/>
+          <p:cNvSpPr txBox="1"/>
+          <p:nvPr/>
+        </p:nvSpPr>
+        <p:spPr>
+          <a:xfrm>
+            <a:off x="502920" y="5138928"/>
+            <a:ext cx="4297680" cy="384048"/>
+          </a:xfrm>
+          <a:prstGeom prst="rect">
+            <a:avLst/>
+          </a:prstGeom>
+          <a:noFill/>
+          <a:ln/>
+        </p:spPr>
+        <p:txBody>
+          <a:bodyPr wrap="square" lIns="0" tIns="0" rIns="0" bIns="0" rtlCol="0" anchor="ctr"/>
+          <a:lstStyle/>
+          <a:p>
+            <a:pPr indent="0" marL="0">
+              <a:buNone/>
+            </a:pPr>
+            <a:r>
+              <a:rPr lang="en-US" sz="1200" dirty="0">
+                <a:solidFill>
+                  <a:srgbClr val="1E3252"/>
+                </a:solidFill>
+                <a:latin typeface="Calibri" pitchFamily="34" charset="0"/>
+                <a:ea typeface="Calibri" pitchFamily="34" charset="-122"/>
+                <a:cs typeface="Calibri" pitchFamily="34" charset="-120"/>
+              </a:rPr>
+              <a:t>Доля валидных цитат</a:t>
+            </a:r>
+            <a:endParaRPr lang="en-US" sz="1200" dirty="0"/>
+          </a:p>
+        </p:txBody>
+      </p:sp>
+      <p:sp>
+        <p:nvSpPr>
+          <p:cNvPr id="15" name="Text 13"/>
+          <p:cNvSpPr txBox="1"/>
+          <p:nvPr/>
+        </p:nvSpPr>
+        <p:spPr>
+          <a:xfrm>
+            <a:off x="4800600" y="5138928"/>
+            <a:ext cx="1005840" cy="384048"/>
+          </a:xfrm>
+          <a:prstGeom prst="rect">
+            <a:avLst/>
+          </a:prstGeom>
+          <a:noFill/>
+          <a:ln/>
+        </p:spPr>
+        <p:txBody>
+          <a:bodyPr wrap="square" lIns="0" tIns="0" rIns="0" bIns="0" rtlCol="0" anchor="ctr"/>
+          <a:lstStyle/>
+          <a:p>
+            <a:pPr algn="r" indent="0" marL="0">
+              <a:buNone/>
+            </a:pPr>
+            <a:r>
+              <a:rPr lang="en-US" sz="1200" b="1" dirty="0">
+                <a:solidFill>
+                  <a:srgbClr val="2E7D5B"/>
+                </a:solidFill>
+                <a:latin typeface="Calibri" pitchFamily="34" charset="0"/>
+                <a:ea typeface="Calibri" pitchFamily="34" charset="-122"/>
+                <a:cs typeface="Calibri" pitchFamily="34" charset="-120"/>
+              </a:rPr>
+              <a:t>≥ 0.95</a:t>
+            </a:r>
+            <a:endParaRPr lang="en-US" sz="1200" dirty="0"/>
+          </a:p>
+        </p:txBody>
+      </p:sp>
+      <p:sp>
+        <p:nvSpPr>
+          <p:cNvPr id="16" name="Shape 14"/>
+          <p:cNvSpPr/>
+          <p:nvPr/>
+        </p:nvSpPr>
+        <p:spPr>
+          <a:xfrm>
+            <a:off x="502920" y="5998464"/>
+            <a:ext cx="5303520" cy="0"/>
+          </a:xfrm>
+          <a:prstGeom prst="line">
+            <a:avLst/>
+          </a:prstGeom>
+          <a:noFill/>
+          <a:ln w="12700">
+            <a:solidFill>
+              <a:srgbClr val="D4DCE6"/>
+            </a:solidFill>
+            <a:prstDash val="solid"/>
+          </a:ln>
+        </p:spPr>
+      </p:sp>
+      <p:sp>
+        <p:nvSpPr>
+          <p:cNvPr id="17" name="Text 15"/>
+          <p:cNvSpPr txBox="1"/>
+          <p:nvPr/>
+        </p:nvSpPr>
+        <p:spPr>
+          <a:xfrm>
+            <a:off x="502920" y="5596128"/>
+            <a:ext cx="4297680" cy="384048"/>
+          </a:xfrm>
+          <a:prstGeom prst="rect">
+            <a:avLst/>
+          </a:prstGeom>
+          <a:noFill/>
+          <a:ln/>
+        </p:spPr>
+        <p:txBody>
+          <a:bodyPr wrap="square" lIns="0" tIns="0" rIns="0" bIns="0" rtlCol="0" anchor="ctr"/>
+          <a:lstStyle/>
+          <a:p>
+            <a:pPr indent="0" marL="0">
+              <a:buNone/>
+            </a:pPr>
+            <a:r>
+              <a:rPr lang="en-US" sz="1200" dirty="0">
+                <a:solidFill>
+                  <a:srgbClr val="1E3252"/>
+                </a:solidFill>
+                <a:latin typeface="Calibri" pitchFamily="34" charset="0"/>
+                <a:ea typeface="Calibri" pitchFamily="34" charset="-122"/>
+                <a:cs typeface="Calibri" pitchFamily="34" charset="-120"/>
+              </a:rPr>
+              <a:t>Стабильность двух прогонов</a:t>
+            </a:r>
+            <a:endParaRPr lang="en-US" sz="1200" dirty="0"/>
+          </a:p>
+        </p:txBody>
+      </p:sp>
+      <p:sp>
+        <p:nvSpPr>
+          <p:cNvPr id="18" name="Text 16"/>
+          <p:cNvSpPr txBox="1"/>
+          <p:nvPr/>
+        </p:nvSpPr>
+        <p:spPr>
+          <a:xfrm>
+            <a:off x="4800600" y="5596128"/>
+            <a:ext cx="1005840" cy="384048"/>
+          </a:xfrm>
+          <a:prstGeom prst="rect">
+            <a:avLst/>
+          </a:prstGeom>
+          <a:noFill/>
+          <a:ln/>
+        </p:spPr>
+        <p:txBody>
+          <a:bodyPr wrap="square" lIns="0" tIns="0" rIns="0" bIns="0" rtlCol="0" anchor="ctr"/>
+          <a:lstStyle/>
+          <a:p>
+            <a:pPr algn="r" indent="0" marL="0">
+              <a:buNone/>
+            </a:pPr>
+            <a:r>
+              <a:rPr lang="en-US" sz="1200" b="1" dirty="0">
+                <a:solidFill>
+                  <a:srgbClr val="2E7D5B"/>
+                </a:solidFill>
+                <a:latin typeface="Calibri" pitchFamily="34" charset="0"/>
+                <a:ea typeface="Calibri" pitchFamily="34" charset="-122"/>
+                <a:cs typeface="Calibri" pitchFamily="34" charset="-120"/>
+              </a:rPr>
+              <a:t>≥ 0.7</a:t>
+            </a:r>
+            <a:endParaRPr lang="en-US" sz="1200" dirty="0"/>
+          </a:p>
+        </p:txBody>
+      </p:sp>
+      <p:sp>
+        <p:nvSpPr>
+          <p:cNvPr id="19" name="Shape 17"/>
+          <p:cNvSpPr/>
+          <p:nvPr/>
+        </p:nvSpPr>
+        <p:spPr>
+          <a:xfrm>
+            <a:off x="6355080" y="1737360"/>
+            <a:ext cx="5303520" cy="4526280"/>
+          </a:xfrm>
+          <a:prstGeom prst="roundRect">
+            <a:avLst>
+              <a:gd name="adj" fmla="val 1616"/>
+            </a:avLst>
+          </a:prstGeom>
+          <a:solidFill>
+            <a:srgbClr val="EEF2F7"/>
+          </a:solidFill>
+          <a:ln w="12700">
+            <a:solidFill>
+              <a:srgbClr val="D4DCE6"/>
+            </a:solidFill>
+            <a:prstDash val="solid"/>
+          </a:ln>
+        </p:spPr>
+      </p:sp>
+      <p:sp>
+        <p:nvSpPr>
+          <p:cNvPr id="20" name="Text 18"/>
+          <p:cNvSpPr txBox="1"/>
+          <p:nvPr/>
+        </p:nvSpPr>
+        <p:spPr>
+          <a:xfrm>
+            <a:off x="6629400" y="1956816"/>
+            <a:ext cx="4754880" cy="292608"/>
+          </a:xfrm>
+          <a:prstGeom prst="rect">
+            <a:avLst/>
+          </a:prstGeom>
+          <a:noFill/>
+          <a:ln/>
+        </p:spPr>
+        <p:txBody>
+          <a:bodyPr wrap="square" lIns="0" tIns="0" rIns="0" bIns="0" rtlCol="0" anchor="t"/>
+          <a:lstStyle/>
+          <a:p>
+            <a:pPr indent="0" marL="0">
+              <a:buNone/>
+            </a:pPr>
+            <a:r>
+              <a:rPr lang="en-US" sz="1200" b="1" spc="100" kern="0" dirty="0">
+                <a:solidFill>
+                  <a:srgbClr val="13223B"/>
+                </a:solidFill>
+                <a:latin typeface="Calibri" pitchFamily="34" charset="0"/>
+                <a:ea typeface="Calibri" pitchFamily="34" charset="-122"/>
+                <a:cs typeface="Calibri" pitchFamily="34" charset="-120"/>
+              </a:rPr>
+              <a:t>КЛЮЧЕВЫЕ РИСКИ AI-РЕШЕНИЯ</a:t>
+            </a:r>
+            <a:endParaRPr lang="en-US" sz="1200" dirty="0"/>
+          </a:p>
+        </p:txBody>
+      </p:sp>
+      <p:sp>
+        <p:nvSpPr>
+          <p:cNvPr id="21" name="Text 19"/>
+          <p:cNvSpPr txBox="1"/>
+          <p:nvPr/>
+        </p:nvSpPr>
+        <p:spPr>
+          <a:xfrm>
+            <a:off x="6629400" y="2395728"/>
+            <a:ext cx="4754880" cy="274320"/>
+          </a:xfrm>
+          <a:prstGeom prst="rect">
+            <a:avLst/>
+          </a:prstGeom>
+          <a:noFill/>
+          <a:ln/>
+        </p:spPr>
+        <p:txBody>
+          <a:bodyPr wrap="square" lIns="0" tIns="0" rIns="0" bIns="0" rtlCol="0" anchor="t"/>
+          <a:lstStyle/>
+          <a:p>
+            <a:pPr indent="0" marL="0">
+              <a:buNone/>
+            </a:pPr>
+            <a:r>
+              <a:rPr lang="en-US" sz="1200" b="1" dirty="0">
+                <a:solidFill>
+                  <a:srgbClr val="1E3252"/>
+                </a:solidFill>
+                <a:latin typeface="Calibri" pitchFamily="34" charset="0"/>
+                <a:ea typeface="Calibri" pitchFamily="34" charset="-122"/>
+                <a:cs typeface="Calibri" pitchFamily="34" charset="-120"/>
+              </a:rPr>
+              <a:t>Ложноположительные замечания</a:t>
+            </a:r>
+            <a:endParaRPr lang="en-US" sz="1200" dirty="0"/>
+          </a:p>
+        </p:txBody>
+      </p:sp>
+      <p:sp>
+        <p:nvSpPr>
+          <p:cNvPr id="22" name="Text 20"/>
+          <p:cNvSpPr txBox="1"/>
+          <p:nvPr/>
+        </p:nvSpPr>
+        <p:spPr>
+          <a:xfrm>
+            <a:off x="6629400" y="2688336"/>
+            <a:ext cx="4754880" cy="457200"/>
+          </a:xfrm>
+          <a:prstGeom prst="rect">
+            <a:avLst/>
+          </a:prstGeom>
+          <a:noFill/>
+          <a:ln/>
+        </p:spPr>
+        <p:txBody>
+          <a:bodyPr wrap="square" lIns="0" tIns="0" rIns="0" bIns="0" rtlCol="0" anchor="t">
+            <a:normAutofit/>
+          </a:bodyPr>
+          <a:lstStyle/>
+          <a:p>
+            <a:pPr indent="0" marL="0">
+              <a:lnSpc>
+                <a:spcPct val="112000"/>
+              </a:lnSpc>
+              <a:buNone/>
+            </a:pPr>
+            <a:r>
+              <a:rPr lang="en-US" sz="1050" dirty="0">
+                <a:solidFill>
+                  <a:srgbClr val="566173"/>
+                </a:solidFill>
+                <a:latin typeface="Calibri" pitchFamily="34" charset="0"/>
+                <a:ea typeface="Calibri" pitchFamily="34" charset="-122"/>
+                <a:cs typeface="Calibri" pitchFamily="34" charset="-120"/>
+              </a:rPr>
+              <a:t>→ критичность, сортировка, фильтр; few-shot на реальных правках</a:t>
+            </a:r>
+            <a:endParaRPr lang="en-US" sz="1050" dirty="0"/>
+          </a:p>
+        </p:txBody>
+      </p:sp>
+      <p:sp>
+        <p:nvSpPr>
+          <p:cNvPr id="23" name="Text 21"/>
+          <p:cNvSpPr txBox="1"/>
+          <p:nvPr/>
+        </p:nvSpPr>
+        <p:spPr>
+          <a:xfrm>
+            <a:off x="6629400" y="3355848"/>
+            <a:ext cx="4754880" cy="274320"/>
+          </a:xfrm>
+          <a:prstGeom prst="rect">
+            <a:avLst/>
+          </a:prstGeom>
+          <a:noFill/>
+          <a:ln/>
+        </p:spPr>
+        <p:txBody>
+          <a:bodyPr wrap="square" lIns="0" tIns="0" rIns="0" bIns="0" rtlCol="0" anchor="t"/>
+          <a:lstStyle/>
+          <a:p>
+            <a:pPr indent="0" marL="0">
+              <a:buNone/>
+            </a:pPr>
+            <a:r>
+              <a:rPr lang="en-US" sz="1200" b="1" dirty="0">
+                <a:solidFill>
+                  <a:srgbClr val="1E3252"/>
+                </a:solidFill>
+                <a:latin typeface="Calibri" pitchFamily="34" charset="0"/>
+                <a:ea typeface="Calibri" pitchFamily="34" charset="-122"/>
+                <a:cs typeface="Calibri" pitchFamily="34" charset="-120"/>
+              </a:rPr>
+              <a:t>Слишком общие советы</a:t>
+            </a:r>
+            <a:endParaRPr lang="en-US" sz="1200" dirty="0"/>
+          </a:p>
+        </p:txBody>
+      </p:sp>
+      <p:sp>
+        <p:nvSpPr>
+          <p:cNvPr id="24" name="Text 22"/>
+          <p:cNvSpPr txBox="1"/>
+          <p:nvPr/>
+        </p:nvSpPr>
+        <p:spPr>
+          <a:xfrm>
+            <a:off x="6629400" y="3648456"/>
+            <a:ext cx="4754880" cy="457200"/>
+          </a:xfrm>
+          <a:prstGeom prst="rect">
+            <a:avLst/>
+          </a:prstGeom>
+          <a:noFill/>
+          <a:ln/>
+        </p:spPr>
+        <p:txBody>
+          <a:bodyPr wrap="square" lIns="0" tIns="0" rIns="0" bIns="0" rtlCol="0" anchor="t">
+            <a:normAutofit/>
+          </a:bodyPr>
+          <a:lstStyle/>
+          <a:p>
+            <a:pPr indent="0" marL="0">
+              <a:lnSpc>
+                <a:spcPct val="112000"/>
+              </a:lnSpc>
+              <a:buNone/>
+            </a:pPr>
+            <a:r>
+              <a:rPr lang="en-US" sz="1050" dirty="0">
+                <a:solidFill>
+                  <a:srgbClr val="566173"/>
+                </a:solidFill>
+                <a:latin typeface="Calibri" pitchFamily="34" charset="0"/>
+                <a:ea typeface="Calibri" pitchFamily="34" charset="-122"/>
+                <a:cs typeface="Calibri" pitchFamily="34" charset="-120"/>
+              </a:rPr>
+              <a:t>→ обязательная цитата в схеме; отбрасывание замечаний без привязки</a:t>
+            </a:r>
+            <a:endParaRPr lang="en-US" sz="1050" dirty="0"/>
+          </a:p>
+        </p:txBody>
+      </p:sp>
+      <p:sp>
+        <p:nvSpPr>
+          <p:cNvPr id="25" name="Text 23"/>
+          <p:cNvSpPr txBox="1"/>
+          <p:nvPr/>
+        </p:nvSpPr>
+        <p:spPr>
+          <a:xfrm>
+            <a:off x="6629400" y="4315968"/>
+            <a:ext cx="4754880" cy="274320"/>
+          </a:xfrm>
+          <a:prstGeom prst="rect">
+            <a:avLst/>
+          </a:prstGeom>
+          <a:noFill/>
+          <a:ln/>
+        </p:spPr>
+        <p:txBody>
+          <a:bodyPr wrap="square" lIns="0" tIns="0" rIns="0" bIns="0" rtlCol="0" anchor="t"/>
+          <a:lstStyle/>
+          <a:p>
+            <a:pPr indent="0" marL="0">
+              <a:buNone/>
+            </a:pPr>
+            <a:r>
+              <a:rPr lang="en-US" sz="1200" b="1" dirty="0">
+                <a:solidFill>
+                  <a:srgbClr val="1E3252"/>
+                </a:solidFill>
+                <a:latin typeface="Calibri" pitchFamily="34" charset="0"/>
+                <a:ea typeface="Calibri" pitchFamily="34" charset="-122"/>
+                <a:cs typeface="Calibri" pitchFamily="34" charset="-120"/>
+              </a:rPr>
+              <a:t>Пропуск важной проблемы</a:t>
+            </a:r>
+            <a:endParaRPr lang="en-US" sz="1200" dirty="0"/>
+          </a:p>
+        </p:txBody>
+      </p:sp>
+      <p:sp>
+        <p:nvSpPr>
+          <p:cNvPr id="26" name="Text 24"/>
+          <p:cNvSpPr txBox="1"/>
+          <p:nvPr/>
+        </p:nvSpPr>
+        <p:spPr>
+          <a:xfrm>
+            <a:off x="6629400" y="4608576"/>
+            <a:ext cx="4754880" cy="457200"/>
+          </a:xfrm>
+          <a:prstGeom prst="rect">
+            <a:avLst/>
+          </a:prstGeom>
+          <a:noFill/>
+          <a:ln/>
+        </p:spPr>
+        <p:txBody>
+          <a:bodyPr wrap="square" lIns="0" tIns="0" rIns="0" bIns="0" rtlCol="0" anchor="t">
+            <a:normAutofit/>
+          </a:bodyPr>
+          <a:lstStyle/>
+          <a:p>
+            <a:pPr indent="0" marL="0">
+              <a:lnSpc>
+                <a:spcPct val="112000"/>
+              </a:lnSpc>
+              <a:buNone/>
+            </a:pPr>
+            <a:r>
+              <a:rPr lang="en-US" sz="1050" dirty="0">
+                <a:solidFill>
+                  <a:srgbClr val="566173"/>
+                </a:solidFill>
+                <a:latin typeface="Calibri" pitchFamily="34" charset="0"/>
+                <a:ea typeface="Calibri" pitchFamily="34" charset="-122"/>
+                <a:cs typeface="Calibri" pitchFamily="34" charset="-120"/>
+              </a:rPr>
+              <a:t>→ эвристики поверх LLM; покрытие шаблона; «не заменяет аналитика»</a:t>
+            </a:r>
+            <a:endParaRPr lang="en-US" sz="1050" dirty="0"/>
+          </a:p>
+        </p:txBody>
+      </p:sp>
+      <p:sp>
+        <p:nvSpPr>
+          <p:cNvPr id="27" name="Text 25"/>
+          <p:cNvSpPr txBox="1"/>
+          <p:nvPr/>
+        </p:nvSpPr>
+        <p:spPr>
+          <a:xfrm>
+            <a:off x="6629400" y="5276088"/>
+            <a:ext cx="4754880" cy="274320"/>
+          </a:xfrm>
+          <a:prstGeom prst="rect">
+            <a:avLst/>
+          </a:prstGeom>
+          <a:noFill/>
+          <a:ln/>
+        </p:spPr>
+        <p:txBody>
+          <a:bodyPr wrap="square" lIns="0" tIns="0" rIns="0" bIns="0" rtlCol="0" anchor="t"/>
+          <a:lstStyle/>
+          <a:p>
+            <a:pPr indent="0" marL="0">
+              <a:buNone/>
+            </a:pPr>
+            <a:r>
+              <a:rPr lang="en-US" sz="1200" b="1" dirty="0">
+                <a:solidFill>
+                  <a:srgbClr val="1E3252"/>
+                </a:solidFill>
+                <a:latin typeface="Calibri" pitchFamily="34" charset="0"/>
+                <a:ea typeface="Calibri" pitchFamily="34" charset="-122"/>
+                <a:cs typeface="Calibri" pitchFamily="34" charset="-120"/>
+              </a:rPr>
+              <a:t>Данные не должны уходить наружу</a:t>
+            </a:r>
+            <a:endParaRPr lang="en-US" sz="1200" dirty="0"/>
+          </a:p>
+        </p:txBody>
+      </p:sp>
+      <p:sp>
+        <p:nvSpPr>
+          <p:cNvPr id="28" name="Text 26"/>
+          <p:cNvSpPr txBox="1"/>
+          <p:nvPr/>
+        </p:nvSpPr>
+        <p:spPr>
+          <a:xfrm>
+            <a:off x="6629400" y="5568696"/>
+            <a:ext cx="4754880" cy="457200"/>
+          </a:xfrm>
+          <a:prstGeom prst="rect">
+            <a:avLst/>
+          </a:prstGeom>
+          <a:noFill/>
+          <a:ln/>
+        </p:spPr>
+        <p:txBody>
+          <a:bodyPr wrap="square" lIns="0" tIns="0" rIns="0" bIns="0" rtlCol="0" anchor="t">
+            <a:normAutofit/>
+          </a:bodyPr>
+          <a:lstStyle/>
+          <a:p>
+            <a:pPr indent="0" marL="0">
+              <a:lnSpc>
+                <a:spcPct val="112000"/>
+              </a:lnSpc>
+              <a:buNone/>
+            </a:pPr>
+            <a:r>
+              <a:rPr lang="en-US" sz="1050" dirty="0">
+                <a:solidFill>
+                  <a:srgbClr val="566173"/>
+                </a:solidFill>
+                <a:latin typeface="Calibri" pitchFamily="34" charset="0"/>
+                <a:ea typeface="Calibri" pitchFamily="34" charset="-122"/>
+                <a:cs typeface="Calibri" pitchFamily="34" charset="-120"/>
+              </a:rPr>
+              <a:t>→ локальный эндпоинт / офлайн-режим; ключи только через окружение</a:t>
+            </a:r>
+            <a:endParaRPr lang="en-US" sz="1050" dirty="0"/>
+          </a:p>
+        </p:txBody>
+      </p:sp>
+    </p:spTree>
+  </p:cSld>
+  <p:clrMapOvr>
+    <a:masterClrMapping/>
+  </p:clrMapOvr>
+</p:sld>
+</file>
+
+<file path=ppt/slides/slide9.xml><?xml version="1.0" encoding="utf-8"?>
+<p:sld xmlns:a="http://schemas.openxmlformats.org/drawingml/2006/main" xmlns:r="http://schemas.openxmlformats.org/officeDocument/2006/relationships" xmlns:p="http://schemas.openxmlformats.org/presentationml/2006/main">
+  <p:cSld name="Slide 9">
     <p:bg>
       <p:bgPr>
         <a:solidFill>
@@ -7689,7 +8453,7 @@
         </p:nvSpPr>
         <p:spPr>
           <a:xfrm>
-            <a:off x="502920" y="402336"/>
+            <a:off x="502920" y="384048"/>
             <a:ext cx="11155680" cy="292608"/>
           </a:xfrm>
           <a:prstGeom prst="rect">
@@ -7699,7 +8463,7 @@
           <a:ln/>
         </p:spPr>
         <p:txBody>
-          <a:bodyPr wrap="square" lIns="0" tIns="0" rIns="0" bIns="0" rtlCol="0" anchor="ctr"/>
+          <a:bodyPr wrap="square" lIns="0" tIns="0" rIns="0" bIns="0" rtlCol="0" anchor="t"/>
           <a:lstStyle/>
           <a:p>
             <a:pPr indent="0" marL="0">
@@ -7728,17 +8492,17 @@
         </p:nvSpPr>
         <p:spPr>
           <a:xfrm>
-            <a:off x="502920" y="676656"/>
-            <a:ext cx="11155680" cy="868680"/>
-          </a:xfrm>
-          <a:prstGeom prst="rect">
-            <a:avLst/>
-          </a:prstGeom>
-          <a:noFill/>
-          <a:ln/>
-        </p:spPr>
-        <p:txBody>
-          <a:bodyPr wrap="square" lIns="0" tIns="0" rIns="0" bIns="0" rtlCol="0" anchor="ctr">
+            <a:off x="502920" y="658368"/>
+            <a:ext cx="11155680" cy="804672"/>
+          </a:xfrm>
+          <a:prstGeom prst="rect">
+            <a:avLst/>
+          </a:prstGeom>
+          <a:noFill/>
+          <a:ln/>
+        </p:spPr>
+        <p:txBody>
+          <a:bodyPr wrap="square" lIns="0" tIns="0" rIns="0" bIns="0" rtlCol="0" anchor="t">
             <a:normAutofit/>
           </a:bodyPr>
           <a:lstStyle/>
@@ -7747,7 +8511,7 @@
               <a:buNone/>
             </a:pPr>
             <a:r>
-              <a:rPr lang="en-US" sz="3000" b="1" dirty="0">
+              <a:rPr lang="en-US" sz="2900" b="1" dirty="0">
                 <a:solidFill>
                   <a:srgbClr val="FFFFFF"/>
                 </a:solidFill>
@@ -7757,7 +8521,7 @@
               </a:rPr>
               <a:t>Команда 6 — распределение задач</a:t>
             </a:r>
-            <a:endParaRPr lang="en-US" sz="3000" dirty="0"/>
+            <a:endParaRPr lang="en-US" sz="2900" dirty="0"/>
           </a:p>
         </p:txBody>
       </p:sp>
@@ -7769,12 +8533,12 @@
         </p:nvSpPr>
         <p:spPr>
           <a:xfrm>
-            <a:off x="502920" y="1737360"/>
-            <a:ext cx="5394960" cy="2788920"/>
+            <a:off x="502920" y="1828800"/>
+            <a:ext cx="5394960" cy="2468880"/>
           </a:xfrm>
           <a:prstGeom prst="roundRect">
             <a:avLst>
-              <a:gd name="adj" fmla="val 2623"/>
+              <a:gd name="adj" fmla="val 2963"/>
             </a:avLst>
           </a:prstGeom>
           <a:solidFill>
@@ -7796,8 +8560,8 @@
         </p:nvSpPr>
         <p:spPr>
           <a:xfrm>
-            <a:off x="758952" y="1938528"/>
-            <a:ext cx="4882896" cy="365760"/>
+            <a:off x="777240" y="2048256"/>
+            <a:ext cx="4846320" cy="384048"/>
           </a:xfrm>
           <a:prstGeom prst="rect">
             <a:avLst/>
@@ -7813,7 +8577,7 @@
               <a:buNone/>
             </a:pPr>
             <a:r>
-              <a:rPr lang="en-US" sz="1700" b="1" dirty="0">
+              <a:rPr lang="en-US" sz="1800" b="1" dirty="0">
                 <a:solidFill>
                   <a:srgbClr val="FFFFFF"/>
                 </a:solidFill>
@@ -7823,7 +8587,7 @@
               </a:rPr>
               <a:t>Кайаал Яхья</a:t>
             </a:r>
-            <a:endParaRPr lang="en-US" sz="1700" dirty="0"/>
+            <a:endParaRPr lang="en-US" sz="1800" dirty="0"/>
           </a:p>
         </p:txBody>
       </p:sp>
@@ -7835,8 +8599,8 @@
         </p:nvSpPr>
         <p:spPr>
           <a:xfrm>
-            <a:off x="758952" y="2304288"/>
-            <a:ext cx="4882896" cy="292608"/>
+            <a:off x="777240" y="2432304"/>
+            <a:ext cx="4846320" cy="292608"/>
           </a:xfrm>
           <a:prstGeom prst="rect">
             <a:avLst/>
@@ -7852,7 +8616,7 @@
               <a:buNone/>
             </a:pPr>
             <a:r>
-              <a:rPr lang="en-US" sz="1100" b="1" dirty="0">
+              <a:rPr lang="en-US" sz="1150" b="1" dirty="0">
                 <a:solidFill>
                   <a:srgbClr val="D98324"/>
                 </a:solidFill>
@@ -7860,9 +8624,9 @@
                 <a:ea typeface="Calibri" pitchFamily="34" charset="-122"/>
                 <a:cs typeface="Calibri" pitchFamily="34" charset="-120"/>
               </a:rPr>
-              <a:t>AI Engineer  ·  участие 50%</a:t>
-            </a:r>
-            <a:endParaRPr lang="en-US" sz="1100" dirty="0"/>
+              <a:t>AI Engineer · участие 50%</a:t>
+            </a:r>
+            <a:endParaRPr lang="en-US" sz="1150" dirty="0"/>
           </a:p>
         </p:txBody>
       </p:sp>
@@ -7874,8 +8638,8 @@
         </p:nvSpPr>
         <p:spPr>
           <a:xfrm>
-            <a:off x="758952" y="2670048"/>
-            <a:ext cx="4882896" cy="1737360"/>
+            <a:off x="777240" y="2834640"/>
+            <a:ext cx="4846320" cy="1371600"/>
           </a:xfrm>
           <a:prstGeom prst="rect">
             <a:avLst/>
@@ -7890,14 +8654,17 @@
           <a:lstStyle/>
           <a:p>
             <a:pPr marL="152400" indent="-152400">
+              <a:lnSpc>
+                <a:spcPct val="100000"/>
+              </a:lnSpc>
               <a:spcAft>
-                <a:spcPts val="800"/>
+                <a:spcPts val="1000"/>
               </a:spcAft>
               <a:buSzPct val="100000"/>
               <a:buChar char="•"/>
             </a:pPr>
             <a:r>
-              <a:rPr lang="en-US" sz="1080" dirty="0">
+              <a:rPr lang="en-US" sz="1250" dirty="0">
                 <a:solidFill>
                   <a:srgbClr val="CBD6E5"/>
                 </a:solidFill>
@@ -7905,20 +8672,23 @@
                 <a:ea typeface="Calibri" pitchFamily="34" charset="-122"/>
                 <a:cs typeface="Calibri" pitchFamily="34" charset="-120"/>
               </a:rPr>
-              <a:t>ядро анализа: LLM-пайплайн, промпты, структурированный вывод</a:t>
-            </a:r>
-            <a:endParaRPr lang="en-US" sz="1080" dirty="0"/>
+              <a:t>LLM-пайплайн, промпты, структурированный вывод</a:t>
+            </a:r>
+            <a:endParaRPr lang="en-US" sz="1250" dirty="0"/>
           </a:p>
           <a:p>
             <a:pPr marL="152400" indent="-152400">
+              <a:lnSpc>
+                <a:spcPct val="100000"/>
+              </a:lnSpc>
               <a:spcAft>
-                <a:spcPts val="800"/>
+                <a:spcPts val="1000"/>
               </a:spcAft>
               <a:buSzPct val="100000"/>
               <a:buChar char="•"/>
             </a:pPr>
             <a:r>
-              <a:rPr lang="en-US" sz="1080" dirty="0">
+              <a:rPr lang="en-US" sz="1250" dirty="0">
                 <a:solidFill>
                   <a:srgbClr val="CBD6E5"/>
                 </a:solidFill>
@@ -7928,18 +8698,21 @@
               </a:rPr>
               <a:t>доменная рубрика и категории замечаний</a:t>
             </a:r>
-            <a:endParaRPr lang="en-US" sz="1080" dirty="0"/>
+            <a:endParaRPr lang="en-US" sz="1250" dirty="0"/>
           </a:p>
           <a:p>
             <a:pPr marL="152400" indent="-152400">
+              <a:lnSpc>
+                <a:spcPct val="100000"/>
+              </a:lnSpc>
               <a:spcAft>
-                <a:spcPts val="800"/>
+                <a:spcPts val="1000"/>
               </a:spcAft>
               <a:buSzPct val="100000"/>
               <a:buChar char="•"/>
             </a:pPr>
             <a:r>
-              <a:rPr lang="en-US" sz="1080" dirty="0">
+              <a:rPr lang="en-US" sz="1250" dirty="0">
                 <a:solidFill>
                   <a:srgbClr val="CBD6E5"/>
                 </a:solidFill>
@@ -7947,20 +8720,23 @@
                 <a:ea typeface="Calibri" pitchFamily="34" charset="-122"/>
                 <a:cs typeface="Calibri" pitchFamily="34" charset="-120"/>
               </a:rPr>
-              <a:t>Streamlit-демо, сценарий демонстрации</a:t>
-            </a:r>
-            <a:endParaRPr lang="en-US" sz="1080" dirty="0"/>
+              <a:t>Streamlit-демо и сценарий демонстрации</a:t>
+            </a:r>
+            <a:endParaRPr lang="en-US" sz="1250" dirty="0"/>
           </a:p>
           <a:p>
             <a:pPr marL="152400" indent="-152400">
+              <a:lnSpc>
+                <a:spcPct val="100000"/>
+              </a:lnSpc>
               <a:spcAft>
-                <a:spcPts val="800"/>
+                <a:spcPts val="1000"/>
               </a:spcAft>
               <a:buSzPct val="100000"/>
               <a:buChar char="•"/>
             </a:pPr>
             <a:r>
-              <a:rPr lang="en-US" sz="1080" dirty="0">
+              <a:rPr lang="en-US" sz="1250" dirty="0">
                 <a:solidFill>
                   <a:srgbClr val="CBD6E5"/>
                 </a:solidFill>
@@ -7970,7 +8746,7 @@
               </a:rPr>
               <a:t>тестирование качества</a:t>
             </a:r>
-            <a:endParaRPr lang="en-US" sz="1080" dirty="0"/>
+            <a:endParaRPr lang="en-US" sz="1250" dirty="0"/>
           </a:p>
         </p:txBody>
       </p:sp>
@@ -7982,12 +8758,12 @@
         </p:nvSpPr>
         <p:spPr>
           <a:xfrm>
-            <a:off x="6263640" y="1737360"/>
-            <a:ext cx="5394960" cy="2788920"/>
+            <a:off x="6263640" y="1828800"/>
+            <a:ext cx="5394960" cy="2468880"/>
           </a:xfrm>
           <a:prstGeom prst="roundRect">
             <a:avLst>
-              <a:gd name="adj" fmla="val 2623"/>
+              <a:gd name="adj" fmla="val 2963"/>
             </a:avLst>
           </a:prstGeom>
           <a:solidFill>
@@ -8009,8 +8785,8 @@
         </p:nvSpPr>
         <p:spPr>
           <a:xfrm>
-            <a:off x="6519672" y="1938528"/>
-            <a:ext cx="4882896" cy="365760"/>
+            <a:off x="6537960" y="2048256"/>
+            <a:ext cx="4846320" cy="384048"/>
           </a:xfrm>
           <a:prstGeom prst="rect">
             <a:avLst/>
@@ -8026,7 +8802,7 @@
               <a:buNone/>
             </a:pPr>
             <a:r>
-              <a:rPr lang="en-US" sz="1700" b="1" dirty="0">
+              <a:rPr lang="en-US" sz="1800" b="1" dirty="0">
                 <a:solidFill>
                   <a:srgbClr val="FFFFFF"/>
                 </a:solidFill>
@@ -8036,7 +8812,7 @@
               </a:rPr>
               <a:t>Караташоглу Фырат</a:t>
             </a:r>
-            <a:endParaRPr lang="en-US" sz="1700" dirty="0"/>
+            <a:endParaRPr lang="en-US" sz="1800" dirty="0"/>
           </a:p>
         </p:txBody>
       </p:sp>
@@ -8048,8 +8824,8 @@
         </p:nvSpPr>
         <p:spPr>
           <a:xfrm>
-            <a:off x="6519672" y="2304288"/>
-            <a:ext cx="4882896" cy="292608"/>
+            <a:off x="6537960" y="2432304"/>
+            <a:ext cx="4846320" cy="292608"/>
           </a:xfrm>
           <a:prstGeom prst="rect">
             <a:avLst/>
@@ -8065,7 +8841,7 @@
               <a:buNone/>
             </a:pPr>
             <a:r>
-              <a:rPr lang="en-US" sz="1100" b="1" dirty="0">
+              <a:rPr lang="en-US" sz="1150" b="1" dirty="0">
                 <a:solidFill>
                   <a:srgbClr val="D98324"/>
                 </a:solidFill>
@@ -8073,9 +8849,9 @@
                 <a:ea typeface="Calibri" pitchFamily="34" charset="-122"/>
                 <a:cs typeface="Calibri" pitchFamily="34" charset="-120"/>
               </a:rPr>
-              <a:t>AI Engineer  ·  участие 50%</a:t>
-            </a:r>
-            <a:endParaRPr lang="en-US" sz="1100" dirty="0"/>
+              <a:t>AI Engineer · участие 50%</a:t>
+            </a:r>
+            <a:endParaRPr lang="en-US" sz="1150" dirty="0"/>
           </a:p>
         </p:txBody>
       </p:sp>
@@ -8087,8 +8863,8 @@
         </p:nvSpPr>
         <p:spPr>
           <a:xfrm>
-            <a:off x="6519672" y="2670048"/>
-            <a:ext cx="4882896" cy="1737360"/>
+            <a:off x="6537960" y="2834640"/>
+            <a:ext cx="4846320" cy="1371600"/>
           </a:xfrm>
           <a:prstGeom prst="rect">
             <a:avLst/>
@@ -8103,14 +8879,17 @@
           <a:lstStyle/>
           <a:p>
             <a:pPr marL="152400" indent="-152400">
+              <a:lnSpc>
+                <a:spcPct val="100000"/>
+              </a:lnSpc>
               <a:spcAft>
-                <a:spcPts val="800"/>
+                <a:spcPts val="1000"/>
               </a:spcAft>
               <a:buSzPct val="100000"/>
               <a:buChar char="•"/>
             </a:pPr>
             <a:r>
-              <a:rPr lang="en-US" sz="1080" dirty="0">
+              <a:rPr lang="en-US" sz="1250" dirty="0">
                 <a:solidFill>
                   <a:srgbClr val="CBD6E5"/>
                 </a:solidFill>
@@ -8118,20 +8897,23 @@
                 <a:ea typeface="Calibri" pitchFamily="34" charset="-122"/>
                 <a:cs typeface="Calibri" pitchFamily="34" charset="-120"/>
               </a:rPr>
-              <a:t>архитектура решения и сборка MVP</a:t>
-            </a:r>
-            <a:endParaRPr lang="en-US" sz="1080" dirty="0"/>
+              <a:t>архитектура и сборка MVP</a:t>
+            </a:r>
+            <a:endParaRPr lang="en-US" sz="1250" dirty="0"/>
           </a:p>
           <a:p>
             <a:pPr marL="152400" indent="-152400">
+              <a:lnSpc>
+                <a:spcPct val="100000"/>
+              </a:lnSpc>
               <a:spcAft>
-                <a:spcPts val="800"/>
+                <a:spcPts val="1000"/>
               </a:spcAft>
               <a:buSzPct val="100000"/>
               <a:buChar char="•"/>
             </a:pPr>
             <a:r>
-              <a:rPr lang="en-US" sz="1080" dirty="0">
+              <a:rPr lang="en-US" sz="1250" dirty="0">
                 <a:solidFill>
                   <a:srgbClr val="CBD6E5"/>
                 </a:solidFill>
@@ -8139,20 +8921,23 @@
                 <a:ea typeface="Calibri" pitchFamily="34" charset="-122"/>
                 <a:cs typeface="Calibri" pitchFamily="34" charset="-120"/>
               </a:rPr>
-              <a:t>модуль разбора документа, эвристики, покрытие шаблона</a:t>
-            </a:r>
-            <a:endParaRPr lang="en-US" sz="1080" dirty="0"/>
+              <a:t>разбор документа, эвристики, покрытие шаблона</a:t>
+            </a:r>
+            <a:endParaRPr lang="en-US" sz="1250" dirty="0"/>
           </a:p>
           <a:p>
             <a:pPr marL="152400" indent="-152400">
+              <a:lnSpc>
+                <a:spcPct val="100000"/>
+              </a:lnSpc>
               <a:spcAft>
-                <a:spcPts val="800"/>
+                <a:spcPts val="1000"/>
               </a:spcAft>
               <a:buSzPct val="100000"/>
               <a:buChar char="•"/>
             </a:pPr>
             <a:r>
-              <a:rPr lang="en-US" sz="1080" dirty="0">
+              <a:rPr lang="en-US" sz="1250" dirty="0">
                 <a:solidFill>
                   <a:srgbClr val="CBD6E5"/>
                 </a:solidFill>
@@ -8160,20 +8945,23 @@
                 <a:ea typeface="Calibri" pitchFamily="34" charset="-122"/>
                 <a:cs typeface="Calibri" pitchFamily="34" charset="-120"/>
               </a:rPr>
-              <a:t>интеграция провайдеров LLM (в т.ч. OpenAI-совместимые)</a:t>
-            </a:r>
-            <a:endParaRPr lang="en-US" sz="1080" dirty="0"/>
+              <a:t>интеграция провайдеров LLM</a:t>
+            </a:r>
+            <a:endParaRPr lang="en-US" sz="1250" dirty="0"/>
           </a:p>
           <a:p>
             <a:pPr marL="152400" indent="-152400">
+              <a:lnSpc>
+                <a:spcPct val="100000"/>
+              </a:lnSpc>
               <a:spcAft>
-                <a:spcPts val="800"/>
+                <a:spcPts val="1000"/>
               </a:spcAft>
               <a:buSzPct val="100000"/>
               <a:buChar char="•"/>
             </a:pPr>
             <a:r>
-              <a:rPr lang="en-US" sz="1080" dirty="0">
+              <a:rPr lang="en-US" sz="1250" dirty="0">
                 <a:solidFill>
                   <a:srgbClr val="CBD6E5"/>
                 </a:solidFill>
@@ -8181,9 +8969,9 @@
                 <a:ea typeface="Calibri" pitchFamily="34" charset="-122"/>
                 <a:cs typeface="Calibri" pitchFamily="34" charset="-120"/>
               </a:rPr>
-              <a:t>подготовка примеров ТЗ и прогоны</a:t>
-            </a:r>
-            <a:endParaRPr lang="en-US" sz="1080" dirty="0"/>
+              <a:t>примеры ТЗ, прогоны, автотесты</a:t>
+            </a:r>
+            <a:endParaRPr lang="en-US" sz="1250" dirty="0"/>
           </a:p>
         </p:txBody>
       </p:sp>
@@ -8195,12 +8983,12 @@
         </p:nvSpPr>
         <p:spPr>
           <a:xfrm>
-            <a:off x="502920" y="4800600"/>
-            <a:ext cx="11155680" cy="1188720"/>
+            <a:off x="502920" y="4617720"/>
+            <a:ext cx="11155680" cy="1371600"/>
           </a:xfrm>
           <a:prstGeom prst="roundRect">
             <a:avLst>
-              <a:gd name="adj" fmla="val 6154"/>
+              <a:gd name="adj" fmla="val 5333"/>
             </a:avLst>
           </a:prstGeom>
           <a:solidFill>
@@ -8217,8 +9005,8 @@
         </p:nvSpPr>
         <p:spPr>
           <a:xfrm>
-            <a:off x="777240" y="4956048"/>
-            <a:ext cx="1828800" cy="329184"/>
+            <a:off x="777240" y="4809744"/>
+            <a:ext cx="2194560" cy="292608"/>
           </a:xfrm>
           <a:prstGeom prst="rect">
             <a:avLst/>
@@ -8242,7 +9030,7 @@
                 <a:ea typeface="Calibri" pitchFamily="34" charset="-122"/>
                 <a:cs typeface="Calibri" pitchFamily="34" charset="-120"/>
               </a:rPr>
-              <a:t>До финала</a:t>
+              <a:t>ДО ФИНАЛА</a:t>
             </a:r>
             <a:endParaRPr lang="en-US" sz="1100" dirty="0"/>
           </a:p>
@@ -8256,8 +9044,8 @@
         </p:nvSpPr>
         <p:spPr>
           <a:xfrm>
-            <a:off x="777240" y="5266944"/>
-            <a:ext cx="10607040" cy="640080"/>
+            <a:off x="777240" y="5138928"/>
+            <a:ext cx="10607040" cy="731520"/>
           </a:xfrm>
           <a:prstGeom prst="rect">
             <a:avLst/>
@@ -8273,12 +9061,12 @@
           <a:p>
             <a:pPr indent="0" marL="0">
               <a:lnSpc>
-                <a:spcPct val="112000"/>
+                <a:spcPct val="125000"/>
               </a:lnSpc>
               <a:buNone/>
             </a:pPr>
             <a:r>
-              <a:rPr lang="en-US" sz="1150" dirty="0">
+              <a:rPr lang="en-US" sz="1250" dirty="0">
                 <a:solidFill>
                   <a:srgbClr val="D6DFEC"/>
                 </a:solidFill>
@@ -8286,9 +9074,9 @@
                 <a:ea typeface="Calibri" pitchFamily="34" charset="-122"/>
                 <a:cs typeface="Calibri" pitchFamily="34" charset="-120"/>
               </a:rPr>
-              <a:t>прогон на примерах кейсодателя  ·  пост-проверка цитат  ·  подсветка фрагмента в тексте  ·  доработка промптов и few-shot  ·  замер метрик  ·  финальная демонстрация и презентация</a:t>
-            </a:r>
-            <a:endParaRPr lang="en-US" sz="1150" dirty="0"/>
+              <a:t>прогон на примерах кейсодателя · пост-проверка цитат · подсветка фрагмента в тексте · доработка промптов · замер метрик · финальная демонстрация</a:t>
+            </a:r>
+            <a:endParaRPr lang="en-US" sz="1250" dirty="0"/>
           </a:p>
         </p:txBody>
       </p:sp>
@@ -8325,7 +9113,7 @@
                 <a:ea typeface="Calibri" pitchFamily="34" charset="-122"/>
                 <a:cs typeface="Calibri" pitchFamily="34" charset="-120"/>
               </a:rPr>
-              <a:t>Архитектурные решения принимаются совместно.</a:t>
+              <a:t>Архитектурные решения и оценка качества — совместно.</a:t>
             </a:r>
             <a:endParaRPr lang="en-US" sz="1050" dirty="0"/>
           </a:p>
